--- a/python-course-ppt/逐节课件/Python讲授课件-单元20.pptx
+++ b/python-course-ppt/逐节课件/Python讲授课件-单元20.pptx
@@ -335,6 +335,86 @@
           </a:p>
         </p:txBody>
       </p:sp>
+      <p:sp>
+        <p:nvSpPr>
+          <p:cNvPr id="2" name="讲课提示"/>
+          <p:cNvSpPr txBox="1"/>
+          <p:nvPr/>
+        </p:nvSpPr>
+        <p:spPr>
+          <a:xfrm>
+            <a:off x="457200" y="457200"/>
+            <a:ext cx="6858000" cy="4800600"/>
+          </a:xfrm>
+          <a:prstGeom prst="rect">
+            <a:avLst/>
+          </a:prstGeom>
+        </p:spPr>
+        <p:txBody>
+          <a:bodyPr wrap="square"/>
+          <a:lstStyle/>
+          <a:p>
+            <a:r>
+              <a:rPr lang="zh-CN" dirty="0"/>
+              <a:t>单元 20 · 单元 20 · 样式与部署</a:t>
+            </a:r>
+          </a:p>
+          <a:p>
+            <a:r>
+              <a:rPr lang="zh-CN" dirty="0"/>
+              <a:t/>
+            </a:r>
+          </a:p>
+          <a:p>
+            <a:r>
+              <a:rPr lang="zh-CN" dirty="0"/>
+              <a:t>本单元包含以下课节：</a:t>
+            </a:r>
+          </a:p>
+          <a:p>
+            <a:r>
+              <a:rPr lang="zh-CN" dirty="0"/>
+              <a:t>· 第 103 节 django-bootstrap5 与页面改造</a:t>
+            </a:r>
+          </a:p>
+          <a:p>
+            <a:r>
+              <a:rPr lang="zh-CN" dirty="0"/>
+              <a:t>· 第 104 节 部署是什么与 requirements.txt</a:t>
+            </a:r>
+          </a:p>
+          <a:p>
+            <a:r>
+              <a:rPr lang="zh-CN" dirty="0"/>
+              <a:t>· 第 105 节 ★ platformshconfig 与本地线上双环境</a:t>
+            </a:r>
+          </a:p>
+          <a:p>
+            <a:r>
+              <a:rPr lang="zh-CN" dirty="0"/>
+              <a:t>· 第 106 节 ★ 三大部署坑</a:t>
+            </a:r>
+          </a:p>
+          <a:p>
+            <a:r>
+              <a:rPr lang="zh-CN" dirty="0"/>
+              <a:t>· 第 107 节 部署上线、错误页与实战</a:t>
+            </a:r>
+          </a:p>
+          <a:p>
+            <a:r>
+              <a:rPr lang="zh-CN" dirty="0"/>
+              <a:t/>
+            </a:r>
+          </a:p>
+          <a:p>
+            <a:r>
+              <a:rPr lang="zh-CN" dirty="0"/>
+              <a:t>开场用 3 分钟讲清：这个单元学完能做出什么，最后会被关卡怎么验。</a:t>
+            </a:r>
+          </a:p>
+        </p:txBody>
+      </p:sp>
     </p:spTree>
   </p:cSld>
   <p:clrMapOvr>
@@ -458,6 +538,104 @@
           </a:p>
         </p:txBody>
       </p:sp>
+      <p:sp>
+        <p:nvSpPr>
+          <p:cNvPr id="2" name="讲课提示"/>
+          <p:cNvSpPr txBox="1"/>
+          <p:nvPr/>
+        </p:nvSpPr>
+        <p:spPr>
+          <a:xfrm>
+            <a:off x="457200" y="457200"/>
+            <a:ext cx="6858000" cy="4800600"/>
+          </a:xfrm>
+          <a:prstGeom prst="rect">
+            <a:avLst/>
+          </a:prstGeom>
+        </p:spPr>
+        <p:txBody>
+          <a:bodyPr wrap="square"/>
+          <a:lstStyle/>
+          <a:p>
+            <a:r>
+              <a:rPr lang="zh-CN" dirty="0"/>
+              <a:t>第 107 节 · 部署上线、错误页与实战</a:t>
+            </a:r>
+          </a:p>
+          <a:p>
+            <a:r>
+              <a:rPr lang="zh-CN" dirty="0"/>
+              <a:t>单元 20 · 样式与部署 · W28</a:t>
+            </a:r>
+          </a:p>
+          <a:p>
+            <a:r>
+              <a:rPr lang="zh-CN" dirty="0"/>
+              <a:t/>
+            </a:r>
+          </a:p>
+          <a:p>
+            <a:r>
+              <a:rPr lang="zh-CN" dirty="0"/>
+              <a:t>学习目标：真正把网站推到公网；会定制 404/500 错误页</a:t>
+            </a:r>
+          </a:p>
+          <a:p>
+            <a:r>
+              <a:rPr lang="zh-CN" dirty="0"/>
+              <a:t/>
+            </a:r>
+          </a:p>
+          <a:p>
+            <a:r>
+              <a:rPr lang="zh-CN" dirty="0"/>
+              <a:t>课堂实操（40 分钟，不看答案）：</a:t>
+            </a:r>
+          </a:p>
+          <a:p>
+            <a:r>
+              <a:rPr lang="zh-CN" dirty="0"/>
+              <a:t>· 走完 Platform.sh 全流程</a:t>
+            </a:r>
+          </a:p>
+          <a:p>
+            <a:r>
+              <a:rPr lang="zh-CN" dirty="0"/>
+              <a:t>· 故意访问不存在的 URL 看定制错误页</a:t>
+            </a:r>
+          </a:p>
+          <a:p>
+            <a:r>
+              <a:rPr lang="zh-CN" dirty="0"/>
+              <a:t/>
+            </a:r>
+          </a:p>
+          <a:p>
+            <a:r>
+              <a:rPr lang="zh-CN" dirty="0"/>
+              <a:t>课后作业：</a:t>
+            </a:r>
+          </a:p>
+          <a:p>
+            <a:r>
+              <a:rPr lang="zh-CN" dirty="0"/>
+              <a:t>· ★ 产出：公网可访问的学习笔记 + 定制错误页</a:t>
+            </a:r>
+          </a:p>
+          <a:p>
+            <a:r>
+              <a:rPr lang="zh-CN" dirty="0"/>
+              <a:t/>
+            </a:r>
+          </a:p>
+          <a:p>
+            <a:r>
+              <a:rPr lang="zh-CN" dirty="0"/>
+              <a:t>节奏：讲 20 分钟 → 学员自己敲 40 分钟（不看答案）→ 对讲评自查 20 分钟 → 写作业 10 分钟。</a:t>
+            </a:r>
+          </a:p>
+        </p:txBody>
+      </p:sp>
     </p:spTree>
   </p:cSld>
   <p:clrMapOvr>
@@ -551,6 +729,74 @@
           </a:p>
         </p:txBody>
       </p:sp>
+      <p:sp>
+        <p:nvSpPr>
+          <p:cNvPr id="2" name="讲课提示"/>
+          <p:cNvSpPr txBox="1"/>
+          <p:nvPr/>
+        </p:nvSpPr>
+        <p:spPr>
+          <a:xfrm>
+            <a:off x="457200" y="457200"/>
+            <a:ext cx="6858000" cy="4800600"/>
+          </a:xfrm>
+          <a:prstGeom prst="rect">
+            <a:avLst/>
+          </a:prstGeom>
+        </p:spPr>
+        <p:txBody>
+          <a:bodyPr wrap="square"/>
+          <a:lstStyle/>
+          <a:p>
+            <a:r>
+              <a:rPr lang="zh-CN" dirty="0"/>
+              <a:t>第 107 节 · 核心知识点：部署上线、错误页与实战</a:t>
+            </a:r>
+          </a:p>
+          <a:p>
+            <a:r>
+              <a:rPr lang="zh-CN" dirty="0"/>
+              <a:t/>
+            </a:r>
+          </a:p>
+          <a:p>
+            <a:r>
+              <a:rPr lang="zh-CN" dirty="0"/>
+              <a:t>讲这一页时：先让学生说出上节课的结论，再逐块讲要点。</a:t>
+            </a:r>
+          </a:p>
+          <a:p>
+            <a:r>
+              <a:rPr lang="zh-CN" dirty="0"/>
+              <a:t>每讲完一块，问一句「这一步如果写错了，报错会长什么样？」——把错误提前讲。</a:t>
+            </a:r>
+          </a:p>
+          <a:p>
+            <a:r>
+              <a:rPr lang="zh-CN" dirty="0"/>
+              <a:t/>
+            </a:r>
+          </a:p>
+          <a:p>
+            <a:r>
+              <a:rPr lang="zh-CN" dirty="0"/>
+              <a:t>本节目标：真正把网站推到公网；会定制 404/500 错误页</a:t>
+            </a:r>
+          </a:p>
+          <a:p>
+            <a:r>
+              <a:rPr lang="zh-CN" dirty="0"/>
+              <a:t/>
+            </a:r>
+          </a:p>
+          <a:p>
+            <a:r>
+              <a:rPr lang="zh-CN" dirty="0"/>
+              <a:t>看不到懂的地方，回讲义对应小节读一遍，再回来对着这页复述一次——能讲出来才算真懂。</a:t>
+            </a:r>
+          </a:p>
+        </p:txBody>
+      </p:sp>
     </p:spTree>
   </p:cSld>
   <p:clrMapOvr>
@@ -620,6 +866,50 @@
           </a:p>
         </p:txBody>
       </p:sp>
+      <p:sp>
+        <p:nvSpPr>
+          <p:cNvPr id="2" name="讲课提示"/>
+          <p:cNvSpPr txBox="1"/>
+          <p:nvPr/>
+        </p:nvSpPr>
+        <p:spPr>
+          <a:xfrm>
+            <a:off x="457200" y="457200"/>
+            <a:ext cx="6858000" cy="4800600"/>
+          </a:xfrm>
+          <a:prstGeom prst="rect">
+            <a:avLst/>
+          </a:prstGeom>
+        </p:spPr>
+        <p:txBody>
+          <a:bodyPr wrap="square"/>
+          <a:lstStyle/>
+          <a:p>
+            <a:r>
+              <a:rPr lang="zh-CN" dirty="0"/>
+              <a:t>单元 20 小结 · 单元 20 · 小结</a:t>
+            </a:r>
+          </a:p>
+          <a:p>
+            <a:r>
+              <a:rPr lang="zh-CN" dirty="0"/>
+              <a:t/>
+            </a:r>
+          </a:p>
+          <a:p>
+            <a:r>
+              <a:rPr lang="zh-CN" dirty="0"/>
+              <a:t>收尾动作：让学生合上讲义，口述本单元三个最重要的结论；说不出来的，回对应课节。</a:t>
+            </a:r>
+          </a:p>
+          <a:p>
+            <a:r>
+              <a:rPr lang="zh-CN" dirty="0"/>
+              <a:t>然后当场勾一遍本单元课节的「已完成」，没打勾的进下一单元前补掉。</a:t>
+            </a:r>
+          </a:p>
+        </p:txBody>
+      </p:sp>
     </p:spTree>
   </p:cSld>
   <p:clrMapOvr>
@@ -743,6 +1033,104 @@
           </a:p>
         </p:txBody>
       </p:sp>
+      <p:sp>
+        <p:nvSpPr>
+          <p:cNvPr id="2" name="讲课提示"/>
+          <p:cNvSpPr txBox="1"/>
+          <p:nvPr/>
+        </p:nvSpPr>
+        <p:spPr>
+          <a:xfrm>
+            <a:off x="457200" y="457200"/>
+            <a:ext cx="6858000" cy="4800600"/>
+          </a:xfrm>
+          <a:prstGeom prst="rect">
+            <a:avLst/>
+          </a:prstGeom>
+        </p:spPr>
+        <p:txBody>
+          <a:bodyPr wrap="square"/>
+          <a:lstStyle/>
+          <a:p>
+            <a:r>
+              <a:rPr lang="zh-CN" dirty="0"/>
+              <a:t>第 103 节 · django-bootstrap5 与页面改造</a:t>
+            </a:r>
+          </a:p>
+          <a:p>
+            <a:r>
+              <a:rPr lang="zh-CN" dirty="0"/>
+              <a:t>单元 20 · 样式与部署 · W26–W27</a:t>
+            </a:r>
+          </a:p>
+          <a:p>
+            <a:r>
+              <a:rPr lang="zh-CN" dirty="0"/>
+              <a:t/>
+            </a:r>
+          </a:p>
+          <a:p>
+            <a:r>
+              <a:rPr lang="zh-CN" dirty="0"/>
+              <a:t>学习目标：会用 `{% bootstrap_form %}` 自动渲染表单；会改 base.html 与各页面</a:t>
+            </a:r>
+          </a:p>
+          <a:p>
+            <a:r>
+              <a:rPr lang="zh-CN" dirty="0"/>
+              <a:t/>
+            </a:r>
+          </a:p>
+          <a:p>
+            <a:r>
+              <a:rPr lang="zh-CN" dirty="0"/>
+              <a:t>课堂实操（40 分钟，不看答案）：</a:t>
+            </a:r>
+          </a:p>
+          <a:p>
+            <a:r>
+              <a:rPr lang="zh-CN" dirty="0"/>
+              <a:t>· 装上 django-bootstrap5 并渲染表单</a:t>
+            </a:r>
+          </a:p>
+          <a:p>
+            <a:r>
+              <a:rPr lang="zh-CN" dirty="0"/>
+              <a:t>· 故意把 jumbotron 类去掉看效果</a:t>
+            </a:r>
+          </a:p>
+          <a:p>
+            <a:r>
+              <a:rPr lang="zh-CN" dirty="0"/>
+              <a:t/>
+            </a:r>
+          </a:p>
+          <a:p>
+            <a:r>
+              <a:rPr lang="zh-CN" dirty="0"/>
+              <a:t>课后作业：</a:t>
+            </a:r>
+          </a:p>
+          <a:p>
+            <a:r>
+              <a:rPr lang="zh-CN" dirty="0"/>
+              <a:t>· 完成教材 20.1 全部动手练</a:t>
+            </a:r>
+          </a:p>
+          <a:p>
+            <a:r>
+              <a:rPr lang="zh-CN" dirty="0"/>
+              <a:t/>
+            </a:r>
+          </a:p>
+          <a:p>
+            <a:r>
+              <a:rPr lang="zh-CN" dirty="0"/>
+              <a:t>节奏：讲 20 分钟 → 学员自己敲 40 分钟（不看答案）→ 对讲评自查 20 分钟 → 写作业 10 分钟。</a:t>
+            </a:r>
+          </a:p>
+        </p:txBody>
+      </p:sp>
     </p:spTree>
   </p:cSld>
   <p:clrMapOvr>
@@ -836,6 +1224,74 @@
           </a:p>
         </p:txBody>
       </p:sp>
+      <p:sp>
+        <p:nvSpPr>
+          <p:cNvPr id="2" name="讲课提示"/>
+          <p:cNvSpPr txBox="1"/>
+          <p:nvPr/>
+        </p:nvSpPr>
+        <p:spPr>
+          <a:xfrm>
+            <a:off x="457200" y="457200"/>
+            <a:ext cx="6858000" cy="4800600"/>
+          </a:xfrm>
+          <a:prstGeom prst="rect">
+            <a:avLst/>
+          </a:prstGeom>
+        </p:spPr>
+        <p:txBody>
+          <a:bodyPr wrap="square"/>
+          <a:lstStyle/>
+          <a:p>
+            <a:r>
+              <a:rPr lang="zh-CN" dirty="0"/>
+              <a:t>第 103 节 · 核心知识点：django-bootstrap5 与页面改造</a:t>
+            </a:r>
+          </a:p>
+          <a:p>
+            <a:r>
+              <a:rPr lang="zh-CN" dirty="0"/>
+              <a:t/>
+            </a:r>
+          </a:p>
+          <a:p>
+            <a:r>
+              <a:rPr lang="zh-CN" dirty="0"/>
+              <a:t>讲这一页时：先让学生说出上节课的结论，再逐块讲要点。</a:t>
+            </a:r>
+          </a:p>
+          <a:p>
+            <a:r>
+              <a:rPr lang="zh-CN" dirty="0"/>
+              <a:t>每讲完一块，问一句「这一步如果写错了，报错会长什么样？」——把错误提前讲。</a:t>
+            </a:r>
+          </a:p>
+          <a:p>
+            <a:r>
+              <a:rPr lang="zh-CN" dirty="0"/>
+              <a:t/>
+            </a:r>
+          </a:p>
+          <a:p>
+            <a:r>
+              <a:rPr lang="zh-CN" dirty="0"/>
+              <a:t>本节目标：会用 `{% bootstrap_form %}` 自动渲染表单；会改 base.html 与各页面</a:t>
+            </a:r>
+          </a:p>
+          <a:p>
+            <a:r>
+              <a:rPr lang="zh-CN" dirty="0"/>
+              <a:t/>
+            </a:r>
+          </a:p>
+          <a:p>
+            <a:r>
+              <a:rPr lang="zh-CN" dirty="0"/>
+              <a:t>看不到懂的地方，回讲义对应小节读一遍，再回来对着这页复述一次——能讲出来才算真懂。</a:t>
+            </a:r>
+          </a:p>
+        </p:txBody>
+      </p:sp>
     </p:spTree>
   </p:cSld>
   <p:clrMapOvr>
@@ -959,6 +1415,104 @@
           </a:p>
         </p:txBody>
       </p:sp>
+      <p:sp>
+        <p:nvSpPr>
+          <p:cNvPr id="2" name="讲课提示"/>
+          <p:cNvSpPr txBox="1"/>
+          <p:nvPr/>
+        </p:nvSpPr>
+        <p:spPr>
+          <a:xfrm>
+            <a:off x="457200" y="457200"/>
+            <a:ext cx="6858000" cy="4800600"/>
+          </a:xfrm>
+          <a:prstGeom prst="rect">
+            <a:avLst/>
+          </a:prstGeom>
+        </p:spPr>
+        <p:txBody>
+          <a:bodyPr wrap="square"/>
+          <a:lstStyle/>
+          <a:p>
+            <a:r>
+              <a:rPr lang="zh-CN" dirty="0"/>
+              <a:t>第 104 节 · 部署是什么与 requirements.txt</a:t>
+            </a:r>
+          </a:p>
+          <a:p>
+            <a:r>
+              <a:rPr lang="zh-CN" dirty="0"/>
+              <a:t>单元 20 · 样式与部署 · W27</a:t>
+            </a:r>
+          </a:p>
+          <a:p>
+            <a:r>
+              <a:rPr lang="zh-CN" dirty="0"/>
+              <a:t/>
+            </a:r>
+          </a:p>
+          <a:p>
+            <a:r>
+              <a:rPr lang="zh-CN" dirty="0"/>
+              <a:t>学习目标：理解部署的目标；知道云环境靠 requirements.txt 重建依赖</a:t>
+            </a:r>
+          </a:p>
+          <a:p>
+            <a:r>
+              <a:rPr lang="zh-CN" dirty="0"/>
+              <a:t/>
+            </a:r>
+          </a:p>
+          <a:p>
+            <a:r>
+              <a:rPr lang="zh-CN" dirty="0"/>
+              <a:t>课堂实操（40 分钟，不看答案）：</a:t>
+            </a:r>
+          </a:p>
+          <a:p>
+            <a:r>
+              <a:rPr lang="zh-CN" dirty="0"/>
+              <a:t>· 用 pip freeze 生成 requirements.txt</a:t>
+            </a:r>
+          </a:p>
+          <a:p>
+            <a:r>
+              <a:rPr lang="zh-CN" dirty="0"/>
+              <a:t>· 在一台「干净环境」里装一遍验证</a:t>
+            </a:r>
+          </a:p>
+          <a:p>
+            <a:r>
+              <a:rPr lang="zh-CN" dirty="0"/>
+              <a:t/>
+            </a:r>
+          </a:p>
+          <a:p>
+            <a:r>
+              <a:rPr lang="zh-CN" dirty="0"/>
+              <a:t>课后作业：</a:t>
+            </a:r>
+          </a:p>
+          <a:p>
+            <a:r>
+              <a:rPr lang="zh-CN" dirty="0"/>
+              <a:t>· 产出：requirements.txt 与 .platform 配置文件</a:t>
+            </a:r>
+          </a:p>
+          <a:p>
+            <a:r>
+              <a:rPr lang="zh-CN" dirty="0"/>
+              <a:t/>
+            </a:r>
+          </a:p>
+          <a:p>
+            <a:r>
+              <a:rPr lang="zh-CN" dirty="0"/>
+              <a:t>节奏：讲 20 分钟 → 学员自己敲 40 分钟（不看答案）→ 对讲评自查 20 分钟 → 写作业 10 分钟。</a:t>
+            </a:r>
+          </a:p>
+        </p:txBody>
+      </p:sp>
     </p:spTree>
   </p:cSld>
   <p:clrMapOvr>
@@ -1052,6 +1606,74 @@
           </a:p>
         </p:txBody>
       </p:sp>
+      <p:sp>
+        <p:nvSpPr>
+          <p:cNvPr id="2" name="讲课提示"/>
+          <p:cNvSpPr txBox="1"/>
+          <p:nvPr/>
+        </p:nvSpPr>
+        <p:spPr>
+          <a:xfrm>
+            <a:off x="457200" y="457200"/>
+            <a:ext cx="6858000" cy="4800600"/>
+          </a:xfrm>
+          <a:prstGeom prst="rect">
+            <a:avLst/>
+          </a:prstGeom>
+        </p:spPr>
+        <p:txBody>
+          <a:bodyPr wrap="square"/>
+          <a:lstStyle/>
+          <a:p>
+            <a:r>
+              <a:rPr lang="zh-CN" dirty="0"/>
+              <a:t>第 104 节 · 核心知识点：部署是什么与 requirements.txt</a:t>
+            </a:r>
+          </a:p>
+          <a:p>
+            <a:r>
+              <a:rPr lang="zh-CN" dirty="0"/>
+              <a:t/>
+            </a:r>
+          </a:p>
+          <a:p>
+            <a:r>
+              <a:rPr lang="zh-CN" dirty="0"/>
+              <a:t>讲这一页时：先让学生说出上节课的结论，再逐块讲要点。</a:t>
+            </a:r>
+          </a:p>
+          <a:p>
+            <a:r>
+              <a:rPr lang="zh-CN" dirty="0"/>
+              <a:t>每讲完一块，问一句「这一步如果写错了，报错会长什么样？」——把错误提前讲。</a:t>
+            </a:r>
+          </a:p>
+          <a:p>
+            <a:r>
+              <a:rPr lang="zh-CN" dirty="0"/>
+              <a:t/>
+            </a:r>
+          </a:p>
+          <a:p>
+            <a:r>
+              <a:rPr lang="zh-CN" dirty="0"/>
+              <a:t>本节目标：理解部署的目标；知道云环境靠 requirements.txt 重建依赖</a:t>
+            </a:r>
+          </a:p>
+          <a:p>
+            <a:r>
+              <a:rPr lang="zh-CN" dirty="0"/>
+              <a:t/>
+            </a:r>
+          </a:p>
+          <a:p>
+            <a:r>
+              <a:rPr lang="zh-CN" dirty="0"/>
+              <a:t>看不到懂的地方，回讲义对应小节读一遍，再回来对着这页复述一次——能讲出来才算真懂。</a:t>
+            </a:r>
+          </a:p>
+        </p:txBody>
+      </p:sp>
     </p:spTree>
   </p:cSld>
   <p:clrMapOvr>
@@ -1175,6 +1797,104 @@
           </a:p>
         </p:txBody>
       </p:sp>
+      <p:sp>
+        <p:nvSpPr>
+          <p:cNvPr id="2" name="讲课提示"/>
+          <p:cNvSpPr txBox="1"/>
+          <p:nvPr/>
+        </p:nvSpPr>
+        <p:spPr>
+          <a:xfrm>
+            <a:off x="457200" y="457200"/>
+            <a:ext cx="6858000" cy="4800600"/>
+          </a:xfrm>
+          <a:prstGeom prst="rect">
+            <a:avLst/>
+          </a:prstGeom>
+        </p:spPr>
+        <p:txBody>
+          <a:bodyPr wrap="square"/>
+          <a:lstStyle/>
+          <a:p>
+            <a:r>
+              <a:rPr lang="zh-CN" dirty="0"/>
+              <a:t>第 105 节 · ★ platformshconfig 与本地线上双环境</a:t>
+            </a:r>
+          </a:p>
+          <a:p>
+            <a:r>
+              <a:rPr lang="zh-CN" dirty="0"/>
+              <a:t>单元 20 · 样式与部署 · W27</a:t>
+            </a:r>
+          </a:p>
+          <a:p>
+            <a:r>
+              <a:rPr lang="zh-CN" dirty="0"/>
+              <a:t/>
+            </a:r>
+          </a:p>
+          <a:p>
+            <a:r>
+              <a:rPr lang="zh-CN" dirty="0"/>
+              <a:t>学习目标：理解同一份代码怎么知道自己在本地还是在云上；会改 settings.py</a:t>
+            </a:r>
+          </a:p>
+          <a:p>
+            <a:r>
+              <a:rPr lang="zh-CN" dirty="0"/>
+              <a:t/>
+            </a:r>
+          </a:p>
+          <a:p>
+            <a:r>
+              <a:rPr lang="zh-CN" dirty="0"/>
+              <a:t>课堂实操（40 分钟，不看答案）：</a:t>
+            </a:r>
+          </a:p>
+          <a:p>
+            <a:r>
+              <a:rPr lang="zh-CN" dirty="0"/>
+              <a:t>· 写 `if os.getenv('PLATFORM_APPLICATION')` 判断分支</a:t>
+            </a:r>
+          </a:p>
+          <a:p>
+            <a:r>
+              <a:rPr lang="zh-CN" dirty="0"/>
+              <a:t>· 本地和「假装线上」各跑一次看差异</a:t>
+            </a:r>
+          </a:p>
+          <a:p>
+            <a:r>
+              <a:rPr lang="zh-CN" dirty="0"/>
+              <a:t/>
+            </a:r>
+          </a:p>
+          <a:p>
+            <a:r>
+              <a:rPr lang="zh-CN" dirty="0"/>
+              <a:t>课后作业：</a:t>
+            </a:r>
+          </a:p>
+          <a:p>
+            <a:r>
+              <a:rPr lang="zh-CN" dirty="0"/>
+              <a:t>· 完成教材 20.2 的配置部分</a:t>
+            </a:r>
+          </a:p>
+          <a:p>
+            <a:r>
+              <a:rPr lang="zh-CN" dirty="0"/>
+              <a:t/>
+            </a:r>
+          </a:p>
+          <a:p>
+            <a:r>
+              <a:rPr lang="zh-CN" dirty="0"/>
+              <a:t>节奏：讲 20 分钟 → 学员自己敲 40 分钟（不看答案）→ 对讲评自查 20 分钟 → 写作业 10 分钟。</a:t>
+            </a:r>
+          </a:p>
+        </p:txBody>
+      </p:sp>
     </p:spTree>
   </p:cSld>
   <p:clrMapOvr>
@@ -1268,6 +1988,74 @@
           </a:p>
         </p:txBody>
       </p:sp>
+      <p:sp>
+        <p:nvSpPr>
+          <p:cNvPr id="2" name="讲课提示"/>
+          <p:cNvSpPr txBox="1"/>
+          <p:nvPr/>
+        </p:nvSpPr>
+        <p:spPr>
+          <a:xfrm>
+            <a:off x="457200" y="457200"/>
+            <a:ext cx="6858000" cy="4800600"/>
+          </a:xfrm>
+          <a:prstGeom prst="rect">
+            <a:avLst/>
+          </a:prstGeom>
+        </p:spPr>
+        <p:txBody>
+          <a:bodyPr wrap="square"/>
+          <a:lstStyle/>
+          <a:p>
+            <a:r>
+              <a:rPr lang="zh-CN" dirty="0"/>
+              <a:t>第 105 节 · 核心知识点：★ platformshconfig 与本地线上双环境</a:t>
+            </a:r>
+          </a:p>
+          <a:p>
+            <a:r>
+              <a:rPr lang="zh-CN" dirty="0"/>
+              <a:t/>
+            </a:r>
+          </a:p>
+          <a:p>
+            <a:r>
+              <a:rPr lang="zh-CN" dirty="0"/>
+              <a:t>讲这一页时：先让学生说出上节课的结论，再逐块讲要点。</a:t>
+            </a:r>
+          </a:p>
+          <a:p>
+            <a:r>
+              <a:rPr lang="zh-CN" dirty="0"/>
+              <a:t>每讲完一块，问一句「这一步如果写错了，报错会长什么样？」——把错误提前讲。</a:t>
+            </a:r>
+          </a:p>
+          <a:p>
+            <a:r>
+              <a:rPr lang="zh-CN" dirty="0"/>
+              <a:t/>
+            </a:r>
+          </a:p>
+          <a:p>
+            <a:r>
+              <a:rPr lang="zh-CN" dirty="0"/>
+              <a:t>本节目标：理解同一份代码怎么知道自己在本地还是在云上；会改 settings.py</a:t>
+            </a:r>
+          </a:p>
+          <a:p>
+            <a:r>
+              <a:rPr lang="zh-CN" dirty="0"/>
+              <a:t/>
+            </a:r>
+          </a:p>
+          <a:p>
+            <a:r>
+              <a:rPr lang="zh-CN" dirty="0"/>
+              <a:t>看不到懂的地方，回讲义对应小节读一遍，再回来对着这页复述一次——能讲出来才算真懂。</a:t>
+            </a:r>
+          </a:p>
+        </p:txBody>
+      </p:sp>
     </p:spTree>
   </p:cSld>
   <p:clrMapOvr>
@@ -1391,6 +2179,104 @@
           </a:p>
         </p:txBody>
       </p:sp>
+      <p:sp>
+        <p:nvSpPr>
+          <p:cNvPr id="2" name="讲课提示"/>
+          <p:cNvSpPr txBox="1"/>
+          <p:nvPr/>
+        </p:nvSpPr>
+        <p:spPr>
+          <a:xfrm>
+            <a:off x="457200" y="457200"/>
+            <a:ext cx="6858000" cy="4800600"/>
+          </a:xfrm>
+          <a:prstGeom prst="rect">
+            <a:avLst/>
+          </a:prstGeom>
+        </p:spPr>
+        <p:txBody>
+          <a:bodyPr wrap="square"/>
+          <a:lstStyle/>
+          <a:p>
+            <a:r>
+              <a:rPr lang="zh-CN" dirty="0"/>
+              <a:t>第 106 节 · ★ 三大部署坑</a:t>
+            </a:r>
+          </a:p>
+          <a:p>
+            <a:r>
+              <a:rPr lang="zh-CN" dirty="0"/>
+              <a:t>单元 20 · 样式与部署 · W27–W28</a:t>
+            </a:r>
+          </a:p>
+          <a:p>
+            <a:r>
+              <a:rPr lang="zh-CN" dirty="0"/>
+              <a:t/>
+            </a:r>
+          </a:p>
+          <a:p>
+            <a:r>
+              <a:rPr lang="zh-CN" dirty="0"/>
+              <a:t>学习目标：记住 ALLOWED_HOSTS / collectstatic / DEBUG 三个坑；能逐条排查</a:t>
+            </a:r>
+          </a:p>
+          <a:p>
+            <a:r>
+              <a:rPr lang="zh-CN" dirty="0"/>
+              <a:t/>
+            </a:r>
+          </a:p>
+          <a:p>
+            <a:r>
+              <a:rPr lang="zh-CN" dirty="0"/>
+              <a:t>课堂实操（40 分钟，不看答案）：</a:t>
+            </a:r>
+          </a:p>
+          <a:p>
+            <a:r>
+              <a:rPr lang="zh-CN" dirty="0"/>
+              <a:t>· 故意不改 ALLOWED_HOSTS 看 400</a:t>
+            </a:r>
+          </a:p>
+          <a:p>
+            <a:r>
+              <a:rPr lang="zh-CN" dirty="0"/>
+              <a:t>· 故意不改 DEBUG 看报错页</a:t>
+            </a:r>
+          </a:p>
+          <a:p>
+            <a:r>
+              <a:rPr lang="zh-CN" dirty="0"/>
+              <a:t/>
+            </a:r>
+          </a:p>
+          <a:p>
+            <a:r>
+              <a:rPr lang="zh-CN" dirty="0"/>
+              <a:t>课后作业：</a:t>
+            </a:r>
+          </a:p>
+          <a:p>
+            <a:r>
+              <a:rPr lang="zh-CN" dirty="0"/>
+              <a:t>· 按上线检查清单逐条过一遍</a:t>
+            </a:r>
+          </a:p>
+          <a:p>
+            <a:r>
+              <a:rPr lang="zh-CN" dirty="0"/>
+              <a:t/>
+            </a:r>
+          </a:p>
+          <a:p>
+            <a:r>
+              <a:rPr lang="zh-CN" dirty="0"/>
+              <a:t>节奏：讲 20 分钟 → 学员自己敲 40 分钟（不看答案）→ 对讲评自查 20 分钟 → 写作业 10 分钟。</a:t>
+            </a:r>
+          </a:p>
+        </p:txBody>
+      </p:sp>
     </p:spTree>
   </p:cSld>
   <p:clrMapOvr>
@@ -1416,6 +2302,74 @@
           <a:chExt cx="0" cy="0"/>
         </a:xfrm>
       </p:grpSpPr>
+      <p:sp>
+        <p:nvSpPr>
+          <p:cNvPr id="2" name="讲课提示"/>
+          <p:cNvSpPr txBox="1"/>
+          <p:nvPr/>
+        </p:nvSpPr>
+        <p:spPr>
+          <a:xfrm>
+            <a:off x="457200" y="457200"/>
+            <a:ext cx="6858000" cy="4800600"/>
+          </a:xfrm>
+          <a:prstGeom prst="rect">
+            <a:avLst/>
+          </a:prstGeom>
+        </p:spPr>
+        <p:txBody>
+          <a:bodyPr wrap="square"/>
+          <a:lstStyle/>
+          <a:p>
+            <a:r>
+              <a:rPr lang="zh-CN" dirty="0"/>
+              <a:t>第 106 节 · 核心知识点：★ 三大部署坑</a:t>
+            </a:r>
+          </a:p>
+          <a:p>
+            <a:r>
+              <a:rPr lang="zh-CN" dirty="0"/>
+              <a:t/>
+            </a:r>
+          </a:p>
+          <a:p>
+            <a:r>
+              <a:rPr lang="zh-CN" dirty="0"/>
+              <a:t>讲这一页时：先让学生说出上节课的结论，再逐块讲要点。</a:t>
+            </a:r>
+          </a:p>
+          <a:p>
+            <a:r>
+              <a:rPr lang="zh-CN" dirty="0"/>
+              <a:t>每讲完一块，问一句「这一步如果写错了，报错会长什么样？」——把错误提前讲。</a:t>
+            </a:r>
+          </a:p>
+          <a:p>
+            <a:r>
+              <a:rPr lang="zh-CN" dirty="0"/>
+              <a:t/>
+            </a:r>
+          </a:p>
+          <a:p>
+            <a:r>
+              <a:rPr lang="zh-CN" dirty="0"/>
+              <a:t>本节目标：记住 ALLOWED_HOSTS / collectstatic / DEBUG 三个坑；能逐条排查</a:t>
+            </a:r>
+          </a:p>
+          <a:p>
+            <a:r>
+              <a:rPr lang="zh-CN" dirty="0"/>
+              <a:t/>
+            </a:r>
+          </a:p>
+          <a:p>
+            <a:r>
+              <a:rPr lang="zh-CN" dirty="0"/>
+              <a:t>看不到懂的地方，回讲义对应小节读一遍，再回来对着这页复述一次——能讲出来才算真懂。</a:t>
+            </a:r>
+          </a:p>
+        </p:txBody>
+      </p:sp>
       <p:sp>
         <p:nvSpPr>
           <p:cNvPr id="2" name="讲课提示"/>

--- a/python-course-ppt/逐节课件/Python讲授课件-单元20.pptx
+++ b/python-course-ppt/逐节课件/Python讲授课件-单元20.pptx
@@ -238,2214 +238,6 @@
 </p:notesMaster>
 </file>
 
-<file path=ppt/notesSlides/notesSlide1.xml><?xml version="1.0" encoding="utf-8"?>
-<p:notes xmlns:a="http://schemas.openxmlformats.org/drawingml/2006/main" xmlns:p="http://schemas.openxmlformats.org/presentationml/2006/main" xmlns:r="http://schemas.openxmlformats.org/officeDocument/2006/relationships">
-  <p:cSld>
-    <p:spTree>
-      <p:nvGrpSpPr>
-        <p:cNvPr id="1" name=""/>
-        <p:cNvGrpSpPr/>
-        <p:nvPr/>
-      </p:nvGrpSpPr>
-      <p:grpSpPr>
-        <a:xfrm>
-          <a:off x="0" y="0"/>
-          <a:ext cx="0" cy="0"/>
-          <a:chOff x="0" y="0"/>
-          <a:chExt cx="0" cy="0"/>
-        </a:xfrm>
-      </p:grpSpPr>
-      <p:sp>
-        <p:nvSpPr>
-          <p:cNvPr id="2" name="讲课提示"/>
-          <p:cNvSpPr txBox="1"/>
-          <p:nvPr/>
-        </p:nvSpPr>
-        <p:spPr>
-          <a:xfrm>
-            <a:off x="457200" y="457200"/>
-            <a:ext cx="6858000" cy="4800600"/>
-          </a:xfrm>
-          <a:prstGeom prst="rect">
-            <a:avLst/>
-          </a:prstGeom>
-        </p:spPr>
-        <p:txBody>
-          <a:bodyPr wrap="square"/>
-          <a:lstStyle/>
-          <a:p>
-            <a:r>
-              <a:rPr lang="zh-CN" dirty="0"/>
-              <a:t>单元 20 · 单元 20 · 样式与部署</a:t>
-            </a:r>
-          </a:p>
-          <a:p>
-            <a:r>
-              <a:rPr lang="zh-CN" dirty="0"/>
-              <a:t/>
-            </a:r>
-          </a:p>
-          <a:p>
-            <a:r>
-              <a:rPr lang="zh-CN" dirty="0"/>
-              <a:t>本单元包含以下课节：</a:t>
-            </a:r>
-          </a:p>
-          <a:p>
-            <a:r>
-              <a:rPr lang="zh-CN" dirty="0"/>
-              <a:t>· 第 103 节 django-bootstrap5 与页面改造</a:t>
-            </a:r>
-          </a:p>
-          <a:p>
-            <a:r>
-              <a:rPr lang="zh-CN" dirty="0"/>
-              <a:t>· 第 104 节 部署是什么与 requirements.txt</a:t>
-            </a:r>
-          </a:p>
-          <a:p>
-            <a:r>
-              <a:rPr lang="zh-CN" dirty="0"/>
-              <a:t>· 第 105 节 ★ platformshconfig 与本地线上双环境</a:t>
-            </a:r>
-          </a:p>
-          <a:p>
-            <a:r>
-              <a:rPr lang="zh-CN" dirty="0"/>
-              <a:t>· 第 106 节 ★ 三大部署坑</a:t>
-            </a:r>
-          </a:p>
-          <a:p>
-            <a:r>
-              <a:rPr lang="zh-CN" dirty="0"/>
-              <a:t>· 第 107 节 部署上线、错误页与实战</a:t>
-            </a:r>
-          </a:p>
-          <a:p>
-            <a:r>
-              <a:rPr lang="zh-CN" dirty="0"/>
-              <a:t/>
-            </a:r>
-          </a:p>
-          <a:p>
-            <a:r>
-              <a:rPr lang="zh-CN" dirty="0"/>
-              <a:t>开场用 3 分钟讲清：这个单元学完能做出什么，最后会被关卡怎么验。</a:t>
-            </a:r>
-          </a:p>
-        </p:txBody>
-      </p:sp>
-      <p:sp>
-        <p:nvSpPr>
-          <p:cNvPr id="2" name="讲课提示"/>
-          <p:cNvSpPr txBox="1"/>
-          <p:nvPr/>
-        </p:nvSpPr>
-        <p:spPr>
-          <a:xfrm>
-            <a:off x="457200" y="457200"/>
-            <a:ext cx="6858000" cy="4800600"/>
-          </a:xfrm>
-          <a:prstGeom prst="rect">
-            <a:avLst/>
-          </a:prstGeom>
-        </p:spPr>
-        <p:txBody>
-          <a:bodyPr wrap="square"/>
-          <a:lstStyle/>
-          <a:p>
-            <a:r>
-              <a:rPr lang="zh-CN" dirty="0"/>
-              <a:t>单元 20 · 单元 20 · 样式与部署</a:t>
-            </a:r>
-          </a:p>
-          <a:p>
-            <a:r>
-              <a:rPr lang="zh-CN" dirty="0"/>
-              <a:t/>
-            </a:r>
-          </a:p>
-          <a:p>
-            <a:r>
-              <a:rPr lang="zh-CN" dirty="0"/>
-              <a:t>本单元包含以下课节：</a:t>
-            </a:r>
-          </a:p>
-          <a:p>
-            <a:r>
-              <a:rPr lang="zh-CN" dirty="0"/>
-              <a:t>· 第 103 节 django-bootstrap5 与页面改造</a:t>
-            </a:r>
-          </a:p>
-          <a:p>
-            <a:r>
-              <a:rPr lang="zh-CN" dirty="0"/>
-              <a:t>· 第 104 节 部署是什么与 requirements.txt</a:t>
-            </a:r>
-          </a:p>
-          <a:p>
-            <a:r>
-              <a:rPr lang="zh-CN" dirty="0"/>
-              <a:t>· 第 105 节 ★ platformshconfig 与本地线上双环境</a:t>
-            </a:r>
-          </a:p>
-          <a:p>
-            <a:r>
-              <a:rPr lang="zh-CN" dirty="0"/>
-              <a:t>· 第 106 节 ★ 三大部署坑</a:t>
-            </a:r>
-          </a:p>
-          <a:p>
-            <a:r>
-              <a:rPr lang="zh-CN" dirty="0"/>
-              <a:t>· 第 107 节 部署上线、错误页与实战</a:t>
-            </a:r>
-          </a:p>
-          <a:p>
-            <a:r>
-              <a:rPr lang="zh-CN" dirty="0"/>
-              <a:t/>
-            </a:r>
-          </a:p>
-          <a:p>
-            <a:r>
-              <a:rPr lang="zh-CN" dirty="0"/>
-              <a:t>开场用 3 分钟讲清：这个单元学完能做出什么，最后会被关卡怎么验。</a:t>
-            </a:r>
-          </a:p>
-        </p:txBody>
-      </p:sp>
-    </p:spTree>
-  </p:cSld>
-  <p:clrMapOvr>
-    <a:masterClrMapping/>
-  </p:clrMapOvr>
-</p:notes>
-</file>
-
-<file path=ppt/notesSlides/notesSlide10.xml><?xml version="1.0" encoding="utf-8"?>
-<p:notes xmlns:a="http://schemas.openxmlformats.org/drawingml/2006/main" xmlns:p="http://schemas.openxmlformats.org/presentationml/2006/main" xmlns:r="http://schemas.openxmlformats.org/officeDocument/2006/relationships">
-  <p:cSld>
-    <p:spTree>
-      <p:nvGrpSpPr>
-        <p:cNvPr id="1" name=""/>
-        <p:cNvGrpSpPr/>
-        <p:nvPr/>
-      </p:nvGrpSpPr>
-      <p:grpSpPr>
-        <a:xfrm>
-          <a:off x="0" y="0"/>
-          <a:ext cx="0" cy="0"/>
-          <a:chOff x="0" y="0"/>
-          <a:chExt cx="0" cy="0"/>
-        </a:xfrm>
-      </p:grpSpPr>
-      <p:sp>
-        <p:nvSpPr>
-          <p:cNvPr id="2" name="讲课提示"/>
-          <p:cNvSpPr txBox="1"/>
-          <p:nvPr/>
-        </p:nvSpPr>
-        <p:spPr>
-          <a:xfrm>
-            <a:off x="457200" y="457200"/>
-            <a:ext cx="6858000" cy="4800600"/>
-          </a:xfrm>
-          <a:prstGeom prst="rect">
-            <a:avLst/>
-          </a:prstGeom>
-        </p:spPr>
-        <p:txBody>
-          <a:bodyPr wrap="square"/>
-          <a:lstStyle/>
-          <a:p>
-            <a:r>
-              <a:rPr lang="zh-CN" dirty="0"/>
-              <a:t>第 107 节 · 部署上线、错误页与实战</a:t>
-            </a:r>
-          </a:p>
-          <a:p>
-            <a:r>
-              <a:rPr lang="zh-CN" dirty="0"/>
-              <a:t>单元 20 · 样式与部署 · W28</a:t>
-            </a:r>
-          </a:p>
-          <a:p>
-            <a:r>
-              <a:rPr lang="zh-CN" dirty="0"/>
-              <a:t/>
-            </a:r>
-          </a:p>
-          <a:p>
-            <a:r>
-              <a:rPr lang="zh-CN" dirty="0"/>
-              <a:t>学习目标：真正把网站推到公网；会定制 404/500 错误页</a:t>
-            </a:r>
-          </a:p>
-          <a:p>
-            <a:r>
-              <a:rPr lang="zh-CN" dirty="0"/>
-              <a:t/>
-            </a:r>
-          </a:p>
-          <a:p>
-            <a:r>
-              <a:rPr lang="zh-CN" dirty="0"/>
-              <a:t>课堂实操（40 分钟，不看答案）：</a:t>
-            </a:r>
-          </a:p>
-          <a:p>
-            <a:r>
-              <a:rPr lang="zh-CN" dirty="0"/>
-              <a:t>· 走完 Platform.sh 全流程</a:t>
-            </a:r>
-          </a:p>
-          <a:p>
-            <a:r>
-              <a:rPr lang="zh-CN" dirty="0"/>
-              <a:t>· 故意访问不存在的 URL 看定制错误页</a:t>
-            </a:r>
-          </a:p>
-          <a:p>
-            <a:r>
-              <a:rPr lang="zh-CN" dirty="0"/>
-              <a:t/>
-            </a:r>
-          </a:p>
-          <a:p>
-            <a:r>
-              <a:rPr lang="zh-CN" dirty="0"/>
-              <a:t>课后作业：</a:t>
-            </a:r>
-          </a:p>
-          <a:p>
-            <a:r>
-              <a:rPr lang="zh-CN" dirty="0"/>
-              <a:t>· ★ 产出：公网可访问的学习笔记 + 定制错误页</a:t>
-            </a:r>
-          </a:p>
-          <a:p>
-            <a:r>
-              <a:rPr lang="zh-CN" dirty="0"/>
-              <a:t/>
-            </a:r>
-          </a:p>
-          <a:p>
-            <a:r>
-              <a:rPr lang="zh-CN" dirty="0"/>
-              <a:t>节奏：讲 20 分钟 → 学员自己敲 40 分钟（不看答案）→ 对讲评自查 20 分钟 → 写作业 10 分钟。</a:t>
-            </a:r>
-          </a:p>
-        </p:txBody>
-      </p:sp>
-      <p:sp>
-        <p:nvSpPr>
-          <p:cNvPr id="2" name="讲课提示"/>
-          <p:cNvSpPr txBox="1"/>
-          <p:nvPr/>
-        </p:nvSpPr>
-        <p:spPr>
-          <a:xfrm>
-            <a:off x="457200" y="457200"/>
-            <a:ext cx="6858000" cy="4800600"/>
-          </a:xfrm>
-          <a:prstGeom prst="rect">
-            <a:avLst/>
-          </a:prstGeom>
-        </p:spPr>
-        <p:txBody>
-          <a:bodyPr wrap="square"/>
-          <a:lstStyle/>
-          <a:p>
-            <a:r>
-              <a:rPr lang="zh-CN" dirty="0"/>
-              <a:t>第 107 节 · 部署上线、错误页与实战</a:t>
-            </a:r>
-          </a:p>
-          <a:p>
-            <a:r>
-              <a:rPr lang="zh-CN" dirty="0"/>
-              <a:t>单元 20 · 样式与部署 · W28</a:t>
-            </a:r>
-          </a:p>
-          <a:p>
-            <a:r>
-              <a:rPr lang="zh-CN" dirty="0"/>
-              <a:t/>
-            </a:r>
-          </a:p>
-          <a:p>
-            <a:r>
-              <a:rPr lang="zh-CN" dirty="0"/>
-              <a:t>学习目标：真正把网站推到公网；会定制 404/500 错误页</a:t>
-            </a:r>
-          </a:p>
-          <a:p>
-            <a:r>
-              <a:rPr lang="zh-CN" dirty="0"/>
-              <a:t/>
-            </a:r>
-          </a:p>
-          <a:p>
-            <a:r>
-              <a:rPr lang="zh-CN" dirty="0"/>
-              <a:t>课堂实操（40 分钟，不看答案）：</a:t>
-            </a:r>
-          </a:p>
-          <a:p>
-            <a:r>
-              <a:rPr lang="zh-CN" dirty="0"/>
-              <a:t>· 走完 Platform.sh 全流程</a:t>
-            </a:r>
-          </a:p>
-          <a:p>
-            <a:r>
-              <a:rPr lang="zh-CN" dirty="0"/>
-              <a:t>· 故意访问不存在的 URL 看定制错误页</a:t>
-            </a:r>
-          </a:p>
-          <a:p>
-            <a:r>
-              <a:rPr lang="zh-CN" dirty="0"/>
-              <a:t/>
-            </a:r>
-          </a:p>
-          <a:p>
-            <a:r>
-              <a:rPr lang="zh-CN" dirty="0"/>
-              <a:t>课后作业：</a:t>
-            </a:r>
-          </a:p>
-          <a:p>
-            <a:r>
-              <a:rPr lang="zh-CN" dirty="0"/>
-              <a:t>· ★ 产出：公网可访问的学习笔记 + 定制错误页</a:t>
-            </a:r>
-          </a:p>
-          <a:p>
-            <a:r>
-              <a:rPr lang="zh-CN" dirty="0"/>
-              <a:t/>
-            </a:r>
-          </a:p>
-          <a:p>
-            <a:r>
-              <a:rPr lang="zh-CN" dirty="0"/>
-              <a:t>节奏：讲 20 分钟 → 学员自己敲 40 分钟（不看答案）→ 对讲评自查 20 分钟 → 写作业 10 分钟。</a:t>
-            </a:r>
-          </a:p>
-        </p:txBody>
-      </p:sp>
-    </p:spTree>
-  </p:cSld>
-  <p:clrMapOvr>
-    <a:masterClrMapping/>
-  </p:clrMapOvr>
-</p:notes>
-</file>
-
-<file path=ppt/notesSlides/notesSlide11.xml><?xml version="1.0" encoding="utf-8"?>
-<p:notes xmlns:a="http://schemas.openxmlformats.org/drawingml/2006/main" xmlns:p="http://schemas.openxmlformats.org/presentationml/2006/main" xmlns:r="http://schemas.openxmlformats.org/officeDocument/2006/relationships">
-  <p:cSld>
-    <p:spTree>
-      <p:nvGrpSpPr>
-        <p:cNvPr id="1" name=""/>
-        <p:cNvGrpSpPr/>
-        <p:nvPr/>
-      </p:nvGrpSpPr>
-      <p:grpSpPr>
-        <a:xfrm>
-          <a:off x="0" y="0"/>
-          <a:ext cx="0" cy="0"/>
-          <a:chOff x="0" y="0"/>
-          <a:chExt cx="0" cy="0"/>
-        </a:xfrm>
-      </p:grpSpPr>
-      <p:sp>
-        <p:nvSpPr>
-          <p:cNvPr id="2" name="讲课提示"/>
-          <p:cNvSpPr txBox="1"/>
-          <p:nvPr/>
-        </p:nvSpPr>
-        <p:spPr>
-          <a:xfrm>
-            <a:off x="457200" y="457200"/>
-            <a:ext cx="6858000" cy="4800600"/>
-          </a:xfrm>
-          <a:prstGeom prst="rect">
-            <a:avLst/>
-          </a:prstGeom>
-        </p:spPr>
-        <p:txBody>
-          <a:bodyPr wrap="square"/>
-          <a:lstStyle/>
-          <a:p>
-            <a:r>
-              <a:rPr lang="zh-CN" dirty="0"/>
-              <a:t>第 107 节 · 核心知识点：部署上线、错误页与实战</a:t>
-            </a:r>
-          </a:p>
-          <a:p>
-            <a:r>
-              <a:rPr lang="zh-CN" dirty="0"/>
-              <a:t/>
-            </a:r>
-          </a:p>
-          <a:p>
-            <a:r>
-              <a:rPr lang="zh-CN" dirty="0"/>
-              <a:t>讲这一页时：先让学生说出上节课的结论，再逐块讲要点。</a:t>
-            </a:r>
-          </a:p>
-          <a:p>
-            <a:r>
-              <a:rPr lang="zh-CN" dirty="0"/>
-              <a:t>每讲完一块，问一句「这一步如果写错了，报错会长什么样？」——把错误提前讲。</a:t>
-            </a:r>
-          </a:p>
-          <a:p>
-            <a:r>
-              <a:rPr lang="zh-CN" dirty="0"/>
-              <a:t/>
-            </a:r>
-          </a:p>
-          <a:p>
-            <a:r>
-              <a:rPr lang="zh-CN" dirty="0"/>
-              <a:t>本节目标：真正把网站推到公网；会定制 404/500 错误页</a:t>
-            </a:r>
-          </a:p>
-          <a:p>
-            <a:r>
-              <a:rPr lang="zh-CN" dirty="0"/>
-              <a:t/>
-            </a:r>
-          </a:p>
-          <a:p>
-            <a:r>
-              <a:rPr lang="zh-CN" dirty="0"/>
-              <a:t>看不到懂的地方，回讲义对应小节读一遍，再回来对着这页复述一次——能讲出来才算真懂。</a:t>
-            </a:r>
-          </a:p>
-        </p:txBody>
-      </p:sp>
-      <p:sp>
-        <p:nvSpPr>
-          <p:cNvPr id="2" name="讲课提示"/>
-          <p:cNvSpPr txBox="1"/>
-          <p:nvPr/>
-        </p:nvSpPr>
-        <p:spPr>
-          <a:xfrm>
-            <a:off x="457200" y="457200"/>
-            <a:ext cx="6858000" cy="4800600"/>
-          </a:xfrm>
-          <a:prstGeom prst="rect">
-            <a:avLst/>
-          </a:prstGeom>
-        </p:spPr>
-        <p:txBody>
-          <a:bodyPr wrap="square"/>
-          <a:lstStyle/>
-          <a:p>
-            <a:r>
-              <a:rPr lang="zh-CN" dirty="0"/>
-              <a:t>第 107 节 · 核心知识点：部署上线、错误页与实战</a:t>
-            </a:r>
-          </a:p>
-          <a:p>
-            <a:r>
-              <a:rPr lang="zh-CN" dirty="0"/>
-              <a:t/>
-            </a:r>
-          </a:p>
-          <a:p>
-            <a:r>
-              <a:rPr lang="zh-CN" dirty="0"/>
-              <a:t>讲这一页时：先让学生说出上节课的结论，再逐块讲要点。</a:t>
-            </a:r>
-          </a:p>
-          <a:p>
-            <a:r>
-              <a:rPr lang="zh-CN" dirty="0"/>
-              <a:t>每讲完一块，问一句「这一步如果写错了，报错会长什么样？」——把错误提前讲。</a:t>
-            </a:r>
-          </a:p>
-          <a:p>
-            <a:r>
-              <a:rPr lang="zh-CN" dirty="0"/>
-              <a:t/>
-            </a:r>
-          </a:p>
-          <a:p>
-            <a:r>
-              <a:rPr lang="zh-CN" dirty="0"/>
-              <a:t>本节目标：真正把网站推到公网；会定制 404/500 错误页</a:t>
-            </a:r>
-          </a:p>
-          <a:p>
-            <a:r>
-              <a:rPr lang="zh-CN" dirty="0"/>
-              <a:t/>
-            </a:r>
-          </a:p>
-          <a:p>
-            <a:r>
-              <a:rPr lang="zh-CN" dirty="0"/>
-              <a:t>看不到懂的地方，回讲义对应小节读一遍，再回来对着这页复述一次——能讲出来才算真懂。</a:t>
-            </a:r>
-          </a:p>
-        </p:txBody>
-      </p:sp>
-    </p:spTree>
-  </p:cSld>
-  <p:clrMapOvr>
-    <a:masterClrMapping/>
-  </p:clrMapOvr>
-</p:notes>
-</file>
-
-<file path=ppt/notesSlides/notesSlide12.xml><?xml version="1.0" encoding="utf-8"?>
-<p:notes xmlns:a="http://schemas.openxmlformats.org/drawingml/2006/main" xmlns:p="http://schemas.openxmlformats.org/presentationml/2006/main" xmlns:r="http://schemas.openxmlformats.org/officeDocument/2006/relationships">
-  <p:cSld>
-    <p:spTree>
-      <p:nvGrpSpPr>
-        <p:cNvPr id="1" name=""/>
-        <p:cNvGrpSpPr/>
-        <p:nvPr/>
-      </p:nvGrpSpPr>
-      <p:grpSpPr>
-        <a:xfrm>
-          <a:off x="0" y="0"/>
-          <a:ext cx="0" cy="0"/>
-          <a:chOff x="0" y="0"/>
-          <a:chExt cx="0" cy="0"/>
-        </a:xfrm>
-      </p:grpSpPr>
-      <p:sp>
-        <p:nvSpPr>
-          <p:cNvPr id="2" name="讲课提示"/>
-          <p:cNvSpPr txBox="1"/>
-          <p:nvPr/>
-        </p:nvSpPr>
-        <p:spPr>
-          <a:xfrm>
-            <a:off x="457200" y="457200"/>
-            <a:ext cx="6858000" cy="4800600"/>
-          </a:xfrm>
-          <a:prstGeom prst="rect">
-            <a:avLst/>
-          </a:prstGeom>
-        </p:spPr>
-        <p:txBody>
-          <a:bodyPr wrap="square"/>
-          <a:lstStyle/>
-          <a:p>
-            <a:r>
-              <a:rPr lang="zh-CN" dirty="0"/>
-              <a:t>单元 20 小结 · 单元 20 · 小结</a:t>
-            </a:r>
-          </a:p>
-          <a:p>
-            <a:r>
-              <a:rPr lang="zh-CN" dirty="0"/>
-              <a:t/>
-            </a:r>
-          </a:p>
-          <a:p>
-            <a:r>
-              <a:rPr lang="zh-CN" dirty="0"/>
-              <a:t>收尾动作：让学生合上讲义，口述本单元三个最重要的结论；说不出来的，回对应课节。</a:t>
-            </a:r>
-          </a:p>
-          <a:p>
-            <a:r>
-              <a:rPr lang="zh-CN" dirty="0"/>
-              <a:t>然后当场勾一遍本单元课节的「已完成」，没打勾的进下一单元前补掉。</a:t>
-            </a:r>
-          </a:p>
-        </p:txBody>
-      </p:sp>
-      <p:sp>
-        <p:nvSpPr>
-          <p:cNvPr id="2" name="讲课提示"/>
-          <p:cNvSpPr txBox="1"/>
-          <p:nvPr/>
-        </p:nvSpPr>
-        <p:spPr>
-          <a:xfrm>
-            <a:off x="457200" y="457200"/>
-            <a:ext cx="6858000" cy="4800600"/>
-          </a:xfrm>
-          <a:prstGeom prst="rect">
-            <a:avLst/>
-          </a:prstGeom>
-        </p:spPr>
-        <p:txBody>
-          <a:bodyPr wrap="square"/>
-          <a:lstStyle/>
-          <a:p>
-            <a:r>
-              <a:rPr lang="zh-CN" dirty="0"/>
-              <a:t>单元 20 小结 · 单元 20 · 小结</a:t>
-            </a:r>
-          </a:p>
-          <a:p>
-            <a:r>
-              <a:rPr lang="zh-CN" dirty="0"/>
-              <a:t/>
-            </a:r>
-          </a:p>
-          <a:p>
-            <a:r>
-              <a:rPr lang="zh-CN" dirty="0"/>
-              <a:t>收尾动作：让学生合上讲义，口述本单元三个最重要的结论；说不出来的，回对应课节。</a:t>
-            </a:r>
-          </a:p>
-          <a:p>
-            <a:r>
-              <a:rPr lang="zh-CN" dirty="0"/>
-              <a:t>然后当场勾一遍本单元课节的「已完成」，没打勾的进下一单元前补掉。</a:t>
-            </a:r>
-          </a:p>
-        </p:txBody>
-      </p:sp>
-    </p:spTree>
-  </p:cSld>
-  <p:clrMapOvr>
-    <a:masterClrMapping/>
-  </p:clrMapOvr>
-</p:notes>
-</file>
-
-<file path=ppt/notesSlides/notesSlide2.xml><?xml version="1.0" encoding="utf-8"?>
-<p:notes xmlns:a="http://schemas.openxmlformats.org/drawingml/2006/main" xmlns:p="http://schemas.openxmlformats.org/presentationml/2006/main" xmlns:r="http://schemas.openxmlformats.org/officeDocument/2006/relationships">
-  <p:cSld>
-    <p:spTree>
-      <p:nvGrpSpPr>
-        <p:cNvPr id="1" name=""/>
-        <p:cNvGrpSpPr/>
-        <p:nvPr/>
-      </p:nvGrpSpPr>
-      <p:grpSpPr>
-        <a:xfrm>
-          <a:off x="0" y="0"/>
-          <a:ext cx="0" cy="0"/>
-          <a:chOff x="0" y="0"/>
-          <a:chExt cx="0" cy="0"/>
-        </a:xfrm>
-      </p:grpSpPr>
-      <p:sp>
-        <p:nvSpPr>
-          <p:cNvPr id="2" name="讲课提示"/>
-          <p:cNvSpPr txBox="1"/>
-          <p:nvPr/>
-        </p:nvSpPr>
-        <p:spPr>
-          <a:xfrm>
-            <a:off x="457200" y="457200"/>
-            <a:ext cx="6858000" cy="4800600"/>
-          </a:xfrm>
-          <a:prstGeom prst="rect">
-            <a:avLst/>
-          </a:prstGeom>
-        </p:spPr>
-        <p:txBody>
-          <a:bodyPr wrap="square"/>
-          <a:lstStyle/>
-          <a:p>
-            <a:r>
-              <a:rPr lang="zh-CN" dirty="0"/>
-              <a:t>第 103 节 · django-bootstrap5 与页面改造</a:t>
-            </a:r>
-          </a:p>
-          <a:p>
-            <a:r>
-              <a:rPr lang="zh-CN" dirty="0"/>
-              <a:t>单元 20 · 样式与部署 · W26–W27</a:t>
-            </a:r>
-          </a:p>
-          <a:p>
-            <a:r>
-              <a:rPr lang="zh-CN" dirty="0"/>
-              <a:t/>
-            </a:r>
-          </a:p>
-          <a:p>
-            <a:r>
-              <a:rPr lang="zh-CN" dirty="0"/>
-              <a:t>学习目标：会用 `{% bootstrap_form %}` 自动渲染表单；会改 base.html 与各页面</a:t>
-            </a:r>
-          </a:p>
-          <a:p>
-            <a:r>
-              <a:rPr lang="zh-CN" dirty="0"/>
-              <a:t/>
-            </a:r>
-          </a:p>
-          <a:p>
-            <a:r>
-              <a:rPr lang="zh-CN" dirty="0"/>
-              <a:t>课堂实操（40 分钟，不看答案）：</a:t>
-            </a:r>
-          </a:p>
-          <a:p>
-            <a:r>
-              <a:rPr lang="zh-CN" dirty="0"/>
-              <a:t>· 装上 django-bootstrap5 并渲染表单</a:t>
-            </a:r>
-          </a:p>
-          <a:p>
-            <a:r>
-              <a:rPr lang="zh-CN" dirty="0"/>
-              <a:t>· 故意把 jumbotron 类去掉看效果</a:t>
-            </a:r>
-          </a:p>
-          <a:p>
-            <a:r>
-              <a:rPr lang="zh-CN" dirty="0"/>
-              <a:t/>
-            </a:r>
-          </a:p>
-          <a:p>
-            <a:r>
-              <a:rPr lang="zh-CN" dirty="0"/>
-              <a:t>课后作业：</a:t>
-            </a:r>
-          </a:p>
-          <a:p>
-            <a:r>
-              <a:rPr lang="zh-CN" dirty="0"/>
-              <a:t>· 完成教材 20.1 全部动手练</a:t>
-            </a:r>
-          </a:p>
-          <a:p>
-            <a:r>
-              <a:rPr lang="zh-CN" dirty="0"/>
-              <a:t/>
-            </a:r>
-          </a:p>
-          <a:p>
-            <a:r>
-              <a:rPr lang="zh-CN" dirty="0"/>
-              <a:t>节奏：讲 20 分钟 → 学员自己敲 40 分钟（不看答案）→ 对讲评自查 20 分钟 → 写作业 10 分钟。</a:t>
-            </a:r>
-          </a:p>
-        </p:txBody>
-      </p:sp>
-      <p:sp>
-        <p:nvSpPr>
-          <p:cNvPr id="2" name="讲课提示"/>
-          <p:cNvSpPr txBox="1"/>
-          <p:nvPr/>
-        </p:nvSpPr>
-        <p:spPr>
-          <a:xfrm>
-            <a:off x="457200" y="457200"/>
-            <a:ext cx="6858000" cy="4800600"/>
-          </a:xfrm>
-          <a:prstGeom prst="rect">
-            <a:avLst/>
-          </a:prstGeom>
-        </p:spPr>
-        <p:txBody>
-          <a:bodyPr wrap="square"/>
-          <a:lstStyle/>
-          <a:p>
-            <a:r>
-              <a:rPr lang="zh-CN" dirty="0"/>
-              <a:t>第 103 节 · django-bootstrap5 与页面改造</a:t>
-            </a:r>
-          </a:p>
-          <a:p>
-            <a:r>
-              <a:rPr lang="zh-CN" dirty="0"/>
-              <a:t>单元 20 · 样式与部署 · W26–W27</a:t>
-            </a:r>
-          </a:p>
-          <a:p>
-            <a:r>
-              <a:rPr lang="zh-CN" dirty="0"/>
-              <a:t/>
-            </a:r>
-          </a:p>
-          <a:p>
-            <a:r>
-              <a:rPr lang="zh-CN" dirty="0"/>
-              <a:t>学习目标：会用 `{% bootstrap_form %}` 自动渲染表单；会改 base.html 与各页面</a:t>
-            </a:r>
-          </a:p>
-          <a:p>
-            <a:r>
-              <a:rPr lang="zh-CN" dirty="0"/>
-              <a:t/>
-            </a:r>
-          </a:p>
-          <a:p>
-            <a:r>
-              <a:rPr lang="zh-CN" dirty="0"/>
-              <a:t>课堂实操（40 分钟，不看答案）：</a:t>
-            </a:r>
-          </a:p>
-          <a:p>
-            <a:r>
-              <a:rPr lang="zh-CN" dirty="0"/>
-              <a:t>· 装上 django-bootstrap5 并渲染表单</a:t>
-            </a:r>
-          </a:p>
-          <a:p>
-            <a:r>
-              <a:rPr lang="zh-CN" dirty="0"/>
-              <a:t>· 故意把 jumbotron 类去掉看效果</a:t>
-            </a:r>
-          </a:p>
-          <a:p>
-            <a:r>
-              <a:rPr lang="zh-CN" dirty="0"/>
-              <a:t/>
-            </a:r>
-          </a:p>
-          <a:p>
-            <a:r>
-              <a:rPr lang="zh-CN" dirty="0"/>
-              <a:t>课后作业：</a:t>
-            </a:r>
-          </a:p>
-          <a:p>
-            <a:r>
-              <a:rPr lang="zh-CN" dirty="0"/>
-              <a:t>· 完成教材 20.1 全部动手练</a:t>
-            </a:r>
-          </a:p>
-          <a:p>
-            <a:r>
-              <a:rPr lang="zh-CN" dirty="0"/>
-              <a:t/>
-            </a:r>
-          </a:p>
-          <a:p>
-            <a:r>
-              <a:rPr lang="zh-CN" dirty="0"/>
-              <a:t>节奏：讲 20 分钟 → 学员自己敲 40 分钟（不看答案）→ 对讲评自查 20 分钟 → 写作业 10 分钟。</a:t>
-            </a:r>
-          </a:p>
-        </p:txBody>
-      </p:sp>
-    </p:spTree>
-  </p:cSld>
-  <p:clrMapOvr>
-    <a:masterClrMapping/>
-  </p:clrMapOvr>
-</p:notes>
-</file>
-
-<file path=ppt/notesSlides/notesSlide3.xml><?xml version="1.0" encoding="utf-8"?>
-<p:notes xmlns:a="http://schemas.openxmlformats.org/drawingml/2006/main" xmlns:p="http://schemas.openxmlformats.org/presentationml/2006/main" xmlns:r="http://schemas.openxmlformats.org/officeDocument/2006/relationships">
-  <p:cSld>
-    <p:spTree>
-      <p:nvGrpSpPr>
-        <p:cNvPr id="1" name=""/>
-        <p:cNvGrpSpPr/>
-        <p:nvPr/>
-      </p:nvGrpSpPr>
-      <p:grpSpPr>
-        <a:xfrm>
-          <a:off x="0" y="0"/>
-          <a:ext cx="0" cy="0"/>
-          <a:chOff x="0" y="0"/>
-          <a:chExt cx="0" cy="0"/>
-        </a:xfrm>
-      </p:grpSpPr>
-      <p:sp>
-        <p:nvSpPr>
-          <p:cNvPr id="2" name="讲课提示"/>
-          <p:cNvSpPr txBox="1"/>
-          <p:nvPr/>
-        </p:nvSpPr>
-        <p:spPr>
-          <a:xfrm>
-            <a:off x="457200" y="457200"/>
-            <a:ext cx="6858000" cy="4800600"/>
-          </a:xfrm>
-          <a:prstGeom prst="rect">
-            <a:avLst/>
-          </a:prstGeom>
-        </p:spPr>
-        <p:txBody>
-          <a:bodyPr wrap="square"/>
-          <a:lstStyle/>
-          <a:p>
-            <a:r>
-              <a:rPr lang="zh-CN" dirty="0"/>
-              <a:t>第 103 节 · 核心知识点：django-bootstrap5 与页面改造</a:t>
-            </a:r>
-          </a:p>
-          <a:p>
-            <a:r>
-              <a:rPr lang="zh-CN" dirty="0"/>
-              <a:t/>
-            </a:r>
-          </a:p>
-          <a:p>
-            <a:r>
-              <a:rPr lang="zh-CN" dirty="0"/>
-              <a:t>讲这一页时：先让学生说出上节课的结论，再逐块讲要点。</a:t>
-            </a:r>
-          </a:p>
-          <a:p>
-            <a:r>
-              <a:rPr lang="zh-CN" dirty="0"/>
-              <a:t>每讲完一块，问一句「这一步如果写错了，报错会长什么样？」——把错误提前讲。</a:t>
-            </a:r>
-          </a:p>
-          <a:p>
-            <a:r>
-              <a:rPr lang="zh-CN" dirty="0"/>
-              <a:t/>
-            </a:r>
-          </a:p>
-          <a:p>
-            <a:r>
-              <a:rPr lang="zh-CN" dirty="0"/>
-              <a:t>本节目标：会用 `{% bootstrap_form %}` 自动渲染表单；会改 base.html 与各页面</a:t>
-            </a:r>
-          </a:p>
-          <a:p>
-            <a:r>
-              <a:rPr lang="zh-CN" dirty="0"/>
-              <a:t/>
-            </a:r>
-          </a:p>
-          <a:p>
-            <a:r>
-              <a:rPr lang="zh-CN" dirty="0"/>
-              <a:t>看不到懂的地方，回讲义对应小节读一遍，再回来对着这页复述一次——能讲出来才算真懂。</a:t>
-            </a:r>
-          </a:p>
-        </p:txBody>
-      </p:sp>
-      <p:sp>
-        <p:nvSpPr>
-          <p:cNvPr id="2" name="讲课提示"/>
-          <p:cNvSpPr txBox="1"/>
-          <p:nvPr/>
-        </p:nvSpPr>
-        <p:spPr>
-          <a:xfrm>
-            <a:off x="457200" y="457200"/>
-            <a:ext cx="6858000" cy="4800600"/>
-          </a:xfrm>
-          <a:prstGeom prst="rect">
-            <a:avLst/>
-          </a:prstGeom>
-        </p:spPr>
-        <p:txBody>
-          <a:bodyPr wrap="square"/>
-          <a:lstStyle/>
-          <a:p>
-            <a:r>
-              <a:rPr lang="zh-CN" dirty="0"/>
-              <a:t>第 103 节 · 核心知识点：django-bootstrap5 与页面改造</a:t>
-            </a:r>
-          </a:p>
-          <a:p>
-            <a:r>
-              <a:rPr lang="zh-CN" dirty="0"/>
-              <a:t/>
-            </a:r>
-          </a:p>
-          <a:p>
-            <a:r>
-              <a:rPr lang="zh-CN" dirty="0"/>
-              <a:t>讲这一页时：先让学生说出上节课的结论，再逐块讲要点。</a:t>
-            </a:r>
-          </a:p>
-          <a:p>
-            <a:r>
-              <a:rPr lang="zh-CN" dirty="0"/>
-              <a:t>每讲完一块，问一句「这一步如果写错了，报错会长什么样？」——把错误提前讲。</a:t>
-            </a:r>
-          </a:p>
-          <a:p>
-            <a:r>
-              <a:rPr lang="zh-CN" dirty="0"/>
-              <a:t/>
-            </a:r>
-          </a:p>
-          <a:p>
-            <a:r>
-              <a:rPr lang="zh-CN" dirty="0"/>
-              <a:t>本节目标：会用 `{% bootstrap_form %}` 自动渲染表单；会改 base.html 与各页面</a:t>
-            </a:r>
-          </a:p>
-          <a:p>
-            <a:r>
-              <a:rPr lang="zh-CN" dirty="0"/>
-              <a:t/>
-            </a:r>
-          </a:p>
-          <a:p>
-            <a:r>
-              <a:rPr lang="zh-CN" dirty="0"/>
-              <a:t>看不到懂的地方，回讲义对应小节读一遍，再回来对着这页复述一次——能讲出来才算真懂。</a:t>
-            </a:r>
-          </a:p>
-        </p:txBody>
-      </p:sp>
-    </p:spTree>
-  </p:cSld>
-  <p:clrMapOvr>
-    <a:masterClrMapping/>
-  </p:clrMapOvr>
-</p:notes>
-</file>
-
-<file path=ppt/notesSlides/notesSlide4.xml><?xml version="1.0" encoding="utf-8"?>
-<p:notes xmlns:a="http://schemas.openxmlformats.org/drawingml/2006/main" xmlns:p="http://schemas.openxmlformats.org/presentationml/2006/main" xmlns:r="http://schemas.openxmlformats.org/officeDocument/2006/relationships">
-  <p:cSld>
-    <p:spTree>
-      <p:nvGrpSpPr>
-        <p:cNvPr id="1" name=""/>
-        <p:cNvGrpSpPr/>
-        <p:nvPr/>
-      </p:nvGrpSpPr>
-      <p:grpSpPr>
-        <a:xfrm>
-          <a:off x="0" y="0"/>
-          <a:ext cx="0" cy="0"/>
-          <a:chOff x="0" y="0"/>
-          <a:chExt cx="0" cy="0"/>
-        </a:xfrm>
-      </p:grpSpPr>
-      <p:sp>
-        <p:nvSpPr>
-          <p:cNvPr id="2" name="讲课提示"/>
-          <p:cNvSpPr txBox="1"/>
-          <p:nvPr/>
-        </p:nvSpPr>
-        <p:spPr>
-          <a:xfrm>
-            <a:off x="457200" y="457200"/>
-            <a:ext cx="6858000" cy="4800600"/>
-          </a:xfrm>
-          <a:prstGeom prst="rect">
-            <a:avLst/>
-          </a:prstGeom>
-        </p:spPr>
-        <p:txBody>
-          <a:bodyPr wrap="square"/>
-          <a:lstStyle/>
-          <a:p>
-            <a:r>
-              <a:rPr lang="zh-CN" dirty="0"/>
-              <a:t>第 104 节 · 部署是什么与 requirements.txt</a:t>
-            </a:r>
-          </a:p>
-          <a:p>
-            <a:r>
-              <a:rPr lang="zh-CN" dirty="0"/>
-              <a:t>单元 20 · 样式与部署 · W27</a:t>
-            </a:r>
-          </a:p>
-          <a:p>
-            <a:r>
-              <a:rPr lang="zh-CN" dirty="0"/>
-              <a:t/>
-            </a:r>
-          </a:p>
-          <a:p>
-            <a:r>
-              <a:rPr lang="zh-CN" dirty="0"/>
-              <a:t>学习目标：理解部署的目标；知道云环境靠 requirements.txt 重建依赖</a:t>
-            </a:r>
-          </a:p>
-          <a:p>
-            <a:r>
-              <a:rPr lang="zh-CN" dirty="0"/>
-              <a:t/>
-            </a:r>
-          </a:p>
-          <a:p>
-            <a:r>
-              <a:rPr lang="zh-CN" dirty="0"/>
-              <a:t>课堂实操（40 分钟，不看答案）：</a:t>
-            </a:r>
-          </a:p>
-          <a:p>
-            <a:r>
-              <a:rPr lang="zh-CN" dirty="0"/>
-              <a:t>· 用 pip freeze 生成 requirements.txt</a:t>
-            </a:r>
-          </a:p>
-          <a:p>
-            <a:r>
-              <a:rPr lang="zh-CN" dirty="0"/>
-              <a:t>· 在一台「干净环境」里装一遍验证</a:t>
-            </a:r>
-          </a:p>
-          <a:p>
-            <a:r>
-              <a:rPr lang="zh-CN" dirty="0"/>
-              <a:t/>
-            </a:r>
-          </a:p>
-          <a:p>
-            <a:r>
-              <a:rPr lang="zh-CN" dirty="0"/>
-              <a:t>课后作业：</a:t>
-            </a:r>
-          </a:p>
-          <a:p>
-            <a:r>
-              <a:rPr lang="zh-CN" dirty="0"/>
-              <a:t>· 产出：requirements.txt 与 .platform 配置文件</a:t>
-            </a:r>
-          </a:p>
-          <a:p>
-            <a:r>
-              <a:rPr lang="zh-CN" dirty="0"/>
-              <a:t/>
-            </a:r>
-          </a:p>
-          <a:p>
-            <a:r>
-              <a:rPr lang="zh-CN" dirty="0"/>
-              <a:t>节奏：讲 20 分钟 → 学员自己敲 40 分钟（不看答案）→ 对讲评自查 20 分钟 → 写作业 10 分钟。</a:t>
-            </a:r>
-          </a:p>
-        </p:txBody>
-      </p:sp>
-      <p:sp>
-        <p:nvSpPr>
-          <p:cNvPr id="2" name="讲课提示"/>
-          <p:cNvSpPr txBox="1"/>
-          <p:nvPr/>
-        </p:nvSpPr>
-        <p:spPr>
-          <a:xfrm>
-            <a:off x="457200" y="457200"/>
-            <a:ext cx="6858000" cy="4800600"/>
-          </a:xfrm>
-          <a:prstGeom prst="rect">
-            <a:avLst/>
-          </a:prstGeom>
-        </p:spPr>
-        <p:txBody>
-          <a:bodyPr wrap="square"/>
-          <a:lstStyle/>
-          <a:p>
-            <a:r>
-              <a:rPr lang="zh-CN" dirty="0"/>
-              <a:t>第 104 节 · 部署是什么与 requirements.txt</a:t>
-            </a:r>
-          </a:p>
-          <a:p>
-            <a:r>
-              <a:rPr lang="zh-CN" dirty="0"/>
-              <a:t>单元 20 · 样式与部署 · W27</a:t>
-            </a:r>
-          </a:p>
-          <a:p>
-            <a:r>
-              <a:rPr lang="zh-CN" dirty="0"/>
-              <a:t/>
-            </a:r>
-          </a:p>
-          <a:p>
-            <a:r>
-              <a:rPr lang="zh-CN" dirty="0"/>
-              <a:t>学习目标：理解部署的目标；知道云环境靠 requirements.txt 重建依赖</a:t>
-            </a:r>
-          </a:p>
-          <a:p>
-            <a:r>
-              <a:rPr lang="zh-CN" dirty="0"/>
-              <a:t/>
-            </a:r>
-          </a:p>
-          <a:p>
-            <a:r>
-              <a:rPr lang="zh-CN" dirty="0"/>
-              <a:t>课堂实操（40 分钟，不看答案）：</a:t>
-            </a:r>
-          </a:p>
-          <a:p>
-            <a:r>
-              <a:rPr lang="zh-CN" dirty="0"/>
-              <a:t>· 用 pip freeze 生成 requirements.txt</a:t>
-            </a:r>
-          </a:p>
-          <a:p>
-            <a:r>
-              <a:rPr lang="zh-CN" dirty="0"/>
-              <a:t>· 在一台「干净环境」里装一遍验证</a:t>
-            </a:r>
-          </a:p>
-          <a:p>
-            <a:r>
-              <a:rPr lang="zh-CN" dirty="0"/>
-              <a:t/>
-            </a:r>
-          </a:p>
-          <a:p>
-            <a:r>
-              <a:rPr lang="zh-CN" dirty="0"/>
-              <a:t>课后作业：</a:t>
-            </a:r>
-          </a:p>
-          <a:p>
-            <a:r>
-              <a:rPr lang="zh-CN" dirty="0"/>
-              <a:t>· 产出：requirements.txt 与 .platform 配置文件</a:t>
-            </a:r>
-          </a:p>
-          <a:p>
-            <a:r>
-              <a:rPr lang="zh-CN" dirty="0"/>
-              <a:t/>
-            </a:r>
-          </a:p>
-          <a:p>
-            <a:r>
-              <a:rPr lang="zh-CN" dirty="0"/>
-              <a:t>节奏：讲 20 分钟 → 学员自己敲 40 分钟（不看答案）→ 对讲评自查 20 分钟 → 写作业 10 分钟。</a:t>
-            </a:r>
-          </a:p>
-        </p:txBody>
-      </p:sp>
-    </p:spTree>
-  </p:cSld>
-  <p:clrMapOvr>
-    <a:masterClrMapping/>
-  </p:clrMapOvr>
-</p:notes>
-</file>
-
-<file path=ppt/notesSlides/notesSlide5.xml><?xml version="1.0" encoding="utf-8"?>
-<p:notes xmlns:a="http://schemas.openxmlformats.org/drawingml/2006/main" xmlns:p="http://schemas.openxmlformats.org/presentationml/2006/main" xmlns:r="http://schemas.openxmlformats.org/officeDocument/2006/relationships">
-  <p:cSld>
-    <p:spTree>
-      <p:nvGrpSpPr>
-        <p:cNvPr id="1" name=""/>
-        <p:cNvGrpSpPr/>
-        <p:nvPr/>
-      </p:nvGrpSpPr>
-      <p:grpSpPr>
-        <a:xfrm>
-          <a:off x="0" y="0"/>
-          <a:ext cx="0" cy="0"/>
-          <a:chOff x="0" y="0"/>
-          <a:chExt cx="0" cy="0"/>
-        </a:xfrm>
-      </p:grpSpPr>
-      <p:sp>
-        <p:nvSpPr>
-          <p:cNvPr id="2" name="讲课提示"/>
-          <p:cNvSpPr txBox="1"/>
-          <p:nvPr/>
-        </p:nvSpPr>
-        <p:spPr>
-          <a:xfrm>
-            <a:off x="457200" y="457200"/>
-            <a:ext cx="6858000" cy="4800600"/>
-          </a:xfrm>
-          <a:prstGeom prst="rect">
-            <a:avLst/>
-          </a:prstGeom>
-        </p:spPr>
-        <p:txBody>
-          <a:bodyPr wrap="square"/>
-          <a:lstStyle/>
-          <a:p>
-            <a:r>
-              <a:rPr lang="zh-CN" dirty="0"/>
-              <a:t>第 104 节 · 核心知识点：部署是什么与 requirements.txt</a:t>
-            </a:r>
-          </a:p>
-          <a:p>
-            <a:r>
-              <a:rPr lang="zh-CN" dirty="0"/>
-              <a:t/>
-            </a:r>
-          </a:p>
-          <a:p>
-            <a:r>
-              <a:rPr lang="zh-CN" dirty="0"/>
-              <a:t>讲这一页时：先让学生说出上节课的结论，再逐块讲要点。</a:t>
-            </a:r>
-          </a:p>
-          <a:p>
-            <a:r>
-              <a:rPr lang="zh-CN" dirty="0"/>
-              <a:t>每讲完一块，问一句「这一步如果写错了，报错会长什么样？」——把错误提前讲。</a:t>
-            </a:r>
-          </a:p>
-          <a:p>
-            <a:r>
-              <a:rPr lang="zh-CN" dirty="0"/>
-              <a:t/>
-            </a:r>
-          </a:p>
-          <a:p>
-            <a:r>
-              <a:rPr lang="zh-CN" dirty="0"/>
-              <a:t>本节目标：理解部署的目标；知道云环境靠 requirements.txt 重建依赖</a:t>
-            </a:r>
-          </a:p>
-          <a:p>
-            <a:r>
-              <a:rPr lang="zh-CN" dirty="0"/>
-              <a:t/>
-            </a:r>
-          </a:p>
-          <a:p>
-            <a:r>
-              <a:rPr lang="zh-CN" dirty="0"/>
-              <a:t>看不到懂的地方，回讲义对应小节读一遍，再回来对着这页复述一次——能讲出来才算真懂。</a:t>
-            </a:r>
-          </a:p>
-        </p:txBody>
-      </p:sp>
-      <p:sp>
-        <p:nvSpPr>
-          <p:cNvPr id="2" name="讲课提示"/>
-          <p:cNvSpPr txBox="1"/>
-          <p:nvPr/>
-        </p:nvSpPr>
-        <p:spPr>
-          <a:xfrm>
-            <a:off x="457200" y="457200"/>
-            <a:ext cx="6858000" cy="4800600"/>
-          </a:xfrm>
-          <a:prstGeom prst="rect">
-            <a:avLst/>
-          </a:prstGeom>
-        </p:spPr>
-        <p:txBody>
-          <a:bodyPr wrap="square"/>
-          <a:lstStyle/>
-          <a:p>
-            <a:r>
-              <a:rPr lang="zh-CN" dirty="0"/>
-              <a:t>第 104 节 · 核心知识点：部署是什么与 requirements.txt</a:t>
-            </a:r>
-          </a:p>
-          <a:p>
-            <a:r>
-              <a:rPr lang="zh-CN" dirty="0"/>
-              <a:t/>
-            </a:r>
-          </a:p>
-          <a:p>
-            <a:r>
-              <a:rPr lang="zh-CN" dirty="0"/>
-              <a:t>讲这一页时：先让学生说出上节课的结论，再逐块讲要点。</a:t>
-            </a:r>
-          </a:p>
-          <a:p>
-            <a:r>
-              <a:rPr lang="zh-CN" dirty="0"/>
-              <a:t>每讲完一块，问一句「这一步如果写错了，报错会长什么样？」——把错误提前讲。</a:t>
-            </a:r>
-          </a:p>
-          <a:p>
-            <a:r>
-              <a:rPr lang="zh-CN" dirty="0"/>
-              <a:t/>
-            </a:r>
-          </a:p>
-          <a:p>
-            <a:r>
-              <a:rPr lang="zh-CN" dirty="0"/>
-              <a:t>本节目标：理解部署的目标；知道云环境靠 requirements.txt 重建依赖</a:t>
-            </a:r>
-          </a:p>
-          <a:p>
-            <a:r>
-              <a:rPr lang="zh-CN" dirty="0"/>
-              <a:t/>
-            </a:r>
-          </a:p>
-          <a:p>
-            <a:r>
-              <a:rPr lang="zh-CN" dirty="0"/>
-              <a:t>看不到懂的地方，回讲义对应小节读一遍，再回来对着这页复述一次——能讲出来才算真懂。</a:t>
-            </a:r>
-          </a:p>
-        </p:txBody>
-      </p:sp>
-    </p:spTree>
-  </p:cSld>
-  <p:clrMapOvr>
-    <a:masterClrMapping/>
-  </p:clrMapOvr>
-</p:notes>
-</file>
-
-<file path=ppt/notesSlides/notesSlide6.xml><?xml version="1.0" encoding="utf-8"?>
-<p:notes xmlns:a="http://schemas.openxmlformats.org/drawingml/2006/main" xmlns:p="http://schemas.openxmlformats.org/presentationml/2006/main" xmlns:r="http://schemas.openxmlformats.org/officeDocument/2006/relationships">
-  <p:cSld>
-    <p:spTree>
-      <p:nvGrpSpPr>
-        <p:cNvPr id="1" name=""/>
-        <p:cNvGrpSpPr/>
-        <p:nvPr/>
-      </p:nvGrpSpPr>
-      <p:grpSpPr>
-        <a:xfrm>
-          <a:off x="0" y="0"/>
-          <a:ext cx="0" cy="0"/>
-          <a:chOff x="0" y="0"/>
-          <a:chExt cx="0" cy="0"/>
-        </a:xfrm>
-      </p:grpSpPr>
-      <p:sp>
-        <p:nvSpPr>
-          <p:cNvPr id="2" name="讲课提示"/>
-          <p:cNvSpPr txBox="1"/>
-          <p:nvPr/>
-        </p:nvSpPr>
-        <p:spPr>
-          <a:xfrm>
-            <a:off x="457200" y="457200"/>
-            <a:ext cx="6858000" cy="4800600"/>
-          </a:xfrm>
-          <a:prstGeom prst="rect">
-            <a:avLst/>
-          </a:prstGeom>
-        </p:spPr>
-        <p:txBody>
-          <a:bodyPr wrap="square"/>
-          <a:lstStyle/>
-          <a:p>
-            <a:r>
-              <a:rPr lang="zh-CN" dirty="0"/>
-              <a:t>第 105 节 · ★ platformshconfig 与本地线上双环境</a:t>
-            </a:r>
-          </a:p>
-          <a:p>
-            <a:r>
-              <a:rPr lang="zh-CN" dirty="0"/>
-              <a:t>单元 20 · 样式与部署 · W27</a:t>
-            </a:r>
-          </a:p>
-          <a:p>
-            <a:r>
-              <a:rPr lang="zh-CN" dirty="0"/>
-              <a:t/>
-            </a:r>
-          </a:p>
-          <a:p>
-            <a:r>
-              <a:rPr lang="zh-CN" dirty="0"/>
-              <a:t>学习目标：理解同一份代码怎么知道自己在本地还是在云上；会改 settings.py</a:t>
-            </a:r>
-          </a:p>
-          <a:p>
-            <a:r>
-              <a:rPr lang="zh-CN" dirty="0"/>
-              <a:t/>
-            </a:r>
-          </a:p>
-          <a:p>
-            <a:r>
-              <a:rPr lang="zh-CN" dirty="0"/>
-              <a:t>课堂实操（40 分钟，不看答案）：</a:t>
-            </a:r>
-          </a:p>
-          <a:p>
-            <a:r>
-              <a:rPr lang="zh-CN" dirty="0"/>
-              <a:t>· 写 `if os.getenv('PLATFORM_APPLICATION')` 判断分支</a:t>
-            </a:r>
-          </a:p>
-          <a:p>
-            <a:r>
-              <a:rPr lang="zh-CN" dirty="0"/>
-              <a:t>· 本地和「假装线上」各跑一次看差异</a:t>
-            </a:r>
-          </a:p>
-          <a:p>
-            <a:r>
-              <a:rPr lang="zh-CN" dirty="0"/>
-              <a:t/>
-            </a:r>
-          </a:p>
-          <a:p>
-            <a:r>
-              <a:rPr lang="zh-CN" dirty="0"/>
-              <a:t>课后作业：</a:t>
-            </a:r>
-          </a:p>
-          <a:p>
-            <a:r>
-              <a:rPr lang="zh-CN" dirty="0"/>
-              <a:t>· 完成教材 20.2 的配置部分</a:t>
-            </a:r>
-          </a:p>
-          <a:p>
-            <a:r>
-              <a:rPr lang="zh-CN" dirty="0"/>
-              <a:t/>
-            </a:r>
-          </a:p>
-          <a:p>
-            <a:r>
-              <a:rPr lang="zh-CN" dirty="0"/>
-              <a:t>节奏：讲 20 分钟 → 学员自己敲 40 分钟（不看答案）→ 对讲评自查 20 分钟 → 写作业 10 分钟。</a:t>
-            </a:r>
-          </a:p>
-        </p:txBody>
-      </p:sp>
-      <p:sp>
-        <p:nvSpPr>
-          <p:cNvPr id="2" name="讲课提示"/>
-          <p:cNvSpPr txBox="1"/>
-          <p:nvPr/>
-        </p:nvSpPr>
-        <p:spPr>
-          <a:xfrm>
-            <a:off x="457200" y="457200"/>
-            <a:ext cx="6858000" cy="4800600"/>
-          </a:xfrm>
-          <a:prstGeom prst="rect">
-            <a:avLst/>
-          </a:prstGeom>
-        </p:spPr>
-        <p:txBody>
-          <a:bodyPr wrap="square"/>
-          <a:lstStyle/>
-          <a:p>
-            <a:r>
-              <a:rPr lang="zh-CN" dirty="0"/>
-              <a:t>第 105 节 · ★ platformshconfig 与本地线上双环境</a:t>
-            </a:r>
-          </a:p>
-          <a:p>
-            <a:r>
-              <a:rPr lang="zh-CN" dirty="0"/>
-              <a:t>单元 20 · 样式与部署 · W27</a:t>
-            </a:r>
-          </a:p>
-          <a:p>
-            <a:r>
-              <a:rPr lang="zh-CN" dirty="0"/>
-              <a:t/>
-            </a:r>
-          </a:p>
-          <a:p>
-            <a:r>
-              <a:rPr lang="zh-CN" dirty="0"/>
-              <a:t>学习目标：理解同一份代码怎么知道自己在本地还是在云上；会改 settings.py</a:t>
-            </a:r>
-          </a:p>
-          <a:p>
-            <a:r>
-              <a:rPr lang="zh-CN" dirty="0"/>
-              <a:t/>
-            </a:r>
-          </a:p>
-          <a:p>
-            <a:r>
-              <a:rPr lang="zh-CN" dirty="0"/>
-              <a:t>课堂实操（40 分钟，不看答案）：</a:t>
-            </a:r>
-          </a:p>
-          <a:p>
-            <a:r>
-              <a:rPr lang="zh-CN" dirty="0"/>
-              <a:t>· 写 `if os.getenv('PLATFORM_APPLICATION')` 判断分支</a:t>
-            </a:r>
-          </a:p>
-          <a:p>
-            <a:r>
-              <a:rPr lang="zh-CN" dirty="0"/>
-              <a:t>· 本地和「假装线上」各跑一次看差异</a:t>
-            </a:r>
-          </a:p>
-          <a:p>
-            <a:r>
-              <a:rPr lang="zh-CN" dirty="0"/>
-              <a:t/>
-            </a:r>
-          </a:p>
-          <a:p>
-            <a:r>
-              <a:rPr lang="zh-CN" dirty="0"/>
-              <a:t>课后作业：</a:t>
-            </a:r>
-          </a:p>
-          <a:p>
-            <a:r>
-              <a:rPr lang="zh-CN" dirty="0"/>
-              <a:t>· 完成教材 20.2 的配置部分</a:t>
-            </a:r>
-          </a:p>
-          <a:p>
-            <a:r>
-              <a:rPr lang="zh-CN" dirty="0"/>
-              <a:t/>
-            </a:r>
-          </a:p>
-          <a:p>
-            <a:r>
-              <a:rPr lang="zh-CN" dirty="0"/>
-              <a:t>节奏：讲 20 分钟 → 学员自己敲 40 分钟（不看答案）→ 对讲评自查 20 分钟 → 写作业 10 分钟。</a:t>
-            </a:r>
-          </a:p>
-        </p:txBody>
-      </p:sp>
-    </p:spTree>
-  </p:cSld>
-  <p:clrMapOvr>
-    <a:masterClrMapping/>
-  </p:clrMapOvr>
-</p:notes>
-</file>
-
-<file path=ppt/notesSlides/notesSlide7.xml><?xml version="1.0" encoding="utf-8"?>
-<p:notes xmlns:a="http://schemas.openxmlformats.org/drawingml/2006/main" xmlns:p="http://schemas.openxmlformats.org/presentationml/2006/main" xmlns:r="http://schemas.openxmlformats.org/officeDocument/2006/relationships">
-  <p:cSld>
-    <p:spTree>
-      <p:nvGrpSpPr>
-        <p:cNvPr id="1" name=""/>
-        <p:cNvGrpSpPr/>
-        <p:nvPr/>
-      </p:nvGrpSpPr>
-      <p:grpSpPr>
-        <a:xfrm>
-          <a:off x="0" y="0"/>
-          <a:ext cx="0" cy="0"/>
-          <a:chOff x="0" y="0"/>
-          <a:chExt cx="0" cy="0"/>
-        </a:xfrm>
-      </p:grpSpPr>
-      <p:sp>
-        <p:nvSpPr>
-          <p:cNvPr id="2" name="讲课提示"/>
-          <p:cNvSpPr txBox="1"/>
-          <p:nvPr/>
-        </p:nvSpPr>
-        <p:spPr>
-          <a:xfrm>
-            <a:off x="457200" y="457200"/>
-            <a:ext cx="6858000" cy="4800600"/>
-          </a:xfrm>
-          <a:prstGeom prst="rect">
-            <a:avLst/>
-          </a:prstGeom>
-        </p:spPr>
-        <p:txBody>
-          <a:bodyPr wrap="square"/>
-          <a:lstStyle/>
-          <a:p>
-            <a:r>
-              <a:rPr lang="zh-CN" dirty="0"/>
-              <a:t>第 105 节 · 核心知识点：★ platformshconfig 与本地线上双环境</a:t>
-            </a:r>
-          </a:p>
-          <a:p>
-            <a:r>
-              <a:rPr lang="zh-CN" dirty="0"/>
-              <a:t/>
-            </a:r>
-          </a:p>
-          <a:p>
-            <a:r>
-              <a:rPr lang="zh-CN" dirty="0"/>
-              <a:t>讲这一页时：先让学生说出上节课的结论，再逐块讲要点。</a:t>
-            </a:r>
-          </a:p>
-          <a:p>
-            <a:r>
-              <a:rPr lang="zh-CN" dirty="0"/>
-              <a:t>每讲完一块，问一句「这一步如果写错了，报错会长什么样？」——把错误提前讲。</a:t>
-            </a:r>
-          </a:p>
-          <a:p>
-            <a:r>
-              <a:rPr lang="zh-CN" dirty="0"/>
-              <a:t/>
-            </a:r>
-          </a:p>
-          <a:p>
-            <a:r>
-              <a:rPr lang="zh-CN" dirty="0"/>
-              <a:t>本节目标：理解同一份代码怎么知道自己在本地还是在云上；会改 settings.py</a:t>
-            </a:r>
-          </a:p>
-          <a:p>
-            <a:r>
-              <a:rPr lang="zh-CN" dirty="0"/>
-              <a:t/>
-            </a:r>
-          </a:p>
-          <a:p>
-            <a:r>
-              <a:rPr lang="zh-CN" dirty="0"/>
-              <a:t>看不到懂的地方，回讲义对应小节读一遍，再回来对着这页复述一次——能讲出来才算真懂。</a:t>
-            </a:r>
-          </a:p>
-        </p:txBody>
-      </p:sp>
-      <p:sp>
-        <p:nvSpPr>
-          <p:cNvPr id="2" name="讲课提示"/>
-          <p:cNvSpPr txBox="1"/>
-          <p:nvPr/>
-        </p:nvSpPr>
-        <p:spPr>
-          <a:xfrm>
-            <a:off x="457200" y="457200"/>
-            <a:ext cx="6858000" cy="4800600"/>
-          </a:xfrm>
-          <a:prstGeom prst="rect">
-            <a:avLst/>
-          </a:prstGeom>
-        </p:spPr>
-        <p:txBody>
-          <a:bodyPr wrap="square"/>
-          <a:lstStyle/>
-          <a:p>
-            <a:r>
-              <a:rPr lang="zh-CN" dirty="0"/>
-              <a:t>第 105 节 · 核心知识点：★ platformshconfig 与本地线上双环境</a:t>
-            </a:r>
-          </a:p>
-          <a:p>
-            <a:r>
-              <a:rPr lang="zh-CN" dirty="0"/>
-              <a:t/>
-            </a:r>
-          </a:p>
-          <a:p>
-            <a:r>
-              <a:rPr lang="zh-CN" dirty="0"/>
-              <a:t>讲这一页时：先让学生说出上节课的结论，再逐块讲要点。</a:t>
-            </a:r>
-          </a:p>
-          <a:p>
-            <a:r>
-              <a:rPr lang="zh-CN" dirty="0"/>
-              <a:t>每讲完一块，问一句「这一步如果写错了，报错会长什么样？」——把错误提前讲。</a:t>
-            </a:r>
-          </a:p>
-          <a:p>
-            <a:r>
-              <a:rPr lang="zh-CN" dirty="0"/>
-              <a:t/>
-            </a:r>
-          </a:p>
-          <a:p>
-            <a:r>
-              <a:rPr lang="zh-CN" dirty="0"/>
-              <a:t>本节目标：理解同一份代码怎么知道自己在本地还是在云上；会改 settings.py</a:t>
-            </a:r>
-          </a:p>
-          <a:p>
-            <a:r>
-              <a:rPr lang="zh-CN" dirty="0"/>
-              <a:t/>
-            </a:r>
-          </a:p>
-          <a:p>
-            <a:r>
-              <a:rPr lang="zh-CN" dirty="0"/>
-              <a:t>看不到懂的地方，回讲义对应小节读一遍，再回来对着这页复述一次——能讲出来才算真懂。</a:t>
-            </a:r>
-          </a:p>
-        </p:txBody>
-      </p:sp>
-    </p:spTree>
-  </p:cSld>
-  <p:clrMapOvr>
-    <a:masterClrMapping/>
-  </p:clrMapOvr>
-</p:notes>
-</file>
-
-<file path=ppt/notesSlides/notesSlide8.xml><?xml version="1.0" encoding="utf-8"?>
-<p:notes xmlns:a="http://schemas.openxmlformats.org/drawingml/2006/main" xmlns:p="http://schemas.openxmlformats.org/presentationml/2006/main" xmlns:r="http://schemas.openxmlformats.org/officeDocument/2006/relationships">
-  <p:cSld>
-    <p:spTree>
-      <p:nvGrpSpPr>
-        <p:cNvPr id="1" name=""/>
-        <p:cNvGrpSpPr/>
-        <p:nvPr/>
-      </p:nvGrpSpPr>
-      <p:grpSpPr>
-        <a:xfrm>
-          <a:off x="0" y="0"/>
-          <a:ext cx="0" cy="0"/>
-          <a:chOff x="0" y="0"/>
-          <a:chExt cx="0" cy="0"/>
-        </a:xfrm>
-      </p:grpSpPr>
-      <p:sp>
-        <p:nvSpPr>
-          <p:cNvPr id="2" name="讲课提示"/>
-          <p:cNvSpPr txBox="1"/>
-          <p:nvPr/>
-        </p:nvSpPr>
-        <p:spPr>
-          <a:xfrm>
-            <a:off x="457200" y="457200"/>
-            <a:ext cx="6858000" cy="4800600"/>
-          </a:xfrm>
-          <a:prstGeom prst="rect">
-            <a:avLst/>
-          </a:prstGeom>
-        </p:spPr>
-        <p:txBody>
-          <a:bodyPr wrap="square"/>
-          <a:lstStyle/>
-          <a:p>
-            <a:r>
-              <a:rPr lang="zh-CN" dirty="0"/>
-              <a:t>第 106 节 · ★ 三大部署坑</a:t>
-            </a:r>
-          </a:p>
-          <a:p>
-            <a:r>
-              <a:rPr lang="zh-CN" dirty="0"/>
-              <a:t>单元 20 · 样式与部署 · W27–W28</a:t>
-            </a:r>
-          </a:p>
-          <a:p>
-            <a:r>
-              <a:rPr lang="zh-CN" dirty="0"/>
-              <a:t/>
-            </a:r>
-          </a:p>
-          <a:p>
-            <a:r>
-              <a:rPr lang="zh-CN" dirty="0"/>
-              <a:t>学习目标：记住 ALLOWED_HOSTS / collectstatic / DEBUG 三个坑；能逐条排查</a:t>
-            </a:r>
-          </a:p>
-          <a:p>
-            <a:r>
-              <a:rPr lang="zh-CN" dirty="0"/>
-              <a:t/>
-            </a:r>
-          </a:p>
-          <a:p>
-            <a:r>
-              <a:rPr lang="zh-CN" dirty="0"/>
-              <a:t>课堂实操（40 分钟，不看答案）：</a:t>
-            </a:r>
-          </a:p>
-          <a:p>
-            <a:r>
-              <a:rPr lang="zh-CN" dirty="0"/>
-              <a:t>· 故意不改 ALLOWED_HOSTS 看 400</a:t>
-            </a:r>
-          </a:p>
-          <a:p>
-            <a:r>
-              <a:rPr lang="zh-CN" dirty="0"/>
-              <a:t>· 故意不改 DEBUG 看报错页</a:t>
-            </a:r>
-          </a:p>
-          <a:p>
-            <a:r>
-              <a:rPr lang="zh-CN" dirty="0"/>
-              <a:t/>
-            </a:r>
-          </a:p>
-          <a:p>
-            <a:r>
-              <a:rPr lang="zh-CN" dirty="0"/>
-              <a:t>课后作业：</a:t>
-            </a:r>
-          </a:p>
-          <a:p>
-            <a:r>
-              <a:rPr lang="zh-CN" dirty="0"/>
-              <a:t>· 按上线检查清单逐条过一遍</a:t>
-            </a:r>
-          </a:p>
-          <a:p>
-            <a:r>
-              <a:rPr lang="zh-CN" dirty="0"/>
-              <a:t/>
-            </a:r>
-          </a:p>
-          <a:p>
-            <a:r>
-              <a:rPr lang="zh-CN" dirty="0"/>
-              <a:t>节奏：讲 20 分钟 → 学员自己敲 40 分钟（不看答案）→ 对讲评自查 20 分钟 → 写作业 10 分钟。</a:t>
-            </a:r>
-          </a:p>
-        </p:txBody>
-      </p:sp>
-      <p:sp>
-        <p:nvSpPr>
-          <p:cNvPr id="2" name="讲课提示"/>
-          <p:cNvSpPr txBox="1"/>
-          <p:nvPr/>
-        </p:nvSpPr>
-        <p:spPr>
-          <a:xfrm>
-            <a:off x="457200" y="457200"/>
-            <a:ext cx="6858000" cy="4800600"/>
-          </a:xfrm>
-          <a:prstGeom prst="rect">
-            <a:avLst/>
-          </a:prstGeom>
-        </p:spPr>
-        <p:txBody>
-          <a:bodyPr wrap="square"/>
-          <a:lstStyle/>
-          <a:p>
-            <a:r>
-              <a:rPr lang="zh-CN" dirty="0"/>
-              <a:t>第 106 节 · ★ 三大部署坑</a:t>
-            </a:r>
-          </a:p>
-          <a:p>
-            <a:r>
-              <a:rPr lang="zh-CN" dirty="0"/>
-              <a:t>单元 20 · 样式与部署 · W27–W28</a:t>
-            </a:r>
-          </a:p>
-          <a:p>
-            <a:r>
-              <a:rPr lang="zh-CN" dirty="0"/>
-              <a:t/>
-            </a:r>
-          </a:p>
-          <a:p>
-            <a:r>
-              <a:rPr lang="zh-CN" dirty="0"/>
-              <a:t>学习目标：记住 ALLOWED_HOSTS / collectstatic / DEBUG 三个坑；能逐条排查</a:t>
-            </a:r>
-          </a:p>
-          <a:p>
-            <a:r>
-              <a:rPr lang="zh-CN" dirty="0"/>
-              <a:t/>
-            </a:r>
-          </a:p>
-          <a:p>
-            <a:r>
-              <a:rPr lang="zh-CN" dirty="0"/>
-              <a:t>课堂实操（40 分钟，不看答案）：</a:t>
-            </a:r>
-          </a:p>
-          <a:p>
-            <a:r>
-              <a:rPr lang="zh-CN" dirty="0"/>
-              <a:t>· 故意不改 ALLOWED_HOSTS 看 400</a:t>
-            </a:r>
-          </a:p>
-          <a:p>
-            <a:r>
-              <a:rPr lang="zh-CN" dirty="0"/>
-              <a:t>· 故意不改 DEBUG 看报错页</a:t>
-            </a:r>
-          </a:p>
-          <a:p>
-            <a:r>
-              <a:rPr lang="zh-CN" dirty="0"/>
-              <a:t/>
-            </a:r>
-          </a:p>
-          <a:p>
-            <a:r>
-              <a:rPr lang="zh-CN" dirty="0"/>
-              <a:t>课后作业：</a:t>
-            </a:r>
-          </a:p>
-          <a:p>
-            <a:r>
-              <a:rPr lang="zh-CN" dirty="0"/>
-              <a:t>· 按上线检查清单逐条过一遍</a:t>
-            </a:r>
-          </a:p>
-          <a:p>
-            <a:r>
-              <a:rPr lang="zh-CN" dirty="0"/>
-              <a:t/>
-            </a:r>
-          </a:p>
-          <a:p>
-            <a:r>
-              <a:rPr lang="zh-CN" dirty="0"/>
-              <a:t>节奏：讲 20 分钟 → 学员自己敲 40 分钟（不看答案）→ 对讲评自查 20 分钟 → 写作业 10 分钟。</a:t>
-            </a:r>
-          </a:p>
-        </p:txBody>
-      </p:sp>
-    </p:spTree>
-  </p:cSld>
-  <p:clrMapOvr>
-    <a:masterClrMapping/>
-  </p:clrMapOvr>
-</p:notes>
-</file>
-
-<file path=ppt/notesSlides/notesSlide9.xml><?xml version="1.0" encoding="utf-8"?>
-<p:notes xmlns:a="http://schemas.openxmlformats.org/drawingml/2006/main" xmlns:p="http://schemas.openxmlformats.org/presentationml/2006/main" xmlns:r="http://schemas.openxmlformats.org/officeDocument/2006/relationships">
-  <p:cSld>
-    <p:spTree>
-      <p:nvGrpSpPr>
-        <p:cNvPr id="1" name=""/>
-        <p:cNvGrpSpPr/>
-        <p:nvPr/>
-      </p:nvGrpSpPr>
-      <p:grpSpPr>
-        <a:xfrm>
-          <a:off x="0" y="0"/>
-          <a:ext cx="0" cy="0"/>
-          <a:chOff x="0" y="0"/>
-          <a:chExt cx="0" cy="0"/>
-        </a:xfrm>
-      </p:grpSpPr>
-      <p:sp>
-        <p:nvSpPr>
-          <p:cNvPr id="2" name="讲课提示"/>
-          <p:cNvSpPr txBox="1"/>
-          <p:nvPr/>
-        </p:nvSpPr>
-        <p:spPr>
-          <a:xfrm>
-            <a:off x="457200" y="457200"/>
-            <a:ext cx="6858000" cy="4800600"/>
-          </a:xfrm>
-          <a:prstGeom prst="rect">
-            <a:avLst/>
-          </a:prstGeom>
-        </p:spPr>
-        <p:txBody>
-          <a:bodyPr wrap="square"/>
-          <a:lstStyle/>
-          <a:p>
-            <a:r>
-              <a:rPr lang="zh-CN" dirty="0"/>
-              <a:t>第 106 节 · 核心知识点：★ 三大部署坑</a:t>
-            </a:r>
-          </a:p>
-          <a:p>
-            <a:r>
-              <a:rPr lang="zh-CN" dirty="0"/>
-              <a:t/>
-            </a:r>
-          </a:p>
-          <a:p>
-            <a:r>
-              <a:rPr lang="zh-CN" dirty="0"/>
-              <a:t>讲这一页时：先让学生说出上节课的结论，再逐块讲要点。</a:t>
-            </a:r>
-          </a:p>
-          <a:p>
-            <a:r>
-              <a:rPr lang="zh-CN" dirty="0"/>
-              <a:t>每讲完一块，问一句「这一步如果写错了，报错会长什么样？」——把错误提前讲。</a:t>
-            </a:r>
-          </a:p>
-          <a:p>
-            <a:r>
-              <a:rPr lang="zh-CN" dirty="0"/>
-              <a:t/>
-            </a:r>
-          </a:p>
-          <a:p>
-            <a:r>
-              <a:rPr lang="zh-CN" dirty="0"/>
-              <a:t>本节目标：记住 ALLOWED_HOSTS / collectstatic / DEBUG 三个坑；能逐条排查</a:t>
-            </a:r>
-          </a:p>
-          <a:p>
-            <a:r>
-              <a:rPr lang="zh-CN" dirty="0"/>
-              <a:t/>
-            </a:r>
-          </a:p>
-          <a:p>
-            <a:r>
-              <a:rPr lang="zh-CN" dirty="0"/>
-              <a:t>看不到懂的地方，回讲义对应小节读一遍，再回来对着这页复述一次——能讲出来才算真懂。</a:t>
-            </a:r>
-          </a:p>
-        </p:txBody>
-      </p:sp>
-      <p:sp>
-        <p:nvSpPr>
-          <p:cNvPr id="2" name="讲课提示"/>
-          <p:cNvSpPr txBox="1"/>
-          <p:nvPr/>
-        </p:nvSpPr>
-        <p:spPr>
-          <a:xfrm>
-            <a:off x="457200" y="457200"/>
-            <a:ext cx="6858000" cy="4800600"/>
-          </a:xfrm>
-          <a:prstGeom prst="rect">
-            <a:avLst/>
-          </a:prstGeom>
-        </p:spPr>
-        <p:txBody>
-          <a:bodyPr wrap="square"/>
-          <a:lstStyle/>
-          <a:p>
-            <a:r>
-              <a:rPr lang="zh-CN" dirty="0"/>
-              <a:t>第 106 节 · 核心知识点：★ 三大部署坑</a:t>
-            </a:r>
-          </a:p>
-          <a:p>
-            <a:r>
-              <a:rPr lang="zh-CN" dirty="0"/>
-              <a:t/>
-            </a:r>
-          </a:p>
-          <a:p>
-            <a:r>
-              <a:rPr lang="zh-CN" dirty="0"/>
-              <a:t>讲这一页时：先让学生说出上节课的结论，再逐块讲要点。</a:t>
-            </a:r>
-          </a:p>
-          <a:p>
-            <a:r>
-              <a:rPr lang="zh-CN" dirty="0"/>
-              <a:t>每讲完一块，问一句「这一步如果写错了，报错会长什么样？」——把错误提前讲。</a:t>
-            </a:r>
-          </a:p>
-          <a:p>
-            <a:r>
-              <a:rPr lang="zh-CN" dirty="0"/>
-              <a:t/>
-            </a:r>
-          </a:p>
-          <a:p>
-            <a:r>
-              <a:rPr lang="zh-CN" dirty="0"/>
-              <a:t>本节目标：记住 ALLOWED_HOSTS / collectstatic / DEBUG 三个坑；能逐条排查</a:t>
-            </a:r>
-          </a:p>
-          <a:p>
-            <a:r>
-              <a:rPr lang="zh-CN" dirty="0"/>
-              <a:t/>
-            </a:r>
-          </a:p>
-          <a:p>
-            <a:r>
-              <a:rPr lang="zh-CN" dirty="0"/>
-              <a:t>看不到懂的地方，回讲义对应小节读一遍，再回来对着这页复述一次——能讲出来才算真懂。</a:t>
-            </a:r>
-          </a:p>
-        </p:txBody>
-      </p:sp>
-    </p:spTree>
-  </p:cSld>
-  <p:clrMapOvr>
-    <a:masterClrMapping/>
-  </p:clrMapOvr>
-</p:notes>
-</file>
-
 <file path=ppt/slideLayouts/slideLayout1.xml><?xml version="1.0" encoding="utf-8"?>
 <p:sldLayout xmlns:p="http://schemas.openxmlformats.org/presentationml/2006/main" xmlns:a="http://schemas.openxmlformats.org/drawingml/2006/main">
   <p:cSld name="DEFAULT">
@@ -2763,7 +555,7 @@
   <p:cSld>
     <p:spTree>
       <p:nvGrpSpPr>
-        <p:cNvPr id="1" name="" descr="&lt;Slide style={{ width: '1280px', height: '720px', backgroundColor: '#FAFCFE', padding: 0, position: 'relative', overflow: 'hidden' }}&gt;&#13;&#10;    &lt;Box style={{ position: 'absolute', left: 0, top: 0, width: '1280px', height: '150px', background: '#1F5FA8' }} /&gt;&#13;&#10;    &lt;Box style={{ position: 'absolute', left: 64, top: 34, width: '1152px', flexDirection: 'column' }}&gt;&#13;&#10;        &lt;Text style={{ fontSize: 15, fontWeight: 'bold', color: '#BFD9F2', letterSpacing: 2 }}&gt;阶段 2 · 单元 20&lt;/Text&gt;&#13;&#10;        &lt;Text style={{ fontSize: 38, fontWeight: 'bold', color: '#FFFFFF', marginTop: 6 }}&gt;样式与部署&lt;/Text&gt;&#13;&#10;    &lt;/Box&gt;&#13;&#10;    &lt;Box style={{ position: 'absolute', left: 64, top: 168, width: '1152px', height: 470 }}&gt;&#13;&#10;        &lt;svg width='1152' height='470' viewBox='0 0 1152 470'&gt;&#13;&#10;            &lt;text x='0' y='18' fontSize='15' fontWeight='bold' fill='#16232E' fontFamily='Microsoft YaHei'&gt;本单元共 5 节课&lt;/text&gt;&#13;&#10;            &lt;rect x='0' y='196' width='1152' height='38' rx='7' fill='#FFFFFF' /&gt;&lt;text x='16' y='221' fontSize='15' fontWeight='bold' fill='#1F5FA8' fontFamily='Microsoft YaHei'&gt;第 103 节&lt;/text&gt;&lt;text x='96' y='221' fontSize='15' fill='#16232E' fontFamily='Microsoft YaHei'&gt;django-bootstrap5 与页面改造&lt;/text&gt;&lt;text x='1080' y='221' fontSize='13' fill='#5A6B7A' textAnchor='end' fontFamily='Microsoft YaHei'&gt;W26–W27&lt;/text&gt;&lt;rect x='0' y='238' width='1152' height='38' rx='7' fill='#F2F7FD' /&gt;&lt;text x='16' y='263' fontSize='15' fontWeight='bold' fill='#1F5FA8' fontFamily='Microsoft YaHei'&gt;第 104 节&lt;/text&gt;&lt;text x='96' y='263' fontSize='15' fill='#16232E' fontFamily='Microsoft YaHei'&gt;部署是什么与 requirements.txt&lt;/text&gt;&lt;text x='1080' y='263' fontSize='13' fill='#5A6B7A' textAnchor='end' fontFamily='Microsoft YaHei'&gt;W26–W27&lt;/text&gt;&lt;rect x='0' y='280' width='1152' height='38' rx='7' fill='#FFFFFF' /&gt;&lt;text x='16' y='305' fontSize='15' fontWeight='bold' fill='#1F5FA8' fontFamily='Microsoft YaHei'&gt;第 105 节&lt;/text&gt;&lt;text x='96' y='305' fontSize='15' fill='#16232E' fontFamily='Microsoft YaHei'&gt;★ platformshconfig 与本地线上双环境&lt;/text&gt;&lt;text x='1080' y='305' fontSize='13' fill='#5A6B7A' textAnchor='end' fontFamily='Microsoft YaHei'&gt;W26–W27&lt;/text&gt;&lt;rect x='0' y='322' width='1152' height='38' rx='7' fill='#F2F7FD' /&gt;&lt;text x='16' y='347' fontSize='15' fontWeight='bold' fill='#1F5FA8' fontFamily='Microsoft YaHei'&gt;第 106 节&lt;/text&gt;&lt;text x='96' y='347' fontSize='15' fill='#16232E' fontFamily='Microsoft YaHei'&gt;★ 三大部署坑&lt;/text&gt;&lt;text x='1080' y='347' fontSize='13' fill='#5A6B7A' textAnchor='end' fontFamily='Microsoft YaHei'&gt;W26–W27&lt;/text&gt;&lt;rect x='0' y='364' width='1152' height='38' rx='7' fill='#FFFFFF' /&gt;&lt;text x='16' y='389' fontSize='15' fontWeight='bold' fill='#1F5FA8' fontFamily='Microsoft YaHei'&gt;第 107 节&lt;/text&gt;&lt;text x='96' y='389' fontSize='15' fill='#16232E' fontFamily='Microsoft YaHei'&gt;部署上线、错误页与实战&lt;/text&gt;&lt;text x='1080' y='389' fontSize='13' fill='#5A6B7A' textAnchor='end' fontFamily='Microsoft YaHei'&gt;W26–W27&lt;/text&gt;&#13;&#10;        &lt;/svg&gt;&#13;&#10;    &lt;/Box&gt;&#13;&#10;    &lt;Box style={{ position: 'absolute', left: 64, bottom: 22, width: '1152px', flexDirection: 'row', justifyContent: 'space-between' }}&gt;&#13;&#10;        &lt;Text style={{ fontSize: 13, color: '#8A9AAA' }}&gt;Python 讲授课件 · 逐节版&lt;/Text&gt;&#13;&#10;        &lt;Text style={{ fontSize: 13, color: '#8A9AAA' }}&gt;单元 20 · 封面&lt;/Text&gt;&#13;&#10;    &lt;/Box&gt;&#13;&#10;&lt;/Slide&gt;&#13;&#10;"/>
+        <p:cNvPr id="1" name="" descr="&lt;Slide style={{ width: '1280px', height: '720px', backgroundColor: '#FAFCFE', padding: 0, position: 'relative', overflow: 'hidden' }}&gt;&#13;&#10;    &lt;Box style={{ position: 'absolute', left: 0, top: 0, width: '1280px', height: '150px', background: '#1F5FA8' }} /&gt;&#13;&#10;    &lt;Box style={{ position: 'absolute', left: 64, top: 34, width: '1152px', flexDirection: 'column' }}&gt;&#13;&#10;        &lt;Text style={{ fontSize: 15, fontWeight: 'bold', color: '#BFD9F2', letterSpacing: 2 }}&gt;阶段 2 · 单元 20&lt;/Text&gt;&#13;&#10;        &lt;Text style={{ fontSize: 38, fontWeight: 'bold', color: '#FFFFFF', marginTop: 6 }}&gt;样式与部署&lt;/Text&gt;&#13;&#10;    &lt;/Box&gt;&#13;&#10;    &lt;Box style={{ position: 'absolute', left: 64, top: 168, width: '1152px', height: 470 }}&gt;&#13;&#10;        &lt;svg width='1152' height='470' viewBox='0 0 1152 470'&gt;&#13;&#10;            &lt;text x='0' y='18' fontSize='15' fontWeight='bold' fill='#16232E' fontFamily='Microsoft YaHei'&gt;本单元共 5 节课&lt;/text&gt;&#13;&#10;            &lt;rect x='0' y='56.0' width='1152' height='48.0' rx='7' fill='#FFFFFF' /&gt;&lt;text x='16' y='85.0' fontSize='15' fontWeight='bold' fill='#1F5FA8' fontFamily='Microsoft YaHei'&gt;第 103 节&lt;/text&gt;&lt;text x='96' y='85.0' fontSize='15' fill='#16232E' fontFamily='Microsoft YaHei'&gt;django-bootstrap5 与页面改造&lt;/text&gt;&lt;text x='1080' y='85.0' fontSize='13' fill='#5A6B7A' textAnchor='end' fontFamily='Microsoft YaHei'&gt;W26–W27&lt;/text&gt;&lt;rect x='0' y='135.2' width='1152' height='48.0' rx='7' fill='#F2F7FD' /&gt;&lt;text x='16' y='164.2' fontSize='15' fontWeight='bold' fill='#1F5FA8' fontFamily='Microsoft YaHei'&gt;第 104 节&lt;/text&gt;&lt;text x='96' y='164.2' fontSize='15' fill='#16232E' fontFamily='Microsoft YaHei'&gt;部署是什么与 requirements.txt&lt;/text&gt;&lt;text x='1080' y='164.2' fontSize='13' fill='#5A6B7A' textAnchor='end' fontFamily='Microsoft YaHei'&gt;W26–W27&lt;/text&gt;&lt;rect x='0' y='214.4' width='1152' height='48.0' rx='7' fill='#FFFFFF' /&gt;&lt;text x='16' y='243.4' fontSize='15' fontWeight='bold' fill='#1F5FA8' fontFamily='Microsoft YaHei'&gt;第 105 节&lt;/text&gt;&lt;text x='96' y='243.4' fontSize='15' fill='#16232E' fontFamily='Microsoft YaHei'&gt;★ platformshconfig 与本地线上双环境&lt;/text&gt;&lt;text x='1080' y='243.4' fontSize='13' fill='#5A6B7A' textAnchor='end' fontFamily='Microsoft YaHei'&gt;W26–W27&lt;/text&gt;&lt;rect x='0' y='293.6' width='1152' height='48.0' rx='7' fill='#F2F7FD' /&gt;&lt;text x='16' y='322.6' fontSize='15' fontWeight='bold' fill='#1F5FA8' fontFamily='Microsoft YaHei'&gt;第 106 节&lt;/text&gt;&lt;text x='96' y='322.6' fontSize='15' fill='#16232E' fontFamily='Microsoft YaHei'&gt;★ 三大部署坑&lt;/text&gt;&lt;text x='1080' y='322.6' fontSize='13' fill='#5A6B7A' textAnchor='end' fontFamily='Microsoft YaHei'&gt;W26–W27&lt;/text&gt;&lt;rect x='0' y='372.8' width='1152' height='48.0' rx='7' fill='#FFFFFF' /&gt;&lt;text x='16' y='401.8' fontSize='15' fontWeight='bold' fill='#1F5FA8' fontFamily='Microsoft YaHei'&gt;第 107 节&lt;/text&gt;&lt;text x='96' y='401.8' fontSize='15' fill='#16232E' fontFamily='Microsoft YaHei'&gt;部署上线、错误页与实战&lt;/text&gt;&lt;text x='1080' y='401.8' fontSize='13' fill='#5A6B7A' textAnchor='end' fontFamily='Microsoft YaHei'&gt;W26–W27&lt;/text&gt;&#13;&#10;        &lt;/svg&gt;&#13;&#10;    &lt;/Box&gt;&#13;&#10;    &lt;Box style={{ position: 'absolute', left: 64, bottom: 22, width: '1152px', flexDirection: 'row', justifyContent: 'space-between' }}&gt;&#13;&#10;        &lt;Text style={{ fontSize: 13, color: '#8A9AAA' }}&gt;Python 讲授课件 · 逐节版&lt;/Text&gt;&#13;&#10;        &lt;Text style={{ fontSize: 13, color: '#8A9AAA' }}&gt;单元 20 · 封面&lt;/Text&gt;&#13;&#10;    &lt;/Box&gt;&#13;&#10;&lt;/Slide&gt;&#13;&#10;"/>
         <p:cNvGrpSpPr/>
         <p:nvPr/>
       </p:nvGrpSpPr>
@@ -3277,7 +1069,7 @@
   <p:cSld>
     <p:spTree>
       <p:nvGrpSpPr>
-        <p:cNvPr id="15" name="" descr="&lt;Slide style={{ width: '1280px', height: '720px', backgroundColor: '#FAFCFE', padding: 0, position: 'relative', overflow: 'hidden' }}&gt;&#13;&#10;    &lt;Box style={{ position: 'absolute', left: 64, top: 36, width: '1152px', flexDirection: 'row', alignItems: 'center', gap: 12 }}&gt;&#13;&#10;        &lt;Box style={{ background: '#0E9B78', borderRadius: 5, padding: '3px 11px' }}&gt;&#13;&#10;            &lt;Text style={{ fontSize: 14, fontWeight: 'bold', color: '#FFFFFF' }}&gt;第 107 节&lt;/Text&gt;&#13;&#10;        &lt;/Box&gt;&#13;&#10;        &lt;Text style={{ fontSize: 30, fontWeight: 'bold', color: '#16232E' }}&gt;核心知识点&lt;/Text&gt;&#13;&#10;        &lt;Text style={{ fontSize: 15, color: '#5A6B7A', marginTop: 10 }}&gt;· 部署上线、错误页与实战&lt;/Text&gt;&#13;&#10;    &lt;/Box&gt;&#13;&#10;    &lt;Box style={{ position: 'absolute', left: 0, top: 0, width: '1280px', height: '720px' }}&gt;&#13;&#10;        &lt;svg width='1280' height='720' viewBox='0 0 1280 720'&gt;&#13;&#10;            &lt;rect x='64' y='96' width='368' height='330' rx='12' fill='#FFFFFF' stroke='#D8E3EE' /&gt;&lt;rect x='64' y='96' width='368' height='4' rx='2' fill='#1F5FA8' /&gt;&lt;text x='82' y='130' fontSize='15.5' fontWeight='bold' fill='#1F5FA8' textAnchor='start' fontFamily='Microsoft YaHei'&gt;基础档&lt;/text&gt;&lt;text x='82' y='169.0' fontSize='13' fill='#3A4A58' textAnchor='start' fontFamily='Microsoft YaHei'&gt;· 练习 20-1【给「学习笔记」换装】&lt;/text&gt;&lt;text x='82' y='197.5' fontSize='13' fill='#3A4A58' textAnchor='start' fontFamily='Microsoft YaHei'&gt;· 练习 20-2【写部署三件套】&lt;/text&gt;&lt;text x='82' y='226.0' fontSize='13' fill='#3A4A58' textAnchor='start' fontFamily='Microsoft YaHei'&gt;· 练习 20-3【诊断三个线上故障】&lt;/text&gt;&lt;rect x='468' y='96' width='368' height='330' rx='12' fill='#FFFFFF' stroke='#D8E3EE' /&gt;&lt;rect x='468' y='96' width='368' height='4' rx='2' fill='#1F5FA8' /&gt;&lt;text x='486' y='130' fontSize='15.5' fontWeight='bold' fill='#1F5FA8' textAnchor='start' fontFamily='Microsoft YaHei'&gt;进阶档&lt;/text&gt;&lt;text x='486' y='169.0' fontSize='13' fill='#3A4A58' textAnchor='start' fontFamily='Microsoft YaHei'&gt;· 练习 20-4【本地模拟双环境】&lt;/text&gt;&lt;text x='486' y='197.5' fontSize='13' fill='#3A4A58' textAnchor='start' fontFamily='Microsoft YaHei'&gt;· 练习 20-5【本地验证定制错误页面】&lt;/text&gt;&lt;text x='486' y='226.0' fontSize='13' fill='#3A4A58' textAnchor='start' fontFamily='Microsoft YaHei'&gt;· 练习 20-6【扩展部署检查清单】&lt;/text&gt;&lt;rect x='872' y='96' width='368' height='330' rx='12' fill='#FFFFFF' stroke='#D8E3EE' /&gt;&lt;rect x='872' y='96' width='368' height='4' rx='2' fill='#1F5FA8' /&gt;&lt;text x='890' y='130' fontSize='15.5' fontWeight='bold' fill='#1F5FA8' textAnchor='start' fontFamily='Microsoft YaHei'&gt;参考答案 20-1（换装后的关键模板）&lt;/text&gt;&lt;text x='890' y='169.0' fontSize='13' fill='#3A4A58' textAnchor='start' fontFamily='Microsoft YaHei'&gt;· settings.py 注册后，登录页 templates/registrat&lt;/text&gt;&lt;text x='890' y='188.5' fontSize='13' fill='#3A4A58' textAnchor='start' fontFamily='Microsoft YaHei'&gt;ion/login.ht…&lt;/text&gt;&lt;rect x='64' y='574' width='1152' height='66' rx='12' fill='#EEF5FB' /&gt;&lt;text x='84' y='616' fontSize='14' fill='#243444' textAnchor='start' fontFamily='Microsoft YaHei'&gt;看不懂的地方先回讲义对应小节读一遍，再回来对着这页复述一次——能讲出来才算真懂。&lt;/text&gt;&#13;&#10;            &lt;text x='64' y='684' fontSize='13' fill='#8A9AAA' fontFamily='Microsoft YaHei'&gt;Python 讲授课件 · 逐节版&lt;/text&gt;&#13;&#10;            &lt;text x='1216' y='684' fontSize='13' fill='#8A9AAA' textAnchor='end' fontFamily='Microsoft YaHei'&gt;单元 20 · 第 107 节&lt;/text&gt;&#13;&#10;        &lt;/svg&gt;&#13;&#10;    &lt;/Box&gt;&#13;&#10;&lt;/Slide&gt;&#13;&#10;"/>
+        <p:cNvPr id="15" name="" descr="&lt;Slide style={{ width: '1280px', height: '720px', backgroundColor: '#FAFCFE', padding: 0, position: 'relative', overflow: 'hidden' }}&gt;&#13;&#10;    &lt;Box style={{ position: 'absolute', left: 64, top: 36, width: '1152px', flexDirection: 'row', alignItems: 'center', gap: 12 }}&gt;&#13;&#10;        &lt;Box style={{ background: '#0E9B78', borderRadius: 5, padding: '3px 11px' }}&gt;&#13;&#10;            &lt;Text style={{ fontSize: 14, fontWeight: 'bold', color: '#FFFFFF' }}&gt;第 107 节&lt;/Text&gt;&#13;&#10;        &lt;/Box&gt;&#13;&#10;        &lt;Text style={{ fontSize: 30, fontWeight: 'bold', color: '#16232E' }}&gt;核心知识点&lt;/Text&gt;&#13;&#10;        &lt;Text style={{ fontSize: 15, color: '#5A6B7A', marginTop: 10 }}&gt;· 部署上线、错误页与实战&lt;/Text&gt;&#13;&#10;    &lt;/Box&gt;&#13;&#10;    &lt;Box style={{ position: 'absolute', left: 0, top: 0, width: '1280px', height: '720px' }}&gt;&#13;&#10;        &lt;svg width='1280' height='720' viewBox='0 0 1280 720'&gt;&#13;&#10;            &lt;rect x='64' y='96' width='368' height='330' rx='12' fill='#FFFFFF' stroke='#D8E3EE' /&gt;&lt;rect x='64' y='96' width='368' height='4' rx='2' fill='#1F5FA8' /&gt;&lt;text x='82' y='130' fontSize='15.5' fontWeight='bold' fill='#1F5FA8' textAnchor='start' fontFamily='Microsoft YaHei'&gt;基础档&lt;/text&gt;&lt;text x='82' y='169.0' fontSize='13' fill='#3A4A58' textAnchor='start' fontFamily='Microsoft YaHei'&gt;· 练习 20-1【给「学习笔记」换装】&lt;/text&gt;&lt;text x='82' y='197.5' fontSize='13' fill='#3A4A58' textAnchor='start' fontFamily='Microsoft YaHei'&gt;· 练习 20-2【写部署三件套】&lt;/text&gt;&lt;text x='82' y='226.0' fontSize='13' fill='#3A4A58' textAnchor='start' fontFamily='Microsoft YaHei'&gt;· 练习 20-3【诊断三个线上故障】&lt;/text&gt;&lt;rect x='468' y='96' width='368' height='330' rx='12' fill='#FFFFFF' stroke='#D8E3EE' /&gt;&lt;rect x='468' y='96' width='368' height='4' rx='2' fill='#1F5FA8' /&gt;&lt;text x='486' y='130' fontSize='15.5' fontWeight='bold' fill='#1F5FA8' textAnchor='start' fontFamily='Microsoft YaHei'&gt;进阶档&lt;/text&gt;&lt;text x='486' y='169.0' fontSize='13' fill='#3A4A58' textAnchor='start' fontFamily='Microsoft YaHei'&gt;· 练习 20-4【本地模拟双环境】&lt;/text&gt;&lt;text x='486' y='197.5' fontSize='13' fill='#3A4A58' textAnchor='start' fontFamily='Microsoft YaHei'&gt;· 练习 20-5【本地验证定制错误页面】&lt;/text&gt;&lt;text x='486' y='226.0' fontSize='13' fill='#3A4A58' textAnchor='start' fontFamily='Microsoft YaHei'&gt;· 练习 20-6【扩展部署检查清单】&lt;/text&gt;&lt;rect x='872' y='96' width='368' height='330' rx='12' fill='#FFFFFF' stroke='#D8E3EE' /&gt;&lt;rect x='872' y='96' width='368' height='4' rx='2' fill='#1F5FA8' /&gt;&lt;text x='890' y='130' fontSize='15.5' fontWeight='bold' fill='#1F5FA8' textAnchor='start' fontFamily='Microsoft YaHei'&gt;参考答案 20-1（换装后的关键模板）&lt;/text&gt;&lt;text x='890' y='169.0' fontSize='13' fill='#3A4A58' textAnchor='start' fontFamily='Microsoft YaHei'&gt;· 主题列表页 templates/learning_logs/topics.html&lt;/text&gt;&lt;text x='890' y='188.5' fontSize='13' fill='#3A4A58' textAnchor='start' fontFamily='Microsoft YaHei'&gt; 在 ｛% bloc…&lt;/text&gt;&lt;rect x='64' y='574' width='1152' height='66' rx='12' fill='#EEF5FB' /&gt;&lt;text x='84' y='616' fontSize='14' fill='#243444' textAnchor='start' fontFamily='Microsoft YaHei'&gt;看不懂的地方先回讲义对应小节读一遍，再回来对着这页复述一次——能讲出来才算真懂。&lt;/text&gt;&#13;&#10;            &lt;text x='64' y='684' fontSize='13' fill='#8A9AAA' fontFamily='Microsoft YaHei'&gt;Python 讲授课件 · 逐节版&lt;/text&gt;&#13;&#10;            &lt;text x='1216' y='684' fontSize='13' fill='#8A9AAA' textAnchor='end' fontFamily='Microsoft YaHei'&gt;单元 20 · 第 107 节&lt;/text&gt;&#13;&#10;        &lt;/svg&gt;&#13;&#10;    &lt;/Box&gt;&#13;&#10;&lt;/Slide&gt;&#13;&#10;"/>
         <p:cNvGrpSpPr/>
         <p:nvPr/>
       </p:nvGrpSpPr>
@@ -4308,7 +2100,7 @@
   <p:cSld>
     <p:spTree>
       <p:nvGrpSpPr>
-        <p:cNvPr id="42" name="" descr="&lt;Slide style={{ width: '1280px', height: '720px', backgroundColor: '#FAFCFE', padding: 0, position: 'relative', overflow: 'hidden' }}&gt;&#13;&#10;    &lt;Box style={{ position: 'absolute', left: 64, top: 36, width: '1152px', flexDirection: 'row', alignItems: 'center', gap: 12 }}&gt;&#13;&#10;        &lt;Box style={{ background: '#0E9B78', borderRadius: 5, padding: '3px 11px' }}&gt;&#13;&#10;            &lt;Text style={{ fontSize: 14, fontWeight: 'bold', color: '#FFFFFF' }}&gt;第 103 节&lt;/Text&gt;&#13;&#10;        &lt;/Box&gt;&#13;&#10;        &lt;Text style={{ fontSize: 30, fontWeight: 'bold', color: '#16232E' }}&gt;核心知识点&lt;/Text&gt;&#13;&#10;        &lt;Text style={{ fontSize: 15, color: '#5A6B7A', marginTop: 10 }}&gt;· django-bootstrap5 与页面…&lt;/Text&gt;&#13;&#10;    &lt;/Box&gt;&#13;&#10;    &lt;Box style={{ position: 'absolute', left: 0, top: 0, width: '1280px', height: '720px' }}&gt;&#13;&#10;        &lt;svg width='1280' height='720' viewBox='0 0 1280 720'&gt;&#13;&#10;            &lt;rect x='64' y='96' width='548' height='330' rx='12' fill='#FFFFFF' stroke='#D8E3EE' /&gt;&lt;rect x='64' y='96' width='548' height='4' rx='2' fill='#1F5FA8' /&gt;&lt;text x='82' y='130' fontSize='15.5' fontWeight='bold' fill='#1F5FA8' textAnchor='start' fontFamily='Microsoft YaHei'&gt;2.1 django-bootstrap5：一行代码让表单…&lt;/text&gt;&lt;text x='82' y='169.0' fontSize='13' fill='#3A4A58' textAnchor='start' fontFamily='Microsoft YaHei'&gt;· ｛% load django_bootstrap5 %｝：把工具包拿到这个模板里。不 load 就用…&lt;/text&gt;&lt;text x='82' y='197.5' fontSize='13' fill='#3A4A58' textAnchor='start' fontFamily='Microsoft YaHei'&gt;· ｛% bootstrap_form form %｝：一键美颜。它内部遍历表单的每个字段，给它们包上&lt;/text&gt;&lt;text x='82' y='217.0' fontSize='13' fill='#3A4A58' textAnchor='start' fontFamily='Microsoft YaHei'&gt; B…&lt;/text&gt;&lt;rect x='668' y='96' width='548' height='330' rx='12' fill='#FFFFFF' stroke='#D8E3EE' /&gt;&lt;rect x='668' y='96' width='548' height='4' rx='2' fill='#1F5FA8' /&gt;&lt;text x='686' y='130' fontSize='15.5' fontWeight='bold' fill='#1F5FA8' textAnchor='start' fontFamily='Microsoft YaHei'&gt;2.2 改造「学习笔记」的界面（对应教材 20.1 各小节）&lt;/text&gt;&lt;text x='686' y='169.0' fontSize='13' fill='#3A4A58' textAnchor='start' fontFamily='Microsoft YaHei'&gt;· base.html 是「继承树」的根：其他模板都 ｛% extends %｝ 它，所以 Bootstr…&lt;/text&gt;&lt;text x='686' y='197.5' fontSize='13' fill='#3A4A58' textAnchor='start' fontFamily='Microsoft YaHei'&gt;· jumbotron：教材给主页用了一个居中的大卡片当「门面」。这里有个版本细节——jum&lt;/text&gt;&lt;text x='686' y='217.0' fontSize='13' fill='#3A4A58' textAnchor='start' fontFamily='Microsoft YaHei'&gt;botron…&lt;/text&gt;&lt;rect x='64' y='574' width='1152' height='66' rx='12' fill='#EEF5FB' /&gt;&lt;text x='84' y='616' fontSize='14' fill='#243444' textAnchor='start' fontFamily='Microsoft YaHei'&gt;看不懂的地方先回讲义对应小节读一遍，再回来对着这页复述一次——能讲出来才算真懂。&lt;/text&gt;&#13;&#10;            &lt;text x='64' y='684' fontSize='13' fill='#8A9AAA' fontFamily='Microsoft YaHei'&gt;Python 讲授课件 · 逐节版&lt;/text&gt;&#13;&#10;            &lt;text x='1216' y='684' fontSize='13' fill='#8A9AAA' textAnchor='end' fontFamily='Microsoft YaHei'&gt;单元 20 · 第 103 节&lt;/text&gt;&#13;&#10;        &lt;/svg&gt;&#13;&#10;    &lt;/Box&gt;&#13;&#10;&lt;/Slide&gt;&#13;&#10;"/>
+        <p:cNvPr id="42" name="" descr="&lt;Slide style={{ width: '1280px', height: '720px', backgroundColor: '#FAFCFE', padding: 0, position: 'relative', overflow: 'hidden' }}&gt;&#13;&#10;    &lt;Box style={{ position: 'absolute', left: 64, top: 36, width: '1152px', flexDirection: 'row', alignItems: 'center', gap: 12 }}&gt;&#13;&#10;        &lt;Box style={{ background: '#0E9B78', borderRadius: 5, padding: '3px 11px' }}&gt;&#13;&#10;            &lt;Text style={{ fontSize: 14, fontWeight: 'bold', color: '#FFFFFF' }}&gt;第 103 节&lt;/Text&gt;&#13;&#10;        &lt;/Box&gt;&#13;&#10;        &lt;Text style={{ fontSize: 30, fontWeight: 'bold', color: '#16232E' }}&gt;核心知识点&lt;/Text&gt;&#13;&#10;        &lt;Text style={{ fontSize: 15, color: '#5A6B7A', marginTop: 10 }}&gt;· django-bootstrap5 与页面…&lt;/Text&gt;&#13;&#10;    &lt;/Box&gt;&#13;&#10;    &lt;Box style={{ position: 'absolute', left: 0, top: 0, width: '1280px', height: '720px' }}&gt;&#13;&#10;        &lt;svg width='1280' height='720' viewBox='0 0 1280 720'&gt;&#13;&#10;            &lt;rect x='64' y='96' width='548' height='330' rx='12' fill='#FFFFFF' stroke='#D8E3EE' /&gt;&lt;rect x='64' y='96' width='548' height='4' rx='2' fill='#1F5FA8' /&gt;&lt;text x='82' y='130' fontSize='15.5' fontWeight='bold' fill='#1F5FA8' textAnchor='start' fontFamily='Microsoft YaHei'&gt;2.1 django-bootstrap5…&lt;/text&gt;&lt;text x='82' y='169.0' fontSize='13' fill='#3A4A58' textAnchor='start' fontFamily='Microsoft YaHei'&gt;· ｛% load django_bootstrap5 %｝：把工具包拿到这个模板里…&lt;/text&gt;&lt;text x='82' y='197.5' fontSize='13' fill='#3A4A58' textAnchor='start' fontFamily='Microsoft YaHei'&gt;· ｛% bootstrap_form form %｝：一键美颜。它内部遍历表单的每个字段…&lt;/text&gt;&lt;rect x='668' y='96' width='548' height='330' rx='12' fill='#FFFFFF' stroke='#D8E3EE' /&gt;&lt;rect x='668' y='96' width='548' height='4' rx='2' fill='#1F5FA8' /&gt;&lt;text x='686' y='130' fontSize='15.5' fontWeight='bold' fill='#1F5FA8' textAnchor='start' fontFamily='Microsoft YaHei'&gt;2.2 改造「学习笔记」的界面（对应教材 20.1 各小节）&lt;/text&gt;&lt;text x='686' y='169.0' fontSize='13' fill='#3A4A58' textAnchor='start' fontFamily='Microsoft YaHei'&gt;· base.html 是「继承树」的根&lt;/text&gt;&lt;text x='686' y='197.5' fontSize='13' fill='#3A4A58' textAnchor='start' fontFamily='Microsoft YaHei'&gt;· jumbotron&lt;/text&gt;&lt;rect x='64' y='574' width='1152' height='66' rx='12' fill='#EEF5FB' /&gt;&lt;text x='84' y='616' fontSize='14' fill='#243444' textAnchor='start' fontFamily='Microsoft YaHei'&gt;看不懂的地方先回讲义对应小节读一遍，再回来对着这页复述一次——能讲出来才算真懂。&lt;/text&gt;&#13;&#10;            &lt;text x='64' y='684' fontSize='13' fill='#8A9AAA' fontFamily='Microsoft YaHei'&gt;Python 讲授课件 · 逐节版&lt;/text&gt;&#13;&#10;            &lt;text x='1216' y='684' fontSize='13' fill='#8A9AAA' textAnchor='end' fontFamily='Microsoft YaHei'&gt;单元 20 · 第 103 节&lt;/text&gt;&#13;&#10;        &lt;/svg&gt;&#13;&#10;    &lt;/Box&gt;&#13;&#10;&lt;/Slide&gt;&#13;&#10;"/>
         <p:cNvGrpSpPr/>
         <p:nvPr/>
       </p:nvGrpSpPr>
@@ -4749,7 +2541,7 @@
   <p:cSld>
     <p:spTree>
       <p:nvGrpSpPr>
-        <p:cNvPr id="55" name="" descr="&lt;Slide style={{ width: '1280px', height: '720px', backgroundColor: '#FAFCFE', padding: 0, position: 'relative', overflow: 'hidden' }}&gt;&#13;&#10;    &lt;Box style={{ position: 'absolute', left: 64, top: 36, width: '1152px', flexDirection: 'row', alignItems: 'center', gap: 12 }}&gt;&#13;&#10;        &lt;Box style={{ background: '#0E9B78', borderRadius: 5, padding: '3px 11px' }}&gt;&#13;&#10;            &lt;Text style={{ fontSize: 14, fontWeight: 'bold', color: '#FFFFFF' }}&gt;第 104 节&lt;/Text&gt;&#13;&#10;        &lt;/Box&gt;&#13;&#10;        &lt;Text style={{ fontSize: 30, fontWeight: 'bold', color: '#16232E' }}&gt;核心知识点&lt;/Text&gt;&#13;&#10;        &lt;Text style={{ fontSize: 15, color: '#5A6B7A', marginTop: 10 }}&gt;· 部署是什么与 requirements.t…&lt;/Text&gt;&#13;&#10;    &lt;/Box&gt;&#13;&#10;    &lt;Box style={{ position: 'absolute', left: 0, top: 0, width: '1280px', height: '720px' }}&gt;&#13;&#10;        &lt;svg width='1280' height='720' viewBox='0 0 1280 720'&gt;&#13;&#10;            &lt;rect x='64' y='96' width='548' height='330' rx='12' fill='#FFFFFF' stroke='#D8E3EE' /&gt;&lt;rect x='64' y='96' width='548' height='4' rx='2' fill='#1F5FA8' /&gt;&lt;text x='82' y='130' fontSize='15.5' fontWeight='bold' fill='#1F5FA8' textAnchor='start' fontFamily='Microsoft YaHei'&gt;2.3 部署是什么：从「只有你能跑」到「谁都能访问」（对应…&lt;/text&gt;&lt;text x='82' y='169.0' fontSize='13' fill='#3A4A58' textAnchor='start' fontFamily='Microsoft YaHei'&gt;· 到目前为止，「学习笔记」只活在你这台电脑上。部署（deploy）就是把它搬到一个 7&lt;/text&gt;&lt;text x='82' y='188.5' fontSize='13' fill='#3A4A58' textAnchor='start' fontFamily='Microsoft YaHei'&gt;×24 小时开机的…&lt;/text&gt;&lt;rect x='668' y='96' width='548' height='330' rx='12' fill='#FFFFFF' stroke='#D8E3EE' /&gt;&lt;rect x='668' y='96' width='548' height='4' rx='2' fill='#1F5FA8' /&gt;&lt;text x='686' y='130' fontSize='15.5' fontWeight='bold' fill='#1F5FA8' textAnchor='start' fontFamily='Microsoft YaHei'&gt;2.4 requirements.txt：云环境的采购清单…&lt;/text&gt;&lt;text x='686' y='169.0' fontSize='13' fill='#3A4A58' textAnchor='start' fontFamily='Microsoft YaHei'&gt;· 为什么它是部署必需品？因为云环境是一台全新的、干净的机器，它不知道你的项目用过&lt;/text&gt;&lt;text x='686' y='188.5' fontSize='13' fill='#3A4A58' textAnchor='start' fontFamily='Microsoft YaHei'&gt; Django，更不会知…&lt;/text&gt;&lt;rect x='64' y='574' width='1152' height='66' rx='12' fill='#EEF5FB' /&gt;&lt;text x='84' y='616' fontSize='14' fill='#243444' textAnchor='start' fontFamily='Microsoft YaHei'&gt;看不懂的地方先回讲义对应小节读一遍，再回来对着这页复述一次——能讲出来才算真懂。&lt;/text&gt;&#13;&#10;            &lt;text x='64' y='684' fontSize='13' fill='#8A9AAA' fontFamily='Microsoft YaHei'&gt;Python 讲授课件 · 逐节版&lt;/text&gt;&#13;&#10;            &lt;text x='1216' y='684' fontSize='13' fill='#8A9AAA' textAnchor='end' fontFamily='Microsoft YaHei'&gt;单元 20 · 第 104 节&lt;/text&gt;&#13;&#10;        &lt;/svg&gt;&#13;&#10;    &lt;/Box&gt;&#13;&#10;&lt;/Slide&gt;&#13;&#10;"/>
+        <p:cNvPr id="55" name="" descr="&lt;Slide style={{ width: '1280px', height: '720px', backgroundColor: '#FAFCFE', padding: 0, position: 'relative', overflow: 'hidden' }}&gt;&#13;&#10;    &lt;Box style={{ position: 'absolute', left: 64, top: 36, width: '1152px', flexDirection: 'row', alignItems: 'center', gap: 12 }}&gt;&#13;&#10;        &lt;Box style={{ background: '#0E9B78', borderRadius: 5, padding: '3px 11px' }}&gt;&#13;&#10;            &lt;Text style={{ fontSize: 14, fontWeight: 'bold', color: '#FFFFFF' }}&gt;第 104 节&lt;/Text&gt;&#13;&#10;        &lt;/Box&gt;&#13;&#10;        &lt;Text style={{ fontSize: 30, fontWeight: 'bold', color: '#16232E' }}&gt;核心知识点&lt;/Text&gt;&#13;&#10;        &lt;Text style={{ fontSize: 15, color: '#5A6B7A', marginTop: 10 }}&gt;· 部署是什么与 requirements.t…&lt;/Text&gt;&#13;&#10;    &lt;/Box&gt;&#13;&#10;    &lt;Box style={{ position: 'absolute', left: 0, top: 0, width: '1280px', height: '720px' }}&gt;&#13;&#10;        &lt;svg width='1280' height='720' viewBox='0 0 1280 720'&gt;&#13;&#10;            &lt;rect x='64' y='96' width='548' height='330' rx='12' fill='#FFFFFF' stroke='#D8E3EE' /&gt;&lt;rect x='64' y='96' width='548' height='4' rx='2' fill='#1F5FA8' /&gt;&lt;text x='82' y='130' fontSize='15.5' fontWeight='bold' fill='#1F5FA8' textAnchor='start' fontFamily='Microsoft YaHei'&gt;2.3 部署是什么：从「只有你能跑」到「谁都能访问」（对应…&lt;/text&gt;&lt;text x='82' y='169.0' fontSize='13' fill='#3A4A58' textAnchor='start' fontFamily='Microsoft YaHei'&gt;· 到目前为止，「学习笔记」只活在你这台电脑上。&lt;/text&gt;&lt;text x='82' y='197.5' fontSize='13' fill='#3A4A58' textAnchor='start' fontFamily='Microsoft YaHei'&gt;· 本地开发像在自家厨房练手，油盐酱醋随手就有；部署像去美食广场开店，&lt;/text&gt;&lt;text x='82' y='217.0' fontSize='13' fill='#3A4A58' textAnchor='start' fontFamily='Microsoft YaHei'&gt;一切都是陌生的、干净的…&lt;/text&gt;&lt;text x='82' y='245.5' fontSize='13' fill='#3A4A58' textAnchor='start' fontFamily='Microsoft YaHei'&gt;· Platform.sh 是一个「平台即服务」（PaaS）：你不用自己买服务器、装系统，&lt;/text&gt;&lt;text x='82' y='265.0' fontSize='13' fill='#3A4A58' textAnchor='start' fontFamily='Microsoft YaHei'&gt;把代码推给它…&lt;/text&gt;&lt;rect x='668' y='96' width='548' height='330' rx='12' fill='#FFFFFF' stroke='#D8E3EE' /&gt;&lt;rect x='668' y='96' width='548' height='4' rx='2' fill='#1F5FA8' /&gt;&lt;text x='686' y='130' fontSize='15.5' fontWeight='bold' fill='#1F5FA8' textAnchor='start' fontFamily='Microsoft YaHei'&gt;2.4 requirements.txt…&lt;/text&gt;&lt;text x='686' y='169.0' fontSize='13' fill='#3A4A58' textAnchor='start' fontFamily='Microsoft YaHei'&gt;· 1. == 是版本锁。&lt;/text&gt;&lt;text x='686' y='197.5' fontSize='13' fill='#3A4A58' textAnchor='start' fontFamily='Microsoft YaHei'&gt;· 2. 清单里也会有间接依赖（如 asgiref、sqlparse 是 Django 带进来的）。&lt;/text&gt;&lt;text x='686' y='226.0' fontSize='13' fill='#3A4A58' textAnchor='start' fontFamily='Microsoft YaHei'&gt;· -e git+https://... 这类行必须删掉：它表示「从 git 直接装」…&lt;/text&gt;&lt;rect x='64' y='574' width='1152' height='66' rx='12' fill='#EEF5FB' /&gt;&lt;text x='84' y='616' fontSize='14' fill='#243444' textAnchor='start' fontFamily='Microsoft YaHei'&gt;看不懂的地方先回讲义对应小节读一遍，再回来对着这页复述一次——能讲出来才算真懂。&lt;/text&gt;&#13;&#10;            &lt;text x='64' y='684' fontSize='13' fill='#8A9AAA' fontFamily='Microsoft YaHei'&gt;Python 讲授课件 · 逐节版&lt;/text&gt;&#13;&#10;            &lt;text x='1216' y='684' fontSize='13' fill='#8A9AAA' textAnchor='end' fontFamily='Microsoft YaHei'&gt;单元 20 · 第 104 节&lt;/text&gt;&#13;&#10;        &lt;/svg&gt;&#13;&#10;    &lt;/Box&gt;&#13;&#10;&lt;/Slide&gt;&#13;&#10;"/>
         <p:cNvGrpSpPr/>
         <p:nvPr/>
       </p:nvGrpSpPr>
@@ -5200,7 +2992,7 @@
   <p:cSld>
     <p:spTree>
       <p:nvGrpSpPr>
-        <p:cNvPr id="68" name="" descr="&lt;Slide style={{ width: '1280px', height: '720px', backgroundColor: '#FAFCFE', padding: 0, position: 'relative', overflow: 'hidden' }}&gt;&#13;&#10;    &lt;Box style={{ position: 'absolute', left: 64, top: 36, width: '1152px', flexDirection: 'row', alignItems: 'center', gap: 12 }}&gt;&#13;&#10;        &lt;Box style={{ background: '#0E9B78', borderRadius: 5, padding: '3px 11px' }}&gt;&#13;&#10;            &lt;Text style={{ fontSize: 14, fontWeight: 'bold', color: '#FFFFFF' }}&gt;第 105 节&lt;/Text&gt;&#13;&#10;        &lt;/Box&gt;&#13;&#10;        &lt;Text style={{ fontSize: 30, fontWeight: 'bold', color: '#16232E' }}&gt;核心知识点&lt;/Text&gt;&#13;&#10;        &lt;Text style={{ fontSize: 15, color: '#5A6B7A', marginTop: 10 }}&gt;· ★ platformshconfig 与本…&lt;/Text&gt;&#13;&#10;    &lt;/Box&gt;&#13;&#10;    &lt;Box style={{ position: 'absolute', left: 0, top: 0, width: '1280px', height: '720px' }}&gt;&#13;&#10;        &lt;svg width='1280' height='720' viewBox='0 0 1280 720'&gt;&#13;&#10;            &lt;rect x='64' y='96' width='548' height='330' rx='12' fill='#FFFFFF' stroke='#D8E3EE' /&gt;&lt;rect x='64' y='96' width='548' height='4' rx='2' fill='#1F5FA8' /&gt;&lt;text x='82' y='130' fontSize='15.5' fontWeight='bold' fill='#1F5FA8' textAnchor='start' fontFamily='Microsoft YaHei'&gt;2.5 三个配置文件：一个描述应用，一个描述路由（对应教材…&lt;/text&gt;&lt;text x='82' y='169.0' fontSize='13' fill='#3A4A58' textAnchor='start' fontFamily='Microsoft YaHei'&gt;· .platform.app.yaml（和 manage.py 同级，注意别漏开头的点）：&lt;/text&gt;&lt;text x='82' y='197.5' fontSize='13' fill='#3A4A58' textAnchor='start' fontFamily='Microsoft YaHei'&gt;· .platform/routes.yaml：路由只干一件事——把域名指到应用。&lt;/text&gt;&lt;text x='82' y='226.0' fontSize='13' fill='#3A4A58' textAnchor='start' fontFamily='Microsoft YaHei'&gt;· .platform/services.yaml：服务清单，每个服务以独立容器部署。&lt;/text&gt;&lt;rect x='668' y='96' width='548' height='330' rx='12' fill='#FFFFFF' stroke='#D8E3EE' /&gt;&lt;rect x='668' y='96' width='548' height='4' rx='2' fill='#1F5FA8' /&gt;&lt;text x='686' y='130' fontSize='15.5' fontWeight='bold' fill='#1F5FA8' textAnchor='start' fontFamily='Microsoft YaHei'&gt;2.6 platformshconfig：一份代码怎么知道…&lt;/text&gt;&lt;text x='686' y='169.0' fontSize='13' fill='#3A4A58' textAnchor='start' fontFamily='Microsoft YaHei'&gt;· 现在到本单元最烧脑的地方。难点先说在前面：settings.py 只有一份，但它要在两个&lt;/text&gt;&lt;text x='686' y='188.5' fontSize='13' fill='#3A4A58' textAnchor='start' fontFamily='Microsoft YaHei'&gt;完全不同的环境…&lt;/text&gt;&lt;rect x='64' y='574' width='1152' height='66' rx='12' fill='#EEF5FB' /&gt;&lt;text x='84' y='616' fontSize='14' fill='#243444' textAnchor='start' fontFamily='Microsoft YaHei'&gt;看不懂的地方先回讲义对应小节读一遍，再回来对着这页复述一次——能讲出来才算真懂。&lt;/text&gt;&#13;&#10;            &lt;text x='64' y='684' fontSize='13' fill='#8A9AAA' fontFamily='Microsoft YaHei'&gt;Python 讲授课件 · 逐节版&lt;/text&gt;&#13;&#10;            &lt;text x='1216' y='684' fontSize='13' fill='#8A9AAA' textAnchor='end' fontFamily='Microsoft YaHei'&gt;单元 20 · 第 105 节&lt;/text&gt;&#13;&#10;        &lt;/svg&gt;&#13;&#10;    &lt;/Box&gt;&#13;&#10;&lt;/Slide&gt;&#13;&#10;"/>
+        <p:cNvPr id="68" name="" descr="&lt;Slide style={{ width: '1280px', height: '720px', backgroundColor: '#FAFCFE', padding: 0, position: 'relative', overflow: 'hidden' }}&gt;&#13;&#10;    &lt;Box style={{ position: 'absolute', left: 64, top: 36, width: '1152px', flexDirection: 'row', alignItems: 'center', gap: 12 }}&gt;&#13;&#10;        &lt;Box style={{ background: '#0E9B78', borderRadius: 5, padding: '3px 11px' }}&gt;&#13;&#10;            &lt;Text style={{ fontSize: 14, fontWeight: 'bold', color: '#FFFFFF' }}&gt;第 105 节&lt;/Text&gt;&#13;&#10;        &lt;/Box&gt;&#13;&#10;        &lt;Text style={{ fontSize: 30, fontWeight: 'bold', color: '#16232E' }}&gt;核心知识点&lt;/Text&gt;&#13;&#10;        &lt;Text style={{ fontSize: 15, color: '#5A6B7A', marginTop: 10 }}&gt;· ★ platformshconfig 与本…&lt;/Text&gt;&#13;&#10;    &lt;/Box&gt;&#13;&#10;    &lt;Box style={{ position: 'absolute', left: 0, top: 0, width: '1280px', height: '720px' }}&gt;&#13;&#10;        &lt;svg width='1280' height='720' viewBox='0 0 1280 720'&gt;&#13;&#10;            &lt;rect x='64' y='96' width='548' height='330' rx='12' fill='#FFFFFF' stroke='#D8E3EE' /&gt;&lt;rect x='64' y='96' width='548' height='4' rx='2' fill='#1F5FA8' /&gt;&lt;text x='82' y='130' fontSize='15.5' fontWeight='bold' fill='#1F5FA8' textAnchor='start' fontFamily='Microsoft YaHei'&gt;2.5 三个配置文件：一个描述应用…&lt;/text&gt;&lt;text x='82' y='169.0' fontSize='13' fill='#3A4A58' textAnchor='start' fontFamily='Microsoft YaHei'&gt;· .platform.app.yaml（和 manage.py 同级，注意别漏开头的点）&lt;/text&gt;&lt;text x='82' y='197.5' fontSize='13' fill='#3A4A58' textAnchor='start' fontFamily='Microsoft YaHei'&gt;· .platform/routes.yaml&lt;/text&gt;&lt;text x='82' y='226.0' fontSize='13' fill='#3A4A58' textAnchor='start' fontFamily='Microsoft YaHei'&gt;· .platform/services.yaml&lt;/text&gt;&lt;rect x='668' y='96' width='548' height='330' rx='12' fill='#FFFFFF' stroke='#D8E3EE' /&gt;&lt;rect x='668' y='96' width='548' height='4' rx='2' fill='#1F5FA8' /&gt;&lt;text x='686' y='130' fontSize='15.5' fontWeight='bold' fill='#1F5FA8' textAnchor='start' fontFamily='Microsoft YaHei'&gt;2.6 platformshconfig…&lt;/text&gt;&lt;text x='686' y='169.0' fontSize='13' fill='#3A4A58' textAnchor='start' fontFamily='Microsoft YaHei'&gt;· 现在到本单元最烧脑的地方。&lt;/text&gt;&lt;text x='686' y='197.5' fontSize='13' fill='#3A4A58' textAnchor='start' fontFamily='Microsoft YaHei'&gt;· Django 的感觉器官就是环境变量。&lt;/text&gt;&lt;text x='686' y='226.0' fontSize='13' fill='#3A4A58' textAnchor='start' fontFamily='Microsoft YaHei'&gt;· ★ 为什么难：你要同时记住「两份配置」和「一个开关」。&lt;/text&gt;&lt;rect x='64' y='574' width='1152' height='66' rx='12' fill='#EEF5FB' /&gt;&lt;text x='84' y='616' fontSize='14' fill='#243444' textAnchor='start' fontFamily='Microsoft YaHei'&gt;看不懂的地方先回讲义对应小节读一遍，再回来对着这页复述一次——能讲出来才算真懂。&lt;/text&gt;&#13;&#10;            &lt;text x='64' y='684' fontSize='13' fill='#8A9AAA' fontFamily='Microsoft YaHei'&gt;Python 讲授课件 · 逐节版&lt;/text&gt;&#13;&#10;            &lt;text x='1216' y='684' fontSize='13' fill='#8A9AAA' textAnchor='end' fontFamily='Microsoft YaHei'&gt;单元 20 · 第 105 节&lt;/text&gt;&#13;&#10;        &lt;/svg&gt;&#13;&#10;    &lt;/Box&gt;&#13;&#10;&lt;/Slide&gt;&#13;&#10;"/>
         <p:cNvGrpSpPr/>
         <p:nvPr/>
       </p:nvGrpSpPr>
@@ -5641,7 +3433,7 @@
   <p:cSld>
     <p:spTree>
       <p:nvGrpSpPr>
-        <p:cNvPr id="81" name="" descr="&lt;Slide style={{ width: '1280px', height: '720px', backgroundColor: '#FAFCFE', padding: 0, position: 'relative', overflow: 'hidden' }}&gt;&#13;&#10;    &lt;Box style={{ position: 'absolute', left: 64, top: 36, width: '1152px', flexDirection: 'row', alignItems: 'center', gap: 12 }}&gt;&#13;&#10;        &lt;Box style={{ background: '#0E9B78', borderRadius: 5, padding: '3px 11px' }}&gt;&#13;&#10;            &lt;Text style={{ fontSize: 14, fontWeight: 'bold', color: '#FFFFFF' }}&gt;第 106 节&lt;/Text&gt;&#13;&#10;        &lt;/Box&gt;&#13;&#10;        &lt;Text style={{ fontSize: 30, fontWeight: 'bold', color: '#16232E' }}&gt;核心知识点&lt;/Text&gt;&#13;&#10;        &lt;Text style={{ fontSize: 15, color: '#5A6B7A', marginTop: 10 }}&gt;· ★ 三大部署坑&lt;/Text&gt;&#13;&#10;    &lt;/Box&gt;&#13;&#10;    &lt;Box style={{ position: 'absolute', left: 0, top: 0, width: '1280px', height: '720px' }}&gt;&#13;&#10;        &lt;svg width='1280' height='720' viewBox='0 0 1280 720'&gt;&#13;&#10;            &lt;rect x='64' y='96' width='548' height='330' rx='12' fill='#FFFFFF' stroke='#D8E3EE' /&gt;&lt;rect x='64' y='96' width='548' height='4' rx='2' fill='#1F5FA8' /&gt;&lt;text x='82' y='130' fontSize='15.5' fontWeight='bold' fill='#1F5FA8' textAnchor='start' fontFamily='Microsoft YaHei'&gt;2.7 三大部署坑：ALLOWED_HOSTS、colle…&lt;/text&gt;&lt;text x='82' y='169.0' fontSize='13' fill='#3A4A58' textAnchor='start' fontFamily='Microsoft YaHei'&gt;· 坑一：ALLOWED_HOSTS 不改，线上直接 400。 Django 会检查每个请求的 Host…&lt;/text&gt;&lt;text x='82' y='197.5' fontSize='13' fill='#3A4A58' textAnchor='start' fontFamily='Microsoft YaHei'&gt;· 坑二：DEBUG = False 之后，不 collectstatic 就是一个白脸页面。 DEBUG…&lt;/text&gt;&lt;text x='82' y='226.0' fontSize='13' fill='#3A4A58' textAnchor='start' fontFamily='Microsoft YaHei'&gt;· 坑三：把本地数据库和虚拟环境传上云。 必须写 .gitignore：&lt;/text&gt;&lt;rect x='668' y='96' width='548' height='330' rx='12' fill='#FFFFFF' stroke='#D8E3EE' /&gt;&lt;rect x='668' y='96' width='548' height='4' rx='2' fill='#1F5FA8' /&gt;&lt;text x='686' y='130' fontSize='15.5' fontWeight='bold' fill='#1F5FA8' textAnchor='start' fontFamily='Microsoft YaHei'&gt;2.8 定制错误页面与「继续开发」（对应教材 20.2）&lt;/text&gt;&lt;text x='686' y='169.0' fontSize='13' fill='#3A4A58' textAnchor='start' fontFamily='Microsoft YaHei'&gt;· 如果想更精细地控制错误行为（比如 404 时也要查数据库、按不同错误码返回不同页面&lt;/text&gt;&lt;text x='686' y='188.5' fontSize='13' fill='#3A4A58' textAnchor='start' fontFamily='Microsoft YaHei'&gt;），可以在 urls…&lt;/text&gt;&lt;text x='686' y='217.0' fontSize='13' fill='#3A4A58' textAnchor='start' fontFamily='Microsoft YaHei'&gt;· 「继续开发」的流程是部署之后最重要的工作流。首次上线只是开始，之后每次改 bug&lt;/text&gt;&lt;text x='686' y='236.5' fontSize='13' fill='#3A4A58' textAnchor='start' fontFamily='Microsoft YaHei'&gt;、加功能，都是这一个循…&lt;/text&gt;&lt;text x='686' y='265.0' fontSize='13' fill='#3A4A58' textAnchor='start' fontFamily='Microsoft YaHei'&gt;· 你的代码库里同时住着两个环境，git 提交是本地唯一的真相来源，platform push 是&lt;/text&gt;&lt;text x='686' y='284.5' fontSize='13' fill='#3A4A58' textAnchor='start' fontFamily='Microsoft YaHei'&gt;把真相同…&lt;/text&gt;&lt;text x='64' y='470' fontSize='14.5' fontWeight='bold' fill='#0E9B78' textAnchor='start' fontFamily='Microsoft YaHei'&gt;本节的代码示例&lt;/text&gt;&lt;text x='64' y='500' fontSize='13' fill='#3A4A58' textAnchor='start' fontFamily='Microsoft YaHei'&gt;· 同一份代码，两个环境（config_switcher.py）&lt;/text&gt;&lt;text x='468' y='500' fontSize='13' fill='#3A4A58' textAnchor='start' fontFamily='Microsoft YaHei'&gt;· 给 requirements.txt 做入职体检（requirem…&lt;/text&gt;&lt;text x='872' y='500' fontSize='13' fill='#3A4A58' textAnchor='start' fontFamily='Microsoft YaHei'&gt;· 400 Bad Request 是怎么来的（host_check.…&lt;/text&gt;&lt;rect x='64' y='574' width='1152' height='66' rx='12' fill='#EEF5FB' /&gt;&lt;text x='84' y='616' fontSize='14' fill='#243444' textAnchor='start' fontFamily='Microsoft YaHei'&gt;看不懂的地方先回讲义对应小节读一遍，再回来对着这页复述一次——能讲出来才算真懂。&lt;/text&gt;&#13;&#10;            &lt;text x='64' y='684' fontSize='13' fill='#8A9AAA' fontFamily='Microsoft YaHei'&gt;Python 讲授课件 · 逐节版&lt;/text&gt;&#13;&#10;            &lt;text x='1216' y='684' fontSize='13' fill='#8A9AAA' textAnchor='end' fontFamily='Microsoft YaHei'&gt;单元 20 · 第 106 节&lt;/text&gt;&#13;&#10;        &lt;/svg&gt;&#13;&#10;    &lt;/Box&gt;&#13;&#10;&lt;/Slide&gt;&#13;&#10;"/>
+        <p:cNvPr id="81" name="" descr="&lt;Slide style={{ width: '1280px', height: '720px', backgroundColor: '#FAFCFE', padding: 0, position: 'relative', overflow: 'hidden' }}&gt;&#13;&#10;    &lt;Box style={{ position: 'absolute', left: 64, top: 36, width: '1152px', flexDirection: 'row', alignItems: 'center', gap: 12 }}&gt;&#13;&#10;        &lt;Box style={{ background: '#0E9B78', borderRadius: 5, padding: '3px 11px' }}&gt;&#13;&#10;            &lt;Text style={{ fontSize: 14, fontWeight: 'bold', color: '#FFFFFF' }}&gt;第 106 节&lt;/Text&gt;&#13;&#10;        &lt;/Box&gt;&#13;&#10;        &lt;Text style={{ fontSize: 30, fontWeight: 'bold', color: '#16232E' }}&gt;核心知识点&lt;/Text&gt;&#13;&#10;        &lt;Text style={{ fontSize: 15, color: '#5A6B7A', marginTop: 10 }}&gt;· ★ 三大部署坑&lt;/Text&gt;&#13;&#10;    &lt;/Box&gt;&#13;&#10;    &lt;Box style={{ position: 'absolute', left: 0, top: 0, width: '1280px', height: '720px' }}&gt;&#13;&#10;        &lt;svg width='1280' height='720' viewBox='0 0 1280 720'&gt;&#13;&#10;            &lt;rect x='64' y='96' width='548' height='330' rx='12' fill='#FFFFFF' stroke='#D8E3EE' /&gt;&lt;rect x='64' y='96' width='548' height='4' rx='2' fill='#1F5FA8' /&gt;&lt;text x='82' y='130' fontSize='15.5' fontWeight='bold' fill='#1F5FA8' textAnchor='start' fontFamily='Microsoft YaHei'&gt;2.7 三大部署坑：ALLOWED_HOSTS…&lt;/text&gt;&lt;text x='82' y='169.0' fontSize='13' fill='#3A4A58' textAnchor='start' fontFamily='Microsoft YaHei'&gt;· 坑一：ALLOWED_HOSTS 不改，线上直接 400。&lt;/text&gt;&lt;text x='82' y='197.5' fontSize='13' fill='#3A4A58' textAnchor='start' fontFamily='Microsoft YaHei'&gt;· 坑二：DEBUG = False 之后，不 collectstatic 就是一个白脸页面。&lt;/text&gt;&lt;text x='82' y='226.0' fontSize='13' fill='#3A4A58' textAnchor='start' fontFamily='Microsoft YaHei'&gt;· 坑三：把本地数据库和虚拟环境传上云。&lt;/text&gt;&lt;rect x='668' y='96' width='548' height='330' rx='12' fill='#FFFFFF' stroke='#D8E3EE' /&gt;&lt;rect x='668' y='96' width='548' height='4' rx='2' fill='#1F5FA8' /&gt;&lt;text x='686' y='130' fontSize='15.5' fontWeight='bold' fill='#1F5FA8' textAnchor='start' fontFamily='Microsoft YaHei'&gt;2.8 定制错误页面与「继续开发」（对应教材 20.2）&lt;/text&gt;&lt;text x='686' y='169.0' fontSize='13' fill='#3A4A58' textAnchor='start' fontFamily='Microsoft YaHei'&gt;· 如果想更精细地控制错误行为&lt;/text&gt;&lt;text x='686' y='197.5' fontSize='13' fill='#3A4A58' textAnchor='start' fontFamily='Microsoft YaHei'&gt;· 「继续开发」的流程&lt;/text&gt;&lt;text x='686' y='226.0' fontSize='13' fill='#3A4A58' textAnchor='start' fontFamily='Microsoft YaHei'&gt;· 你的代码库里同时住着两个环境，git 提交是本地唯一的真相来源…&lt;/text&gt;&lt;text x='64' y='470' fontSize='14.5' fontWeight='bold' fill='#0E9B78' textAnchor='start' fontFamily='Microsoft YaHei'&gt;本节的代码示例&lt;/text&gt;&lt;text x='64' y='500' fontSize='13' fill='#3A4A58' textAnchor='start' fontFamily='Microsoft YaHei'&gt;· 同一份代码，两个环境（config_switcher.py）&lt;/text&gt;&lt;text x='468' y='500' fontSize='13' fill='#3A4A58' textAnchor='start' fontFamily='Microsoft YaHei'&gt;· 给 requirements.txt 做入职体检（requirem…&lt;/text&gt;&lt;text x='872' y='500' fontSize='13' fill='#3A4A58' textAnchor='start' fontFamily='Microsoft YaHei'&gt;· 400 Bad Request 是怎么来的（host_check.…&lt;/text&gt;&lt;rect x='64' y='574' width='1152' height='66' rx='12' fill='#EEF5FB' /&gt;&lt;text x='84' y='616' fontSize='14' fill='#243444' textAnchor='start' fontFamily='Microsoft YaHei'&gt;看不懂的地方先回讲义对应小节读一遍，再回来对着这页复述一次——能讲出来才算真懂。&lt;/text&gt;&#13;&#10;            &lt;text x='64' y='684' fontSize='13' fill='#8A9AAA' fontFamily='Microsoft YaHei'&gt;Python 讲授课件 · 逐节版&lt;/text&gt;&#13;&#10;            &lt;text x='1216' y='684' fontSize='13' fill='#8A9AAA' textAnchor='end' fontFamily='Microsoft YaHei'&gt;单元 20 · 第 106 节&lt;/text&gt;&#13;&#10;        &lt;/svg&gt;&#13;&#10;    &lt;/Box&gt;&#13;&#10;&lt;/Slide&gt;&#13;&#10;"/>
         <p:cNvGrpSpPr/>
         <p:nvPr/>
       </p:nvGrpSpPr>

--- a/python-course-ppt/逐节课件/Python讲授课件-单元20.pptx
+++ b/python-course-ppt/逐节课件/Python讲授课件-单元20.pptx
@@ -236,6 +236,1260 @@
     </a:lvl9pPr>
   </p:notesStyle>
 </p:notesMaster>
+</file>
+
+<file path=ppt/notesSlides/notesSlide1.xml><?xml version="1.0" encoding="utf-8"?>
+<p:notes xmlns:a="http://schemas.openxmlformats.org/drawingml/2006/main" xmlns:p="http://schemas.openxmlformats.org/presentationml/2006/main" xmlns:r="http://schemas.openxmlformats.org/officeDocument/2006/relationships">
+  <p:cSld>
+    <p:spTree>
+      <p:nvGrpSpPr>
+        <p:cNvPr id="1" name=""/>
+        <p:cNvGrpSpPr/>
+        <p:nvPr/>
+      </p:nvGrpSpPr>
+      <p:grpSpPr>
+        <a:xfrm>
+          <a:off x="0" y="0"/>
+          <a:ext cx="0" cy="0"/>
+          <a:chOff x="0" y="0"/>
+          <a:chExt cx="0" cy="0"/>
+        </a:xfrm>
+      </p:grpSpPr>
+      <p:sp>
+        <p:nvSpPr>
+          <p:cNvPr id="2" name="讲课提示"/>
+          <p:cNvSpPr txBox="1"/>
+          <p:nvPr/>
+        </p:nvSpPr>
+        <p:spPr>
+          <a:xfrm>
+            <a:off x="457200" y="457200"/>
+            <a:ext cx="6858000" cy="4800600"/>
+          </a:xfrm>
+          <a:prstGeom prst="rect">
+            <a:avLst/>
+          </a:prstGeom>
+        </p:spPr>
+        <p:txBody>
+          <a:bodyPr wrap="square"/>
+          <a:lstStyle/>
+          <a:p>
+            <a:r>
+              <a:rPr lang="zh-CN" dirty="0"/>
+              <a:t>单元 20 · 单元 20 · 样式与部署</a:t>
+            </a:r>
+          </a:p>
+          <a:p>
+            <a:r>
+              <a:rPr lang="zh-CN" dirty="0"/>
+              <a:t/>
+            </a:r>
+          </a:p>
+          <a:p>
+            <a:r>
+              <a:rPr lang="zh-CN" dirty="0"/>
+              <a:t>本单元包含以下课节：</a:t>
+            </a:r>
+          </a:p>
+          <a:p>
+            <a:r>
+              <a:rPr lang="zh-CN" dirty="0"/>
+              <a:t>· 第 103 节 django-bootstrap5 与页面改造</a:t>
+            </a:r>
+          </a:p>
+          <a:p>
+            <a:r>
+              <a:rPr lang="zh-CN" dirty="0"/>
+              <a:t>· 第 104 节 部署是什么与 requirements.txt</a:t>
+            </a:r>
+          </a:p>
+          <a:p>
+            <a:r>
+              <a:rPr lang="zh-CN" dirty="0"/>
+              <a:t>· 第 105 节 ★ platformshconfig 与本地线上双环境</a:t>
+            </a:r>
+          </a:p>
+          <a:p>
+            <a:r>
+              <a:rPr lang="zh-CN" dirty="0"/>
+              <a:t>· 第 106 节 ★ 三大部署坑</a:t>
+            </a:r>
+          </a:p>
+          <a:p>
+            <a:r>
+              <a:rPr lang="zh-CN" dirty="0"/>
+              <a:t>· 第 107 节 部署上线、错误页与实战</a:t>
+            </a:r>
+          </a:p>
+          <a:p>
+            <a:r>
+              <a:rPr lang="zh-CN" dirty="0"/>
+              <a:t/>
+            </a:r>
+          </a:p>
+          <a:p>
+            <a:r>
+              <a:rPr lang="zh-CN" dirty="0"/>
+              <a:t>开场用 3 分钟讲清：这个单元学完能做出什么，最后会被关卡怎么验。</a:t>
+            </a:r>
+          </a:p>
+        </p:txBody>
+      </p:sp>
+    </p:spTree>
+  </p:cSld>
+  <p:clrMapOvr>
+    <a:masterClrMapping/>
+  </p:clrMapOvr>
+</p:notes>
+</file>
+
+<file path=ppt/notesSlides/notesSlide10.xml><?xml version="1.0" encoding="utf-8"?>
+<p:notes xmlns:a="http://schemas.openxmlformats.org/drawingml/2006/main" xmlns:p="http://schemas.openxmlformats.org/presentationml/2006/main" xmlns:r="http://schemas.openxmlformats.org/officeDocument/2006/relationships">
+  <p:cSld>
+    <p:spTree>
+      <p:nvGrpSpPr>
+        <p:cNvPr id="1" name=""/>
+        <p:cNvGrpSpPr/>
+        <p:nvPr/>
+      </p:nvGrpSpPr>
+      <p:grpSpPr>
+        <a:xfrm>
+          <a:off x="0" y="0"/>
+          <a:ext cx="0" cy="0"/>
+          <a:chOff x="0" y="0"/>
+          <a:chExt cx="0" cy="0"/>
+        </a:xfrm>
+      </p:grpSpPr>
+      <p:sp>
+        <p:nvSpPr>
+          <p:cNvPr id="2" name="讲课提示"/>
+          <p:cNvSpPr txBox="1"/>
+          <p:nvPr/>
+        </p:nvSpPr>
+        <p:spPr>
+          <a:xfrm>
+            <a:off x="457200" y="457200"/>
+            <a:ext cx="6858000" cy="4800600"/>
+          </a:xfrm>
+          <a:prstGeom prst="rect">
+            <a:avLst/>
+          </a:prstGeom>
+        </p:spPr>
+        <p:txBody>
+          <a:bodyPr wrap="square"/>
+          <a:lstStyle/>
+          <a:p>
+            <a:r>
+              <a:rPr lang="zh-CN" dirty="0"/>
+              <a:t>第 107 节 · 部署上线、错误页与实战</a:t>
+            </a:r>
+          </a:p>
+          <a:p>
+            <a:r>
+              <a:rPr lang="zh-CN" dirty="0"/>
+              <a:t>单元 20 · 样式与部署 · W28</a:t>
+            </a:r>
+          </a:p>
+          <a:p>
+            <a:r>
+              <a:rPr lang="zh-CN" dirty="0"/>
+              <a:t/>
+            </a:r>
+          </a:p>
+          <a:p>
+            <a:r>
+              <a:rPr lang="zh-CN" dirty="0"/>
+              <a:t>学习目标：真正把网站推到公网；会定制 404/500 错误页</a:t>
+            </a:r>
+          </a:p>
+          <a:p>
+            <a:r>
+              <a:rPr lang="zh-CN" dirty="0"/>
+              <a:t/>
+            </a:r>
+          </a:p>
+          <a:p>
+            <a:r>
+              <a:rPr lang="zh-CN" dirty="0"/>
+              <a:t>课堂实操（40 分钟，不看答案）：</a:t>
+            </a:r>
+          </a:p>
+          <a:p>
+            <a:r>
+              <a:rPr lang="zh-CN" dirty="0"/>
+              <a:t>· 走完 Platform.sh 全流程</a:t>
+            </a:r>
+          </a:p>
+          <a:p>
+            <a:r>
+              <a:rPr lang="zh-CN" dirty="0"/>
+              <a:t>· 故意访问不存在的 URL 看定制错误页</a:t>
+            </a:r>
+          </a:p>
+          <a:p>
+            <a:r>
+              <a:rPr lang="zh-CN" dirty="0"/>
+              <a:t/>
+            </a:r>
+          </a:p>
+          <a:p>
+            <a:r>
+              <a:rPr lang="zh-CN" dirty="0"/>
+              <a:t>课后作业：</a:t>
+            </a:r>
+          </a:p>
+          <a:p>
+            <a:r>
+              <a:rPr lang="zh-CN" dirty="0"/>
+              <a:t>· ★ 产出：公网可访问的学习笔记 + 定制错误页</a:t>
+            </a:r>
+          </a:p>
+          <a:p>
+            <a:r>
+              <a:rPr lang="zh-CN" dirty="0"/>
+              <a:t/>
+            </a:r>
+          </a:p>
+          <a:p>
+            <a:r>
+              <a:rPr lang="zh-CN" dirty="0"/>
+              <a:t>节奏：讲 20 分钟 → 学员自己敲 40 分钟（不看答案）→ 对讲评自查 20 分钟 → 写作业 10 分钟。</a:t>
+            </a:r>
+          </a:p>
+        </p:txBody>
+      </p:sp>
+    </p:spTree>
+  </p:cSld>
+  <p:clrMapOvr>
+    <a:masterClrMapping/>
+  </p:clrMapOvr>
+</p:notes>
+</file>
+
+<file path=ppt/notesSlides/notesSlide11.xml><?xml version="1.0" encoding="utf-8"?>
+<p:notes xmlns:a="http://schemas.openxmlformats.org/drawingml/2006/main" xmlns:p="http://schemas.openxmlformats.org/presentationml/2006/main" xmlns:r="http://schemas.openxmlformats.org/officeDocument/2006/relationships">
+  <p:cSld>
+    <p:spTree>
+      <p:nvGrpSpPr>
+        <p:cNvPr id="1" name=""/>
+        <p:cNvGrpSpPr/>
+        <p:nvPr/>
+      </p:nvGrpSpPr>
+      <p:grpSpPr>
+        <a:xfrm>
+          <a:off x="0" y="0"/>
+          <a:ext cx="0" cy="0"/>
+          <a:chOff x="0" y="0"/>
+          <a:chExt cx="0" cy="0"/>
+        </a:xfrm>
+      </p:grpSpPr>
+      <p:sp>
+        <p:nvSpPr>
+          <p:cNvPr id="2" name="讲课提示"/>
+          <p:cNvSpPr txBox="1"/>
+          <p:nvPr/>
+        </p:nvSpPr>
+        <p:spPr>
+          <a:xfrm>
+            <a:off x="457200" y="457200"/>
+            <a:ext cx="6858000" cy="4800600"/>
+          </a:xfrm>
+          <a:prstGeom prst="rect">
+            <a:avLst/>
+          </a:prstGeom>
+        </p:spPr>
+        <p:txBody>
+          <a:bodyPr wrap="square"/>
+          <a:lstStyle/>
+          <a:p>
+            <a:r>
+              <a:rPr lang="zh-CN" dirty="0"/>
+              <a:t>第 107 节 · 核心知识点：部署上线、错误页与实战</a:t>
+            </a:r>
+          </a:p>
+          <a:p>
+            <a:r>
+              <a:rPr lang="zh-CN" dirty="0"/>
+              <a:t/>
+            </a:r>
+          </a:p>
+          <a:p>
+            <a:r>
+              <a:rPr lang="zh-CN" dirty="0"/>
+              <a:t>讲这一页时：先让学生说出上节课的结论，再逐块讲要点。</a:t>
+            </a:r>
+          </a:p>
+          <a:p>
+            <a:r>
+              <a:rPr lang="zh-CN" dirty="0"/>
+              <a:t>每讲完一块，问一句「这一步如果写错了，报错会长什么样？」——把错误提前讲。</a:t>
+            </a:r>
+          </a:p>
+          <a:p>
+            <a:r>
+              <a:rPr lang="zh-CN" dirty="0"/>
+              <a:t/>
+            </a:r>
+          </a:p>
+          <a:p>
+            <a:r>
+              <a:rPr lang="zh-CN" dirty="0"/>
+              <a:t>本节目标：真正把网站推到公网；会定制 404/500 错误页</a:t>
+            </a:r>
+          </a:p>
+          <a:p>
+            <a:r>
+              <a:rPr lang="zh-CN" dirty="0"/>
+              <a:t/>
+            </a:r>
+          </a:p>
+          <a:p>
+            <a:r>
+              <a:rPr lang="zh-CN" dirty="0"/>
+              <a:t>看不到懂的地方，回讲义对应小节读一遍，再回来对着这页复述一次——能讲出来才算真懂。</a:t>
+            </a:r>
+          </a:p>
+        </p:txBody>
+      </p:sp>
+    </p:spTree>
+  </p:cSld>
+  <p:clrMapOvr>
+    <a:masterClrMapping/>
+  </p:clrMapOvr>
+</p:notes>
+</file>
+
+<file path=ppt/notesSlides/notesSlide12.xml><?xml version="1.0" encoding="utf-8"?>
+<p:notes xmlns:a="http://schemas.openxmlformats.org/drawingml/2006/main" xmlns:p="http://schemas.openxmlformats.org/presentationml/2006/main" xmlns:r="http://schemas.openxmlformats.org/officeDocument/2006/relationships">
+  <p:cSld>
+    <p:spTree>
+      <p:nvGrpSpPr>
+        <p:cNvPr id="1" name=""/>
+        <p:cNvGrpSpPr/>
+        <p:nvPr/>
+      </p:nvGrpSpPr>
+      <p:grpSpPr>
+        <a:xfrm>
+          <a:off x="0" y="0"/>
+          <a:ext cx="0" cy="0"/>
+          <a:chOff x="0" y="0"/>
+          <a:chExt cx="0" cy="0"/>
+        </a:xfrm>
+      </p:grpSpPr>
+      <p:sp>
+        <p:nvSpPr>
+          <p:cNvPr id="2" name="讲课提示"/>
+          <p:cNvSpPr txBox="1"/>
+          <p:nvPr/>
+        </p:nvSpPr>
+        <p:spPr>
+          <a:xfrm>
+            <a:off x="457200" y="457200"/>
+            <a:ext cx="6858000" cy="4800600"/>
+          </a:xfrm>
+          <a:prstGeom prst="rect">
+            <a:avLst/>
+          </a:prstGeom>
+        </p:spPr>
+        <p:txBody>
+          <a:bodyPr wrap="square"/>
+          <a:lstStyle/>
+          <a:p>
+            <a:r>
+              <a:rPr lang="zh-CN" dirty="0"/>
+              <a:t>单元 20 小结 · 单元 20 · 小结</a:t>
+            </a:r>
+          </a:p>
+          <a:p>
+            <a:r>
+              <a:rPr lang="zh-CN" dirty="0"/>
+              <a:t/>
+            </a:r>
+          </a:p>
+          <a:p>
+            <a:r>
+              <a:rPr lang="zh-CN" dirty="0"/>
+              <a:t>收尾动作：让学生合上讲义，口述本单元三个最重要的结论；说不出来的，回对应课节。</a:t>
+            </a:r>
+          </a:p>
+          <a:p>
+            <a:r>
+              <a:rPr lang="zh-CN" dirty="0"/>
+              <a:t>然后当场勾一遍本单元课节的「已完成」，没打勾的进下一单元前补掉。</a:t>
+            </a:r>
+          </a:p>
+        </p:txBody>
+      </p:sp>
+    </p:spTree>
+  </p:cSld>
+  <p:clrMapOvr>
+    <a:masterClrMapping/>
+  </p:clrMapOvr>
+</p:notes>
+</file>
+
+<file path=ppt/notesSlides/notesSlide2.xml><?xml version="1.0" encoding="utf-8"?>
+<p:notes xmlns:a="http://schemas.openxmlformats.org/drawingml/2006/main" xmlns:p="http://schemas.openxmlformats.org/presentationml/2006/main" xmlns:r="http://schemas.openxmlformats.org/officeDocument/2006/relationships">
+  <p:cSld>
+    <p:spTree>
+      <p:nvGrpSpPr>
+        <p:cNvPr id="1" name=""/>
+        <p:cNvGrpSpPr/>
+        <p:nvPr/>
+      </p:nvGrpSpPr>
+      <p:grpSpPr>
+        <a:xfrm>
+          <a:off x="0" y="0"/>
+          <a:ext cx="0" cy="0"/>
+          <a:chOff x="0" y="0"/>
+          <a:chExt cx="0" cy="0"/>
+        </a:xfrm>
+      </p:grpSpPr>
+      <p:sp>
+        <p:nvSpPr>
+          <p:cNvPr id="2" name="讲课提示"/>
+          <p:cNvSpPr txBox="1"/>
+          <p:nvPr/>
+        </p:nvSpPr>
+        <p:spPr>
+          <a:xfrm>
+            <a:off x="457200" y="457200"/>
+            <a:ext cx="6858000" cy="4800600"/>
+          </a:xfrm>
+          <a:prstGeom prst="rect">
+            <a:avLst/>
+          </a:prstGeom>
+        </p:spPr>
+        <p:txBody>
+          <a:bodyPr wrap="square"/>
+          <a:lstStyle/>
+          <a:p>
+            <a:r>
+              <a:rPr lang="zh-CN" dirty="0"/>
+              <a:t>第 103 节 · django-bootstrap5 与页面改造</a:t>
+            </a:r>
+          </a:p>
+          <a:p>
+            <a:r>
+              <a:rPr lang="zh-CN" dirty="0"/>
+              <a:t>单元 20 · 样式与部署 · W26–W27</a:t>
+            </a:r>
+          </a:p>
+          <a:p>
+            <a:r>
+              <a:rPr lang="zh-CN" dirty="0"/>
+              <a:t/>
+            </a:r>
+          </a:p>
+          <a:p>
+            <a:r>
+              <a:rPr lang="zh-CN" dirty="0"/>
+              <a:t>学习目标：会用 `{% bootstrap_form %}` 自动渲染表单；会改 base.html 与各页面</a:t>
+            </a:r>
+          </a:p>
+          <a:p>
+            <a:r>
+              <a:rPr lang="zh-CN" dirty="0"/>
+              <a:t/>
+            </a:r>
+          </a:p>
+          <a:p>
+            <a:r>
+              <a:rPr lang="zh-CN" dirty="0"/>
+              <a:t>课堂实操（40 分钟，不看答案）：</a:t>
+            </a:r>
+          </a:p>
+          <a:p>
+            <a:r>
+              <a:rPr lang="zh-CN" dirty="0"/>
+              <a:t>· 装上 django-bootstrap5 并渲染表单</a:t>
+            </a:r>
+          </a:p>
+          <a:p>
+            <a:r>
+              <a:rPr lang="zh-CN" dirty="0"/>
+              <a:t>· 故意把 jumbotron 类去掉看效果</a:t>
+            </a:r>
+          </a:p>
+          <a:p>
+            <a:r>
+              <a:rPr lang="zh-CN" dirty="0"/>
+              <a:t/>
+            </a:r>
+          </a:p>
+          <a:p>
+            <a:r>
+              <a:rPr lang="zh-CN" dirty="0"/>
+              <a:t>课后作业：</a:t>
+            </a:r>
+          </a:p>
+          <a:p>
+            <a:r>
+              <a:rPr lang="zh-CN" dirty="0"/>
+              <a:t>· 完成教材 20.1 全部动手练</a:t>
+            </a:r>
+          </a:p>
+          <a:p>
+            <a:r>
+              <a:rPr lang="zh-CN" dirty="0"/>
+              <a:t/>
+            </a:r>
+          </a:p>
+          <a:p>
+            <a:r>
+              <a:rPr lang="zh-CN" dirty="0"/>
+              <a:t>节奏：讲 20 分钟 → 学员自己敲 40 分钟（不看答案）→ 对讲评自查 20 分钟 → 写作业 10 分钟。</a:t>
+            </a:r>
+          </a:p>
+        </p:txBody>
+      </p:sp>
+    </p:spTree>
+  </p:cSld>
+  <p:clrMapOvr>
+    <a:masterClrMapping/>
+  </p:clrMapOvr>
+</p:notes>
+</file>
+
+<file path=ppt/notesSlides/notesSlide3.xml><?xml version="1.0" encoding="utf-8"?>
+<p:notes xmlns:a="http://schemas.openxmlformats.org/drawingml/2006/main" xmlns:p="http://schemas.openxmlformats.org/presentationml/2006/main" xmlns:r="http://schemas.openxmlformats.org/officeDocument/2006/relationships">
+  <p:cSld>
+    <p:spTree>
+      <p:nvGrpSpPr>
+        <p:cNvPr id="1" name=""/>
+        <p:cNvGrpSpPr/>
+        <p:nvPr/>
+      </p:nvGrpSpPr>
+      <p:grpSpPr>
+        <a:xfrm>
+          <a:off x="0" y="0"/>
+          <a:ext cx="0" cy="0"/>
+          <a:chOff x="0" y="0"/>
+          <a:chExt cx="0" cy="0"/>
+        </a:xfrm>
+      </p:grpSpPr>
+      <p:sp>
+        <p:nvSpPr>
+          <p:cNvPr id="2" name="讲课提示"/>
+          <p:cNvSpPr txBox="1"/>
+          <p:nvPr/>
+        </p:nvSpPr>
+        <p:spPr>
+          <a:xfrm>
+            <a:off x="457200" y="457200"/>
+            <a:ext cx="6858000" cy="4800600"/>
+          </a:xfrm>
+          <a:prstGeom prst="rect">
+            <a:avLst/>
+          </a:prstGeom>
+        </p:spPr>
+        <p:txBody>
+          <a:bodyPr wrap="square"/>
+          <a:lstStyle/>
+          <a:p>
+            <a:r>
+              <a:rPr lang="zh-CN" dirty="0"/>
+              <a:t>第 103 节 · 核心知识点：django-bootstrap5 与页面改造</a:t>
+            </a:r>
+          </a:p>
+          <a:p>
+            <a:r>
+              <a:rPr lang="zh-CN" dirty="0"/>
+              <a:t/>
+            </a:r>
+          </a:p>
+          <a:p>
+            <a:r>
+              <a:rPr lang="zh-CN" dirty="0"/>
+              <a:t>讲这一页时：先让学生说出上节课的结论，再逐块讲要点。</a:t>
+            </a:r>
+          </a:p>
+          <a:p>
+            <a:r>
+              <a:rPr lang="zh-CN" dirty="0"/>
+              <a:t>每讲完一块，问一句「这一步如果写错了，报错会长什么样？」——把错误提前讲。</a:t>
+            </a:r>
+          </a:p>
+          <a:p>
+            <a:r>
+              <a:rPr lang="zh-CN" dirty="0"/>
+              <a:t/>
+            </a:r>
+          </a:p>
+          <a:p>
+            <a:r>
+              <a:rPr lang="zh-CN" dirty="0"/>
+              <a:t>本节目标：会用 `{% bootstrap_form %}` 自动渲染表单；会改 base.html 与各页面</a:t>
+            </a:r>
+          </a:p>
+          <a:p>
+            <a:r>
+              <a:rPr lang="zh-CN" dirty="0"/>
+              <a:t/>
+            </a:r>
+          </a:p>
+          <a:p>
+            <a:r>
+              <a:rPr lang="zh-CN" dirty="0"/>
+              <a:t>看不到懂的地方，回讲义对应小节读一遍，再回来对着这页复述一次——能讲出来才算真懂。</a:t>
+            </a:r>
+          </a:p>
+        </p:txBody>
+      </p:sp>
+    </p:spTree>
+  </p:cSld>
+  <p:clrMapOvr>
+    <a:masterClrMapping/>
+  </p:clrMapOvr>
+</p:notes>
+</file>
+
+<file path=ppt/notesSlides/notesSlide4.xml><?xml version="1.0" encoding="utf-8"?>
+<p:notes xmlns:a="http://schemas.openxmlformats.org/drawingml/2006/main" xmlns:p="http://schemas.openxmlformats.org/presentationml/2006/main" xmlns:r="http://schemas.openxmlformats.org/officeDocument/2006/relationships">
+  <p:cSld>
+    <p:spTree>
+      <p:nvGrpSpPr>
+        <p:cNvPr id="1" name=""/>
+        <p:cNvGrpSpPr/>
+        <p:nvPr/>
+      </p:nvGrpSpPr>
+      <p:grpSpPr>
+        <a:xfrm>
+          <a:off x="0" y="0"/>
+          <a:ext cx="0" cy="0"/>
+          <a:chOff x="0" y="0"/>
+          <a:chExt cx="0" cy="0"/>
+        </a:xfrm>
+      </p:grpSpPr>
+      <p:sp>
+        <p:nvSpPr>
+          <p:cNvPr id="2" name="讲课提示"/>
+          <p:cNvSpPr txBox="1"/>
+          <p:nvPr/>
+        </p:nvSpPr>
+        <p:spPr>
+          <a:xfrm>
+            <a:off x="457200" y="457200"/>
+            <a:ext cx="6858000" cy="4800600"/>
+          </a:xfrm>
+          <a:prstGeom prst="rect">
+            <a:avLst/>
+          </a:prstGeom>
+        </p:spPr>
+        <p:txBody>
+          <a:bodyPr wrap="square"/>
+          <a:lstStyle/>
+          <a:p>
+            <a:r>
+              <a:rPr lang="zh-CN" dirty="0"/>
+              <a:t>第 104 节 · 部署是什么与 requirements.txt</a:t>
+            </a:r>
+          </a:p>
+          <a:p>
+            <a:r>
+              <a:rPr lang="zh-CN" dirty="0"/>
+              <a:t>单元 20 · 样式与部署 · W27</a:t>
+            </a:r>
+          </a:p>
+          <a:p>
+            <a:r>
+              <a:rPr lang="zh-CN" dirty="0"/>
+              <a:t/>
+            </a:r>
+          </a:p>
+          <a:p>
+            <a:r>
+              <a:rPr lang="zh-CN" dirty="0"/>
+              <a:t>学习目标：理解部署的目标；知道云环境靠 requirements.txt 重建依赖</a:t>
+            </a:r>
+          </a:p>
+          <a:p>
+            <a:r>
+              <a:rPr lang="zh-CN" dirty="0"/>
+              <a:t/>
+            </a:r>
+          </a:p>
+          <a:p>
+            <a:r>
+              <a:rPr lang="zh-CN" dirty="0"/>
+              <a:t>课堂实操（40 分钟，不看答案）：</a:t>
+            </a:r>
+          </a:p>
+          <a:p>
+            <a:r>
+              <a:rPr lang="zh-CN" dirty="0"/>
+              <a:t>· 用 pip freeze 生成 requirements.txt</a:t>
+            </a:r>
+          </a:p>
+          <a:p>
+            <a:r>
+              <a:rPr lang="zh-CN" dirty="0"/>
+              <a:t>· 在一台「干净环境」里装一遍验证</a:t>
+            </a:r>
+          </a:p>
+          <a:p>
+            <a:r>
+              <a:rPr lang="zh-CN" dirty="0"/>
+              <a:t/>
+            </a:r>
+          </a:p>
+          <a:p>
+            <a:r>
+              <a:rPr lang="zh-CN" dirty="0"/>
+              <a:t>课后作业：</a:t>
+            </a:r>
+          </a:p>
+          <a:p>
+            <a:r>
+              <a:rPr lang="zh-CN" dirty="0"/>
+              <a:t>· 产出：requirements.txt 与 .platform 配置文件</a:t>
+            </a:r>
+          </a:p>
+          <a:p>
+            <a:r>
+              <a:rPr lang="zh-CN" dirty="0"/>
+              <a:t/>
+            </a:r>
+          </a:p>
+          <a:p>
+            <a:r>
+              <a:rPr lang="zh-CN" dirty="0"/>
+              <a:t>节奏：讲 20 分钟 → 学员自己敲 40 分钟（不看答案）→ 对讲评自查 20 分钟 → 写作业 10 分钟。</a:t>
+            </a:r>
+          </a:p>
+        </p:txBody>
+      </p:sp>
+    </p:spTree>
+  </p:cSld>
+  <p:clrMapOvr>
+    <a:masterClrMapping/>
+  </p:clrMapOvr>
+</p:notes>
+</file>
+
+<file path=ppt/notesSlides/notesSlide5.xml><?xml version="1.0" encoding="utf-8"?>
+<p:notes xmlns:a="http://schemas.openxmlformats.org/drawingml/2006/main" xmlns:p="http://schemas.openxmlformats.org/presentationml/2006/main" xmlns:r="http://schemas.openxmlformats.org/officeDocument/2006/relationships">
+  <p:cSld>
+    <p:spTree>
+      <p:nvGrpSpPr>
+        <p:cNvPr id="1" name=""/>
+        <p:cNvGrpSpPr/>
+        <p:nvPr/>
+      </p:nvGrpSpPr>
+      <p:grpSpPr>
+        <a:xfrm>
+          <a:off x="0" y="0"/>
+          <a:ext cx="0" cy="0"/>
+          <a:chOff x="0" y="0"/>
+          <a:chExt cx="0" cy="0"/>
+        </a:xfrm>
+      </p:grpSpPr>
+      <p:sp>
+        <p:nvSpPr>
+          <p:cNvPr id="2" name="讲课提示"/>
+          <p:cNvSpPr txBox="1"/>
+          <p:nvPr/>
+        </p:nvSpPr>
+        <p:spPr>
+          <a:xfrm>
+            <a:off x="457200" y="457200"/>
+            <a:ext cx="6858000" cy="4800600"/>
+          </a:xfrm>
+          <a:prstGeom prst="rect">
+            <a:avLst/>
+          </a:prstGeom>
+        </p:spPr>
+        <p:txBody>
+          <a:bodyPr wrap="square"/>
+          <a:lstStyle/>
+          <a:p>
+            <a:r>
+              <a:rPr lang="zh-CN" dirty="0"/>
+              <a:t>第 104 节 · 核心知识点：部署是什么与 requirements.txt</a:t>
+            </a:r>
+          </a:p>
+          <a:p>
+            <a:r>
+              <a:rPr lang="zh-CN" dirty="0"/>
+              <a:t/>
+            </a:r>
+          </a:p>
+          <a:p>
+            <a:r>
+              <a:rPr lang="zh-CN" dirty="0"/>
+              <a:t>讲这一页时：先让学生说出上节课的结论，再逐块讲要点。</a:t>
+            </a:r>
+          </a:p>
+          <a:p>
+            <a:r>
+              <a:rPr lang="zh-CN" dirty="0"/>
+              <a:t>每讲完一块，问一句「这一步如果写错了，报错会长什么样？」——把错误提前讲。</a:t>
+            </a:r>
+          </a:p>
+          <a:p>
+            <a:r>
+              <a:rPr lang="zh-CN" dirty="0"/>
+              <a:t/>
+            </a:r>
+          </a:p>
+          <a:p>
+            <a:r>
+              <a:rPr lang="zh-CN" dirty="0"/>
+              <a:t>本节目标：理解部署的目标；知道云环境靠 requirements.txt 重建依赖</a:t>
+            </a:r>
+          </a:p>
+          <a:p>
+            <a:r>
+              <a:rPr lang="zh-CN" dirty="0"/>
+              <a:t/>
+            </a:r>
+          </a:p>
+          <a:p>
+            <a:r>
+              <a:rPr lang="zh-CN" dirty="0"/>
+              <a:t>看不到懂的地方，回讲义对应小节读一遍，再回来对着这页复述一次——能讲出来才算真懂。</a:t>
+            </a:r>
+          </a:p>
+        </p:txBody>
+      </p:sp>
+    </p:spTree>
+  </p:cSld>
+  <p:clrMapOvr>
+    <a:masterClrMapping/>
+  </p:clrMapOvr>
+</p:notes>
+</file>
+
+<file path=ppt/notesSlides/notesSlide6.xml><?xml version="1.0" encoding="utf-8"?>
+<p:notes xmlns:a="http://schemas.openxmlformats.org/drawingml/2006/main" xmlns:p="http://schemas.openxmlformats.org/presentationml/2006/main" xmlns:r="http://schemas.openxmlformats.org/officeDocument/2006/relationships">
+  <p:cSld>
+    <p:spTree>
+      <p:nvGrpSpPr>
+        <p:cNvPr id="1" name=""/>
+        <p:cNvGrpSpPr/>
+        <p:nvPr/>
+      </p:nvGrpSpPr>
+      <p:grpSpPr>
+        <a:xfrm>
+          <a:off x="0" y="0"/>
+          <a:ext cx="0" cy="0"/>
+          <a:chOff x="0" y="0"/>
+          <a:chExt cx="0" cy="0"/>
+        </a:xfrm>
+      </p:grpSpPr>
+      <p:sp>
+        <p:nvSpPr>
+          <p:cNvPr id="2" name="讲课提示"/>
+          <p:cNvSpPr txBox="1"/>
+          <p:nvPr/>
+        </p:nvSpPr>
+        <p:spPr>
+          <a:xfrm>
+            <a:off x="457200" y="457200"/>
+            <a:ext cx="6858000" cy="4800600"/>
+          </a:xfrm>
+          <a:prstGeom prst="rect">
+            <a:avLst/>
+          </a:prstGeom>
+        </p:spPr>
+        <p:txBody>
+          <a:bodyPr wrap="square"/>
+          <a:lstStyle/>
+          <a:p>
+            <a:r>
+              <a:rPr lang="zh-CN" dirty="0"/>
+              <a:t>第 105 节 · ★ platformshconfig 与本地线上双环境</a:t>
+            </a:r>
+          </a:p>
+          <a:p>
+            <a:r>
+              <a:rPr lang="zh-CN" dirty="0"/>
+              <a:t>单元 20 · 样式与部署 · W27</a:t>
+            </a:r>
+          </a:p>
+          <a:p>
+            <a:r>
+              <a:rPr lang="zh-CN" dirty="0"/>
+              <a:t/>
+            </a:r>
+          </a:p>
+          <a:p>
+            <a:r>
+              <a:rPr lang="zh-CN" dirty="0"/>
+              <a:t>学习目标：理解同一份代码怎么知道自己在本地还是在云上；会改 settings.py</a:t>
+            </a:r>
+          </a:p>
+          <a:p>
+            <a:r>
+              <a:rPr lang="zh-CN" dirty="0"/>
+              <a:t/>
+            </a:r>
+          </a:p>
+          <a:p>
+            <a:r>
+              <a:rPr lang="zh-CN" dirty="0"/>
+              <a:t>课堂实操（40 分钟，不看答案）：</a:t>
+            </a:r>
+          </a:p>
+          <a:p>
+            <a:r>
+              <a:rPr lang="zh-CN" dirty="0"/>
+              <a:t>· 写 `if os.getenv('PLATFORM_APPLICATION')` 判断分支</a:t>
+            </a:r>
+          </a:p>
+          <a:p>
+            <a:r>
+              <a:rPr lang="zh-CN" dirty="0"/>
+              <a:t>· 本地和「假装线上」各跑一次看差异</a:t>
+            </a:r>
+          </a:p>
+          <a:p>
+            <a:r>
+              <a:rPr lang="zh-CN" dirty="0"/>
+              <a:t/>
+            </a:r>
+          </a:p>
+          <a:p>
+            <a:r>
+              <a:rPr lang="zh-CN" dirty="0"/>
+              <a:t>课后作业：</a:t>
+            </a:r>
+          </a:p>
+          <a:p>
+            <a:r>
+              <a:rPr lang="zh-CN" dirty="0"/>
+              <a:t>· 完成教材 20.2 的配置部分</a:t>
+            </a:r>
+          </a:p>
+          <a:p>
+            <a:r>
+              <a:rPr lang="zh-CN" dirty="0"/>
+              <a:t/>
+            </a:r>
+          </a:p>
+          <a:p>
+            <a:r>
+              <a:rPr lang="zh-CN" dirty="0"/>
+              <a:t>节奏：讲 20 分钟 → 学员自己敲 40 分钟（不看答案）→ 对讲评自查 20 分钟 → 写作业 10 分钟。</a:t>
+            </a:r>
+          </a:p>
+        </p:txBody>
+      </p:sp>
+    </p:spTree>
+  </p:cSld>
+  <p:clrMapOvr>
+    <a:masterClrMapping/>
+  </p:clrMapOvr>
+</p:notes>
+</file>
+
+<file path=ppt/notesSlides/notesSlide7.xml><?xml version="1.0" encoding="utf-8"?>
+<p:notes xmlns:a="http://schemas.openxmlformats.org/drawingml/2006/main" xmlns:p="http://schemas.openxmlformats.org/presentationml/2006/main" xmlns:r="http://schemas.openxmlformats.org/officeDocument/2006/relationships">
+  <p:cSld>
+    <p:spTree>
+      <p:nvGrpSpPr>
+        <p:cNvPr id="1" name=""/>
+        <p:cNvGrpSpPr/>
+        <p:nvPr/>
+      </p:nvGrpSpPr>
+      <p:grpSpPr>
+        <a:xfrm>
+          <a:off x="0" y="0"/>
+          <a:ext cx="0" cy="0"/>
+          <a:chOff x="0" y="0"/>
+          <a:chExt cx="0" cy="0"/>
+        </a:xfrm>
+      </p:grpSpPr>
+      <p:sp>
+        <p:nvSpPr>
+          <p:cNvPr id="2" name="讲课提示"/>
+          <p:cNvSpPr txBox="1"/>
+          <p:nvPr/>
+        </p:nvSpPr>
+        <p:spPr>
+          <a:xfrm>
+            <a:off x="457200" y="457200"/>
+            <a:ext cx="6858000" cy="4800600"/>
+          </a:xfrm>
+          <a:prstGeom prst="rect">
+            <a:avLst/>
+          </a:prstGeom>
+        </p:spPr>
+        <p:txBody>
+          <a:bodyPr wrap="square"/>
+          <a:lstStyle/>
+          <a:p>
+            <a:r>
+              <a:rPr lang="zh-CN" dirty="0"/>
+              <a:t>第 105 节 · 核心知识点：★ platformshconfig 与本地线上双环境</a:t>
+            </a:r>
+          </a:p>
+          <a:p>
+            <a:r>
+              <a:rPr lang="zh-CN" dirty="0"/>
+              <a:t/>
+            </a:r>
+          </a:p>
+          <a:p>
+            <a:r>
+              <a:rPr lang="zh-CN" dirty="0"/>
+              <a:t>讲这一页时：先让学生说出上节课的结论，再逐块讲要点。</a:t>
+            </a:r>
+          </a:p>
+          <a:p>
+            <a:r>
+              <a:rPr lang="zh-CN" dirty="0"/>
+              <a:t>每讲完一块，问一句「这一步如果写错了，报错会长什么样？」——把错误提前讲。</a:t>
+            </a:r>
+          </a:p>
+          <a:p>
+            <a:r>
+              <a:rPr lang="zh-CN" dirty="0"/>
+              <a:t/>
+            </a:r>
+          </a:p>
+          <a:p>
+            <a:r>
+              <a:rPr lang="zh-CN" dirty="0"/>
+              <a:t>本节目标：理解同一份代码怎么知道自己在本地还是在云上；会改 settings.py</a:t>
+            </a:r>
+          </a:p>
+          <a:p>
+            <a:r>
+              <a:rPr lang="zh-CN" dirty="0"/>
+              <a:t/>
+            </a:r>
+          </a:p>
+          <a:p>
+            <a:r>
+              <a:rPr lang="zh-CN" dirty="0"/>
+              <a:t>看不到懂的地方，回讲义对应小节读一遍，再回来对着这页复述一次——能讲出来才算真懂。</a:t>
+            </a:r>
+          </a:p>
+        </p:txBody>
+      </p:sp>
+    </p:spTree>
+  </p:cSld>
+  <p:clrMapOvr>
+    <a:masterClrMapping/>
+  </p:clrMapOvr>
+</p:notes>
+</file>
+
+<file path=ppt/notesSlides/notesSlide8.xml><?xml version="1.0" encoding="utf-8"?>
+<p:notes xmlns:a="http://schemas.openxmlformats.org/drawingml/2006/main" xmlns:p="http://schemas.openxmlformats.org/presentationml/2006/main" xmlns:r="http://schemas.openxmlformats.org/officeDocument/2006/relationships">
+  <p:cSld>
+    <p:spTree>
+      <p:nvGrpSpPr>
+        <p:cNvPr id="1" name=""/>
+        <p:cNvGrpSpPr/>
+        <p:nvPr/>
+      </p:nvGrpSpPr>
+      <p:grpSpPr>
+        <a:xfrm>
+          <a:off x="0" y="0"/>
+          <a:ext cx="0" cy="0"/>
+          <a:chOff x="0" y="0"/>
+          <a:chExt cx="0" cy="0"/>
+        </a:xfrm>
+      </p:grpSpPr>
+      <p:sp>
+        <p:nvSpPr>
+          <p:cNvPr id="2" name="讲课提示"/>
+          <p:cNvSpPr txBox="1"/>
+          <p:nvPr/>
+        </p:nvSpPr>
+        <p:spPr>
+          <a:xfrm>
+            <a:off x="457200" y="457200"/>
+            <a:ext cx="6858000" cy="4800600"/>
+          </a:xfrm>
+          <a:prstGeom prst="rect">
+            <a:avLst/>
+          </a:prstGeom>
+        </p:spPr>
+        <p:txBody>
+          <a:bodyPr wrap="square"/>
+          <a:lstStyle/>
+          <a:p>
+            <a:r>
+              <a:rPr lang="zh-CN" dirty="0"/>
+              <a:t>第 106 节 · ★ 三大部署坑</a:t>
+            </a:r>
+          </a:p>
+          <a:p>
+            <a:r>
+              <a:rPr lang="zh-CN" dirty="0"/>
+              <a:t>单元 20 · 样式与部署 · W27–W28</a:t>
+            </a:r>
+          </a:p>
+          <a:p>
+            <a:r>
+              <a:rPr lang="zh-CN" dirty="0"/>
+              <a:t/>
+            </a:r>
+          </a:p>
+          <a:p>
+            <a:r>
+              <a:rPr lang="zh-CN" dirty="0"/>
+              <a:t>学习目标：记住 ALLOWED_HOSTS / collectstatic / DEBUG 三个坑；能逐条排查</a:t>
+            </a:r>
+          </a:p>
+          <a:p>
+            <a:r>
+              <a:rPr lang="zh-CN" dirty="0"/>
+              <a:t/>
+            </a:r>
+          </a:p>
+          <a:p>
+            <a:r>
+              <a:rPr lang="zh-CN" dirty="0"/>
+              <a:t>课堂实操（40 分钟，不看答案）：</a:t>
+            </a:r>
+          </a:p>
+          <a:p>
+            <a:r>
+              <a:rPr lang="zh-CN" dirty="0"/>
+              <a:t>· 故意不改 ALLOWED_HOSTS 看 400</a:t>
+            </a:r>
+          </a:p>
+          <a:p>
+            <a:r>
+              <a:rPr lang="zh-CN" dirty="0"/>
+              <a:t>· 故意不改 DEBUG 看报错页</a:t>
+            </a:r>
+          </a:p>
+          <a:p>
+            <a:r>
+              <a:rPr lang="zh-CN" dirty="0"/>
+              <a:t/>
+            </a:r>
+          </a:p>
+          <a:p>
+            <a:r>
+              <a:rPr lang="zh-CN" dirty="0"/>
+              <a:t>课后作业：</a:t>
+            </a:r>
+          </a:p>
+          <a:p>
+            <a:r>
+              <a:rPr lang="zh-CN" dirty="0"/>
+              <a:t>· 按上线检查清单逐条过一遍</a:t>
+            </a:r>
+          </a:p>
+          <a:p>
+            <a:r>
+              <a:rPr lang="zh-CN" dirty="0"/>
+              <a:t/>
+            </a:r>
+          </a:p>
+          <a:p>
+            <a:r>
+              <a:rPr lang="zh-CN" dirty="0"/>
+              <a:t>节奏：讲 20 分钟 → 学员自己敲 40 分钟（不看答案）→ 对讲评自查 20 分钟 → 写作业 10 分钟。</a:t>
+            </a:r>
+          </a:p>
+        </p:txBody>
+      </p:sp>
+    </p:spTree>
+  </p:cSld>
+  <p:clrMapOvr>
+    <a:masterClrMapping/>
+  </p:clrMapOvr>
+</p:notes>
+</file>
+
+<file path=ppt/notesSlides/notesSlide9.xml><?xml version="1.0" encoding="utf-8"?>
+<p:notes xmlns:a="http://schemas.openxmlformats.org/drawingml/2006/main" xmlns:p="http://schemas.openxmlformats.org/presentationml/2006/main" xmlns:r="http://schemas.openxmlformats.org/officeDocument/2006/relationships">
+  <p:cSld>
+    <p:spTree>
+      <p:nvGrpSpPr>
+        <p:cNvPr id="1" name=""/>
+        <p:cNvGrpSpPr/>
+        <p:nvPr/>
+      </p:nvGrpSpPr>
+      <p:grpSpPr>
+        <a:xfrm>
+          <a:off x="0" y="0"/>
+          <a:ext cx="0" cy="0"/>
+          <a:chOff x="0" y="0"/>
+          <a:chExt cx="0" cy="0"/>
+        </a:xfrm>
+      </p:grpSpPr>
+      <p:sp>
+        <p:nvSpPr>
+          <p:cNvPr id="2" name="讲课提示"/>
+          <p:cNvSpPr txBox="1"/>
+          <p:nvPr/>
+        </p:nvSpPr>
+        <p:spPr>
+          <a:xfrm>
+            <a:off x="457200" y="457200"/>
+            <a:ext cx="6858000" cy="4800600"/>
+          </a:xfrm>
+          <a:prstGeom prst="rect">
+            <a:avLst/>
+          </a:prstGeom>
+        </p:spPr>
+        <p:txBody>
+          <a:bodyPr wrap="square"/>
+          <a:lstStyle/>
+          <a:p>
+            <a:r>
+              <a:rPr lang="zh-CN" dirty="0"/>
+              <a:t>第 106 节 · 核心知识点：★ 三大部署坑</a:t>
+            </a:r>
+          </a:p>
+          <a:p>
+            <a:r>
+              <a:rPr lang="zh-CN" dirty="0"/>
+              <a:t/>
+            </a:r>
+          </a:p>
+          <a:p>
+            <a:r>
+              <a:rPr lang="zh-CN" dirty="0"/>
+              <a:t>讲这一页时：先让学生说出上节课的结论，再逐块讲要点。</a:t>
+            </a:r>
+          </a:p>
+          <a:p>
+            <a:r>
+              <a:rPr lang="zh-CN" dirty="0"/>
+              <a:t>每讲完一块，问一句「这一步如果写错了，报错会长什么样？」——把错误提前讲。</a:t>
+            </a:r>
+          </a:p>
+          <a:p>
+            <a:r>
+              <a:rPr lang="zh-CN" dirty="0"/>
+              <a:t/>
+            </a:r>
+          </a:p>
+          <a:p>
+            <a:r>
+              <a:rPr lang="zh-CN" dirty="0"/>
+              <a:t>本节目标：记住 ALLOWED_HOSTS / collectstatic / DEBUG 三个坑；能逐条排查</a:t>
+            </a:r>
+          </a:p>
+          <a:p>
+            <a:r>
+              <a:rPr lang="zh-CN" dirty="0"/>
+              <a:t/>
+            </a:r>
+          </a:p>
+          <a:p>
+            <a:r>
+              <a:rPr lang="zh-CN" dirty="0"/>
+              <a:t>看不到懂的地方，回讲义对应小节读一遍，再回来对着这页复述一次——能讲出来才算真懂。</a:t>
+            </a:r>
+          </a:p>
+        </p:txBody>
+      </p:sp>
+    </p:spTree>
+  </p:cSld>
+  <p:clrMapOvr>
+    <a:masterClrMapping/>
+  </p:clrMapOvr>
+</p:notes>
 </file>
 
 <file path=ppt/slideLayouts/slideLayout1.xml><?xml version="1.0" encoding="utf-8"?>
